--- a/automation-bug-lifecycle/deliverables/Automation-Bug-Lifecycle-Standard.pptx
+++ b/automation-bug-lifecycle/deliverables/Automation-Bug-Lifecycle-Standard.pptx
@@ -23,6 +23,11 @@
     <p:sldId id="271" r:id="rId22"/>
     <p:sldId id="272" r:id="rId23"/>
     <p:sldId id="273" r:id="rId24"/>
+    <p:sldId id="274" r:id="rId25"/>
+    <p:sldId id="275" r:id="rId26"/>
+    <p:sldId id="276" r:id="rId27"/>
+    <p:sldId id="277" r:id="rId28"/>
+    <p:sldId id="278" r:id="rId29"/>
   </p:sldIdLst>
   <p:sldSz cx="12191695" cy="6858000" type="screen4x3"/>
   <p:notesSz cx="6858000" cy="9144000"/>
@@ -3302,7 +3307,7 @@
               </a:defRPr>
             </a:pPr>
             <a:r>
-              <a:t>Version July 24, 2026  ·  Applicable to all teams</a:t>
+              <a:t>Version August 3, 2026  ·  Applicable to all teams</a:t>
             </a:r>
           </a:p>
         </p:txBody>
@@ -4128,7 +4133,7 @@
               </a:defRPr>
             </a:pPr>
             <a:r>
-              <a:t>GitLab Project Manager — UI</a:t>
+              <a:t>Prompt H in Plain English</a:t>
             </a:r>
           </a:p>
         </p:txBody>
@@ -4164,7 +4169,7 @@
               </a:defRPr>
             </a:pPr>
             <a:r>
-              <a:t>Change-set investigation tool</a:t>
+              <a:t>One prompt, all deliverables</a:t>
             </a:r>
           </a:p>
         </p:txBody>
@@ -4178,7 +4183,7 @@
         <p:spPr>
           <a:xfrm>
             <a:off x="548640" y="1298448"/>
-            <a:ext cx="4892040" cy="4754880"/>
+            <a:ext cx="11094415" cy="4937760"/>
           </a:xfrm>
           <a:prstGeom prst="rect">
             <a:avLst/>
@@ -4198,7 +4203,7 @@
               <a:spcAft>
                 <a:spcPts val="800"/>
               </a:spcAft>
-              <a:defRPr sz="1400">
+              <a:defRPr sz="1500">
                 <a:solidFill>
                   <a:srgbClr val="1E293B"/>
                 </a:solidFill>
@@ -4206,7 +4211,7 @@
               </a:defRPr>
             </a:pPr>
             <a:r>
-              <a:t>  Local utility: GitLabInfoProjUI (read-only GitLab API)</a:t>
+              <a:t>  You have a dated evidence folder with screenshots and logs</a:t>
             </a:r>
           </a:p>
           <a:p>
@@ -4217,7 +4222,7 @@
               <a:spcAft>
                 <a:spcPts val="800"/>
               </a:spcAft>
-              <a:defRPr sz="1400">
+              <a:defRPr sz="1500">
                 <a:solidFill>
                   <a:srgbClr val="1E293B"/>
                 </a:solidFill>
@@ -4225,7 +4230,7 @@
               </a:defRPr>
             </a:pPr>
             <a:r>
-              <a:t>  Manage Token — PAT with read_api scope</a:t>
+              <a:t>  Open prompts/02-bug-report-prompt-h.md — fill date, feature, error, report URL, file list</a:t>
             </a:r>
           </a:p>
           <a:p>
@@ -4236,7 +4241,7 @@
               <a:spcAft>
                 <a:spcPts val="800"/>
               </a:spcAft>
-              <a:defRPr sz="1400">
+              <a:defRPr sz="1500">
                 <a:solidFill>
                   <a:srgbClr val="1E293B"/>
                 </a:solidFill>
@@ -4244,7 +4249,7 @@
               </a:defRPr>
             </a:pPr>
             <a:r>
-              <a:t>  Select project + date range (last pass → failure)</a:t>
+              <a:t>  Attach failure images in Cursor chat and paste the prompt</a:t>
             </a:r>
           </a:p>
           <a:p>
@@ -4255,7 +4260,7 @@
               <a:spcAft>
                 <a:spcPts val="800"/>
               </a:spcAft>
-              <a:defRPr sz="1400">
+              <a:defRPr sz="1500">
                 <a:solidFill>
                   <a:srgbClr val="1E293B"/>
                 </a:solidFill>
@@ -4263,7 +4268,7 @@
               </a:defRPr>
             </a:pPr>
             <a:r>
-              <a:t>  Tabs: Merge Requests · Commits · Branches · Pipelines</a:t>
+              <a:t>  </a:t>
             </a:r>
           </a:p>
           <a:p>
@@ -4274,7 +4279,7 @@
               <a:spcAft>
                 <a:spcPts val="800"/>
               </a:spcAft>
-              <a:defRPr sz="1400">
+              <a:defRPr sz="1500">
                 <a:solidFill>
                   <a:srgbClr val="1E293B"/>
                 </a:solidFill>
@@ -4282,7 +4287,7 @@
               </a:defRPr>
             </a:pPr>
             <a:r>
-              <a:t>  Filter Merged · Search by author or branch</a:t>
+              <a:t>  Cursor writes ONE file with:</a:t>
             </a:r>
           </a:p>
           <a:p>
@@ -4293,7 +4298,7 @@
               <a:spcAft>
                 <a:spcPts val="800"/>
               </a:spcAft>
-              <a:defRPr sz="1400">
+              <a:defRPr sz="1500">
                 <a:solidFill>
                   <a:srgbClr val="1E293B"/>
                 </a:solidFill>
@@ -4301,92 +4306,116 @@
               </a:defRPr>
             </a:pPr>
             <a:r>
-              <a:t>  Export CSV/Excel or Copy to clipboard</a:t>
-            </a:r>
-          </a:p>
-        </p:txBody>
-      </p:sp>
-      <p:sp>
-        <p:nvSpPr>
-          <p:cNvPr id="7" name="Rounded Rectangle 6"/>
-          <p:cNvSpPr/>
-          <p:nvPr/>
-        </p:nvSpPr>
-        <p:spPr>
-          <a:xfrm>
-            <a:off x="6263640" y="1298448"/>
-            <a:ext cx="5477256" cy="5001768"/>
-          </a:xfrm>
-          <a:prstGeom prst="roundRect">
-            <a:avLst>
-              <a:gd name="adj" fmla="val 6000"/>
-            </a:avLst>
-          </a:prstGeom>
-          <a:solidFill>
-            <a:srgbClr val="FFFFFF"/>
-          </a:solidFill>
-          <a:ln w="15875">
-            <a:solidFill>
-              <a:srgbClr val="E2E8F0"/>
-            </a:solidFill>
-          </a:ln>
-        </p:spPr>
-        <p:style>
-          <a:lnRef idx="1">
-            <a:schemeClr val="accent1"/>
-          </a:lnRef>
-          <a:fillRef idx="3">
-            <a:schemeClr val="accent1"/>
-          </a:fillRef>
-          <a:effectRef idx="2">
-            <a:schemeClr val="accent1"/>
-          </a:effectRef>
-          <a:fontRef idx="minor">
-            <a:schemeClr val="lt1"/>
-          </a:fontRef>
-        </p:style>
-        <p:txBody>
-          <a:bodyPr rtlCol="0" anchor="ctr"/>
-          <a:lstStyle/>
-          <a:p>
-            <a:pPr algn="ctr"/>
-          </a:p>
-        </p:txBody>
-      </p:sp>
-      <p:pic>
-        <p:nvPicPr>
-          <p:cNvPr id="8" name="Picture 7" descr="gitlab_project_manager_ui.png"/>
-          <p:cNvPicPr>
-            <a:picLocks noChangeAspect="1"/>
-          </p:cNvPicPr>
-          <p:nvPr/>
-        </p:nvPicPr>
-        <p:blipFill>
-          <a:blip r:embed="rId2"/>
-          <a:stretch>
-            <a:fillRect/>
-          </a:stretch>
-        </p:blipFill>
-        <p:spPr>
-          <a:xfrm>
-            <a:off x="6373368" y="1408176"/>
-            <a:ext cx="5257800" cy="2105173"/>
-          </a:xfrm>
-          <a:prstGeom prst="rect">
-            <a:avLst/>
-          </a:prstGeom>
-        </p:spPr>
-      </p:pic>
-      <p:sp>
-        <p:nvSpPr>
-          <p:cNvPr id="9" name="TextBox 8"/>
+              <a:t>  • JIRA copy-paste block ready for QA board</a:t>
+            </a:r>
+          </a:p>
+          <a:p>
+            <a:pPr>
+              <a:lnSpc>
+                <a:spcPct val="130000"/>
+              </a:lnSpc>
+              <a:spcAft>
+                <a:spcPts val="800"/>
+              </a:spcAft>
+              <a:defRPr sz="1500">
+                <a:solidFill>
+                  <a:srgbClr val="1E293B"/>
+                </a:solidFill>
+                <a:latin typeface="Segoe UI"/>
+              </a:defRPr>
+            </a:pPr>
+            <a:r>
+              <a:t>  • Failure email — leadership-approved To/Cc (do not improvise)</a:t>
+            </a:r>
+          </a:p>
+          <a:p>
+            <a:pPr>
+              <a:lnSpc>
+                <a:spcPct val="130000"/>
+              </a:lnSpc>
+              <a:spcAft>
+                <a:spcPts val="800"/>
+              </a:spcAft>
+              <a:defRPr sz="1500">
+                <a:solidFill>
+                  <a:srgbClr val="1E293B"/>
+                </a:solidFill>
+                <a:latin typeface="Segoe UI"/>
+              </a:defRPr>
+            </a:pPr>
+            <a:r>
+              <a:t>  • Teams message with JIRA + report links</a:t>
+            </a:r>
+          </a:p>
+          <a:p>
+            <a:pPr>
+              <a:lnSpc>
+                <a:spcPct val="130000"/>
+              </a:lnSpc>
+              <a:spcAft>
+                <a:spcPts val="800"/>
+              </a:spcAft>
+              <a:defRPr sz="1500">
+                <a:solidFill>
+                  <a:srgbClr val="1E293B"/>
+                </a:solidFill>
+                <a:latin typeface="Segoe UI"/>
+              </a:defRPr>
+            </a:pPr>
+            <a:r>
+              <a:t>  • Resolution email placeholder for when bug is fixed</a:t>
+            </a:r>
+          </a:p>
+          <a:p>
+            <a:pPr>
+              <a:lnSpc>
+                <a:spcPct val="130000"/>
+              </a:lnSpc>
+              <a:spcAft>
+                <a:spcPts val="800"/>
+              </a:spcAft>
+              <a:defRPr sz="1500">
+                <a:solidFill>
+                  <a:srgbClr val="1E293B"/>
+                </a:solidFill>
+                <a:latin typeface="Segoe UI"/>
+              </a:defRPr>
+            </a:pPr>
+            <a:r>
+              <a:t>  </a:t>
+            </a:r>
+          </a:p>
+          <a:p>
+            <a:pPr>
+              <a:lnSpc>
+                <a:spcPct val="130000"/>
+              </a:lnSpc>
+              <a:spcAft>
+                <a:spcPts val="800"/>
+              </a:spcAft>
+              <a:defRPr sz="1500">
+                <a:solidFill>
+                  <a:srgbClr val="1E293B"/>
+                </a:solidFill>
+                <a:latin typeface="Segoe UI"/>
+              </a:defRPr>
+            </a:pPr>
+            <a:r>
+              <a:t>  Then: create JIRA → send email → post Teams — copy from that one file</a:t>
+            </a:r>
+          </a:p>
+        </p:txBody>
+      </p:sp>
+      <p:sp>
+        <p:nvSpPr>
+          <p:cNvPr id="7" name="TextBox 6"/>
           <p:cNvSpPr txBox="1"/>
           <p:nvPr/>
         </p:nvSpPr>
         <p:spPr>
           <a:xfrm>
-            <a:off x="6373368" y="3568213"/>
-            <a:ext cx="5257800" cy="347472"/>
+            <a:off x="548640" y="6473952"/>
+            <a:ext cx="9144000" cy="256032"/>
           </a:xfrm>
           <a:prstGeom prst="rect">
             <a:avLst/>
@@ -4399,42 +4428,6 @@
           </a:bodyPr>
           <a:lstStyle/>
           <a:p>
-            <a:pPr algn="ctr">
-              <a:defRPr sz="1000" b="0">
-                <a:solidFill>
-                  <a:srgbClr val="94A3B8"/>
-                </a:solidFill>
-                <a:latin typeface="Segoe UI"/>
-              </a:defRPr>
-            </a:pPr>
-            <a:r>
-              <a:t>Parameter panel — project, date presets, Generate</a:t>
-            </a:r>
-          </a:p>
-        </p:txBody>
-      </p:sp>
-      <p:sp>
-        <p:nvSpPr>
-          <p:cNvPr id="10" name="TextBox 9"/>
-          <p:cNvSpPr txBox="1"/>
-          <p:nvPr/>
-        </p:nvSpPr>
-        <p:spPr>
-          <a:xfrm>
-            <a:off x="548640" y="6473952"/>
-            <a:ext cx="9144000" cy="256032"/>
-          </a:xfrm>
-          <a:prstGeom prst="rect">
-            <a:avLst/>
-          </a:prstGeom>
-          <a:noFill/>
-        </p:spPr>
-        <p:txBody>
-          <a:bodyPr wrap="square" anchor="t" lIns="50800" rIns="50800">
-            <a:spAutoFit/>
-          </a:bodyPr>
-          <a:lstStyle/>
-          <a:p>
             <a:pPr algn="l">
               <a:defRPr sz="900" b="0">
                 <a:solidFill>
@@ -4451,7 +4444,7 @@
       </p:sp>
       <p:sp>
         <p:nvSpPr>
-          <p:cNvPr id="11" name="TextBox 10"/>
+          <p:cNvPr id="8" name="TextBox 7"/>
           <p:cNvSpPr txBox="1"/>
           <p:nvPr/>
         </p:nvSpPr>
@@ -4630,7 +4623,7 @@
               </a:defRPr>
             </a:pPr>
             <a:r>
-              <a:t>GitLab Project Manager — Sample Output</a:t>
+              <a:t>Cursor + Repo Toolchain</a:t>
             </a:r>
           </a:p>
         </p:txBody>
@@ -4666,7 +4659,7 @@
               </a:defRPr>
             </a:pPr>
             <a:r>
-              <a:t>Who changed what — application footprint</a:t>
+              <a:t>Integrated toolchain</a:t>
             </a:r>
           </a:p>
         </p:txBody>
@@ -4679,7 +4672,7 @@
         </p:nvSpPr>
         <p:spPr>
           <a:xfrm>
-            <a:off x="6263640" y="1298448"/>
+            <a:off x="548640" y="1298448"/>
             <a:ext cx="4892040" cy="4754880"/>
           </a:xfrm>
           <a:prstGeom prst="rect">
@@ -4708,7 +4701,7 @@
               </a:defRPr>
             </a:pPr>
             <a:r>
-              <a:t>  Project: monolith · Type: Merge Requests</a:t>
+              <a:t>  qa-automation-kb open in Cursor</a:t>
             </a:r>
           </a:p>
           <a:p>
@@ -4727,7 +4720,7 @@
               </a:defRPr>
             </a:pPr>
             <a:r>
-              <a:t>  Date range: last green run → failure date</a:t>
+              <a:t>  Evidence under regression-reports/MMDDYYYY/</a:t>
             </a:r>
           </a:p>
           <a:p>
@@ -4746,7 +4739,7 @@
               </a:defRPr>
             </a:pPr>
             <a:r>
-              <a:t>  Per MR: Title · Author · Reviewers · Merged by</a:t>
+              <a:t>  Prompt H → single bug .md output</a:t>
             </a:r>
           </a:p>
           <a:p>
@@ -4765,7 +4758,7 @@
               </a:defRPr>
             </a:pPr>
             <a:r>
-              <a:t>  Branch flow: source → target (e.g. feature/GRF-1394 → main)</a:t>
+              <a:t>  Create JIRA from generated block</a:t>
             </a:r>
           </a:p>
           <a:p>
@@ -4784,7 +4777,7 @@
               </a:defRPr>
             </a:pPr>
             <a:r>
-              <a:t>  Created At · Merged At (EST timestamps)</a:t>
+              <a:t>  GitLab PM → change set extract</a:t>
             </a:r>
           </a:p>
           <a:p>
@@ -4803,7 +4796,26 @@
               </a:defRPr>
             </a:pPr>
             <a:r>
-              <a:t>  Paste Change Set section into JIRA comment or failure email</a:t>
+              <a:t>  Paste JIRA link + change set back into Cursor (optional Prompt 03)</a:t>
+            </a:r>
+          </a:p>
+          <a:p>
+            <a:pPr>
+              <a:lnSpc>
+                <a:spcPct val="130000"/>
+              </a:lnSpc>
+              <a:spcAft>
+                <a:spcPts val="800"/>
+              </a:spcAft>
+              <a:defRPr sz="1400">
+                <a:solidFill>
+                  <a:srgbClr val="1E293B"/>
+                </a:solidFill>
+                <a:latin typeface="Segoe UI"/>
+              </a:defRPr>
+            </a:pPr>
+            <a:r>
+              <a:t>  Dump email/Teams content — send as-is</a:t>
             </a:r>
           </a:p>
         </p:txBody>
@@ -4816,7 +4828,7 @@
         </p:nvSpPr>
         <p:spPr>
           <a:xfrm>
-            <a:off x="548640" y="1298448"/>
+            <a:off x="6263640" y="1298448"/>
             <a:ext cx="5477256" cy="5001768"/>
           </a:xfrm>
           <a:prstGeom prst="roundRect">
@@ -4857,7 +4869,7 @@
       </p:sp>
       <p:pic>
         <p:nvPicPr>
-          <p:cNvPr id="8" name="Picture 7" descr="gitlab_mr_results_sample.png"/>
+          <p:cNvPr id="8" name="Picture 7" descr="chart_toolchain.png"/>
           <p:cNvPicPr>
             <a:picLocks noChangeAspect="1"/>
           </p:cNvPicPr>
@@ -4871,8 +4883,8 @@
         </p:blipFill>
         <p:spPr>
           <a:xfrm>
-            <a:off x="658368" y="1408176"/>
-            <a:ext cx="5257800" cy="3835524"/>
+            <a:off x="6373368" y="1408176"/>
+            <a:ext cx="5257800" cy="2281478"/>
           </a:xfrm>
           <a:prstGeom prst="rect">
             <a:avLst/>
@@ -4887,7 +4899,7 @@
         </p:nvSpPr>
         <p:spPr>
           <a:xfrm>
-            <a:off x="658368" y="5298564"/>
+            <a:off x="6373368" y="3744518"/>
             <a:ext cx="5257800" cy="347472"/>
           </a:xfrm>
           <a:prstGeom prst="rect">
@@ -4910,7 +4922,7 @@
               </a:defRPr>
             </a:pPr>
             <a:r>
-              <a:t>Real output — 8 MRs in window, 4 merged</a:t>
+              <a:t>Evidence → Comms → Footprint</a:t>
             </a:r>
           </a:p>
         </p:txBody>
@@ -5132,7 +5144,7 @@
               </a:defRPr>
             </a:pPr>
             <a:r>
-              <a:t>Repository Investigation Order</a:t>
+              <a:t>Communication Standards</a:t>
             </a:r>
           </a:p>
         </p:txBody>
@@ -5168,92 +5180,196 @@
               </a:defRPr>
             </a:pPr>
             <a:r>
-              <a:t>Cross-reference MR authors with failing test area</a:t>
-            </a:r>
-          </a:p>
-        </p:txBody>
-      </p:sp>
-      <p:sp>
-        <p:nvSpPr>
-          <p:cNvPr id="6" name="Rounded Rectangle 5"/>
-          <p:cNvSpPr/>
+              <a:t>Leadership-approved templates</a:t>
+            </a:r>
+          </a:p>
+        </p:txBody>
+      </p:sp>
+      <p:sp>
+        <p:nvSpPr>
+          <p:cNvPr id="6" name="TextBox 5"/>
+          <p:cNvSpPr txBox="1"/>
           <p:nvPr/>
         </p:nvSpPr>
         <p:spPr>
           <a:xfrm>
             <a:off x="548640" y="1298448"/>
-            <a:ext cx="11313871" cy="4910328"/>
-          </a:xfrm>
-          <a:prstGeom prst="roundRect">
-            <a:avLst>
-              <a:gd name="adj" fmla="val 6000"/>
-            </a:avLst>
-          </a:prstGeom>
-          <a:solidFill>
-            <a:srgbClr val="FFFFFF"/>
-          </a:solidFill>
-          <a:ln w="15875">
-            <a:solidFill>
-              <a:srgbClr val="E2E8F0"/>
-            </a:solidFill>
-          </a:ln>
-        </p:spPr>
-        <p:style>
-          <a:lnRef idx="1">
-            <a:schemeClr val="accent1"/>
-          </a:lnRef>
-          <a:fillRef idx="3">
-            <a:schemeClr val="accent1"/>
-          </a:fillRef>
-          <a:effectRef idx="2">
-            <a:schemeClr val="accent1"/>
-          </a:effectRef>
-          <a:fontRef idx="minor">
-            <a:schemeClr val="lt1"/>
-          </a:fontRef>
-        </p:style>
-        <p:txBody>
-          <a:bodyPr rtlCol="0" anchor="ctr"/>
-          <a:lstStyle/>
-          <a:p>
-            <a:pPr algn="ctr"/>
-          </a:p>
-        </p:txBody>
-      </p:sp>
-      <p:pic>
-        <p:nvPicPr>
-          <p:cNvPr id="7" name="Picture 6" descr="chart_repo_priority.png"/>
-          <p:cNvPicPr>
-            <a:picLocks noChangeAspect="1"/>
-          </p:cNvPicPr>
-          <p:nvPr/>
-        </p:nvPicPr>
-        <p:blipFill>
-          <a:blip r:embed="rId2"/>
-          <a:stretch>
-            <a:fillRect/>
-          </a:stretch>
-        </p:blipFill>
-        <p:spPr>
-          <a:xfrm>
-            <a:off x="658368" y="1408176"/>
-            <a:ext cx="8883384" cy="4343400"/>
-          </a:xfrm>
-          <a:prstGeom prst="rect">
-            <a:avLst/>
-          </a:prstGeom>
-        </p:spPr>
-      </p:pic>
-      <p:sp>
-        <p:nvSpPr>
-          <p:cNvPr id="8" name="TextBox 7"/>
+            <a:ext cx="11094415" cy="4937760"/>
+          </a:xfrm>
+          <a:prstGeom prst="rect">
+            <a:avLst/>
+          </a:prstGeom>
+          <a:noFill/>
+        </p:spPr>
+        <p:txBody>
+          <a:bodyPr wrap="square">
+            <a:spAutoFit/>
+          </a:bodyPr>
+          <a:lstStyle/>
+          <a:p>
+            <a:pPr>
+              <a:lnSpc>
+                <a:spcPct val="130000"/>
+              </a:lnSpc>
+              <a:spcAft>
+                <a:spcPts val="800"/>
+              </a:spcAft>
+              <a:defRPr sz="1500">
+                <a:solidFill>
+                  <a:srgbClr val="1E293B"/>
+                </a:solidFill>
+                <a:latin typeface="Segoe UI"/>
+              </a:defRPr>
+            </a:pPr>
+            <a:r>
+              <a:t>  Teams and email templates are approved by leadership and senior QA resources</a:t>
+            </a:r>
+          </a:p>
+          <a:p>
+            <a:pPr>
+              <a:lnSpc>
+                <a:spcPct val="130000"/>
+              </a:lnSpc>
+              <a:spcAft>
+                <a:spcPts val="800"/>
+              </a:spcAft>
+              <a:defRPr sz="1500">
+                <a:solidFill>
+                  <a:srgbClr val="1E293B"/>
+                </a:solidFill>
+                <a:latin typeface="Segoe UI"/>
+              </a:defRPr>
+            </a:pPr>
+            <a:r>
+              <a:t>  Use Prompt H output — do not improvise distribution lists or email structure</a:t>
+            </a:r>
+          </a:p>
+          <a:p>
+            <a:pPr>
+              <a:lnSpc>
+                <a:spcPct val="130000"/>
+              </a:lnSpc>
+              <a:spcAft>
+                <a:spcPts val="800"/>
+              </a:spcAft>
+              <a:defRPr sz="1500">
+                <a:solidFill>
+                  <a:srgbClr val="1E293B"/>
+                </a:solidFill>
+                <a:latin typeface="Segoe UI"/>
+              </a:defRPr>
+            </a:pPr>
+            <a:r>
+              <a:t>  </a:t>
+            </a:r>
+          </a:p>
+          <a:p>
+            <a:pPr>
+              <a:lnSpc>
+                <a:spcPct val="130000"/>
+              </a:lnSpc>
+              <a:spcAft>
+                <a:spcPts val="800"/>
+              </a:spcAft>
+              <a:defRPr sz="1500">
+                <a:solidFill>
+                  <a:srgbClr val="1E293B"/>
+                </a:solidFill>
+                <a:latin typeface="Segoe UI"/>
+              </a:defRPr>
+            </a:pPr>
+            <a:r>
+              <a:t>  To: AGS Tech Leads, AGS Chapter Leads, AGS Development, Brian Danilczyk</a:t>
+            </a:r>
+          </a:p>
+          <a:p>
+            <a:pPr>
+              <a:lnSpc>
+                <a:spcPct val="130000"/>
+              </a:lnSpc>
+              <a:spcAft>
+                <a:spcPts val="800"/>
+              </a:spcAft>
+              <a:defRPr sz="1500">
+                <a:solidFill>
+                  <a:srgbClr val="1E293B"/>
+                </a:solidFill>
+                <a:latin typeface="Segoe UI"/>
+              </a:defRPr>
+            </a:pPr>
+            <a:r>
+              <a:t>  Cc: Rajib Akhter · Henry Dittmer · Phuong Huynh · Automation.Squad</a:t>
+            </a:r>
+          </a:p>
+          <a:p>
+            <a:pPr>
+              <a:lnSpc>
+                <a:spcPct val="130000"/>
+              </a:lnSpc>
+              <a:spcAft>
+                <a:spcPts val="800"/>
+              </a:spcAft>
+              <a:defRPr sz="1500">
+                <a:solidFill>
+                  <a:srgbClr val="1E293B"/>
+                </a:solidFill>
+                <a:latin typeface="Segoe UI"/>
+              </a:defRPr>
+            </a:pPr>
+            <a:r>
+              <a:t>  </a:t>
+            </a:r>
+          </a:p>
+          <a:p>
+            <a:pPr>
+              <a:lnSpc>
+                <a:spcPct val="130000"/>
+              </a:lnSpc>
+              <a:spcAft>
+                <a:spcPts val="800"/>
+              </a:spcAft>
+              <a:defRPr sz="1500">
+                <a:solidFill>
+                  <a:srgbClr val="1E293B"/>
+                </a:solidFill>
+                <a:latin typeface="Segoe UI"/>
+              </a:defRPr>
+            </a:pPr>
+            <a:r>
+              <a:t>  Subject: [Priority] [Feature] — [Issue Type]</a:t>
+            </a:r>
+          </a:p>
+          <a:p>
+            <a:pPr>
+              <a:lnSpc>
+                <a:spcPct val="130000"/>
+              </a:lnSpc>
+              <a:spcAft>
+                <a:spcPts val="800"/>
+              </a:spcAft>
+              <a:defRPr sz="1500">
+                <a:solidFill>
+                  <a:srgbClr val="1E293B"/>
+                </a:solidFill>
+                <a:latin typeface="Segoe UI"/>
+              </a:defRPr>
+            </a:pPr>
+            <a:r>
+              <a:t>  Sources: Confluence Bug Handling PDFs (1. Failure · 1b. Resolution)</a:t>
+            </a:r>
+          </a:p>
+        </p:txBody>
+      </p:sp>
+      <p:sp>
+        <p:nvSpPr>
+          <p:cNvPr id="7" name="TextBox 6"/>
           <p:cNvSpPr txBox="1"/>
           <p:nvPr/>
         </p:nvSpPr>
         <p:spPr>
           <a:xfrm>
-            <a:off x="658368" y="5806440"/>
-            <a:ext cx="11094415" cy="347472"/>
+            <a:off x="548640" y="6473952"/>
+            <a:ext cx="9144000" cy="256032"/>
           </a:xfrm>
           <a:prstGeom prst="rect">
             <a:avLst/>
@@ -5266,42 +5382,6 @@
           </a:bodyPr>
           <a:lstStyle/>
           <a:p>
-            <a:pPr algn="ctr">
-              <a:defRPr sz="1000" b="0">
-                <a:solidFill>
-                  <a:srgbClr val="94A3B8"/>
-                </a:solidFill>
-                <a:latin typeface="Segoe UI"/>
-              </a:defRPr>
-            </a:pPr>
-            <a:r>
-              <a:t>Start monolith (app) → automation → qa-automation → prime-test-automation</a:t>
-            </a:r>
-          </a:p>
-        </p:txBody>
-      </p:sp>
-      <p:sp>
-        <p:nvSpPr>
-          <p:cNvPr id="9" name="TextBox 8"/>
-          <p:cNvSpPr txBox="1"/>
-          <p:nvPr/>
-        </p:nvSpPr>
-        <p:spPr>
-          <a:xfrm>
-            <a:off x="548640" y="6473952"/>
-            <a:ext cx="9144000" cy="256032"/>
-          </a:xfrm>
-          <a:prstGeom prst="rect">
-            <a:avLst/>
-          </a:prstGeom>
-          <a:noFill/>
-        </p:spPr>
-        <p:txBody>
-          <a:bodyPr wrap="square" anchor="t" lIns="50800" rIns="50800">
-            <a:spAutoFit/>
-          </a:bodyPr>
-          <a:lstStyle/>
-          <a:p>
             <a:pPr algn="l">
               <a:defRPr sz="900" b="0">
                 <a:solidFill>
@@ -5318,7 +5398,7 @@
       </p:sp>
       <p:sp>
         <p:nvSpPr>
-          <p:cNvPr id="10" name="TextBox 9"/>
+          <p:cNvPr id="8" name="TextBox 7"/>
           <p:cNvSpPr txBox="1"/>
           <p:nvPr/>
         </p:nvSpPr>
@@ -5366,7 +5446,7 @@
     <p:bg>
       <p:bgPr>
         <a:solidFill>
-          <a:srgbClr val="003241"/>
+          <a:srgbClr val="F8FAFC"/>
         </a:solidFill>
         <a:effectLst/>
       </p:bgPr>
@@ -5380,13 +5460,58 @@
       <p:grpSpPr/>
       <p:sp>
         <p:nvSpPr>
-          <p:cNvPr id="2" name="Rectangle 1"/>
+          <p:cNvPr id="2" name="Rounded Rectangle 1"/>
           <p:cNvSpPr/>
           <p:nvPr/>
         </p:nvSpPr>
         <p:spPr>
           <a:xfrm>
-            <a:off x="0" y="3200400"/>
+            <a:off x="0" y="0"/>
+            <a:ext cx="12191695" cy="1005840"/>
+          </a:xfrm>
+          <a:prstGeom prst="roundRect">
+            <a:avLst>
+              <a:gd name="adj" fmla="val 6000"/>
+            </a:avLst>
+          </a:prstGeom>
+          <a:solidFill>
+            <a:srgbClr val="003241"/>
+          </a:solidFill>
+          <a:ln>
+            <a:noFill/>
+          </a:ln>
+        </p:spPr>
+        <p:style>
+          <a:lnRef idx="1">
+            <a:schemeClr val="accent1"/>
+          </a:lnRef>
+          <a:fillRef idx="3">
+            <a:schemeClr val="accent1"/>
+          </a:fillRef>
+          <a:effectRef idx="2">
+            <a:schemeClr val="accent1"/>
+          </a:effectRef>
+          <a:fontRef idx="minor">
+            <a:schemeClr val="lt1"/>
+          </a:fontRef>
+        </p:style>
+        <p:txBody>
+          <a:bodyPr rtlCol="0" anchor="ctr"/>
+          <a:lstStyle/>
+          <a:p>
+            <a:pPr algn="ctr"/>
+          </a:p>
+        </p:txBody>
+      </p:sp>
+      <p:sp>
+        <p:nvSpPr>
+          <p:cNvPr id="3" name="Rectangle 2"/>
+          <p:cNvSpPr/>
+          <p:nvPr/>
+        </p:nvSpPr>
+        <p:spPr>
+          <a:xfrm>
+            <a:off x="0" y="1005840"/>
             <a:ext cx="12191695" cy="64008"/>
           </a:xfrm>
           <a:prstGeom prst="rect">
@@ -5423,14 +5548,14 @@
       </p:sp>
       <p:sp>
         <p:nvSpPr>
-          <p:cNvPr id="3" name="TextBox 2"/>
+          <p:cNvPr id="4" name="TextBox 3"/>
           <p:cNvSpPr txBox="1"/>
           <p:nvPr/>
         </p:nvSpPr>
         <p:spPr>
           <a:xfrm>
-            <a:off x="548640" y="2148840"/>
-            <a:ext cx="10058400" cy="777240"/>
+            <a:off x="548640" y="182880"/>
+            <a:ext cx="10058400" cy="502920"/>
           </a:xfrm>
           <a:prstGeom prst="rect">
             <a:avLst/>
@@ -5444,7 +5569,7 @@
           <a:lstStyle/>
           <a:p>
             <a:pPr algn="l">
-              <a:defRPr sz="3800" b="1">
+              <a:defRPr sz="3000" b="1">
                 <a:solidFill>
                   <a:srgbClr val="FFFFFF"/>
                 </a:solidFill>
@@ -5452,21 +5577,21 @@
               </a:defRPr>
             </a:pPr>
             <a:r>
-              <a:t>Close the Loop</a:t>
-            </a:r>
-          </a:p>
-        </p:txBody>
-      </p:sp>
-      <p:sp>
-        <p:nvSpPr>
-          <p:cNvPr id="4" name="TextBox 3"/>
+              <a:t>GitLab Project Manager — UI</a:t>
+            </a:r>
+          </a:p>
+        </p:txBody>
+      </p:sp>
+      <p:sp>
+        <p:nvSpPr>
+          <p:cNvPr id="5" name="TextBox 4"/>
           <p:cNvSpPr txBox="1"/>
           <p:nvPr/>
         </p:nvSpPr>
         <p:spPr>
           <a:xfrm>
-            <a:off x="548640" y="3401568"/>
-            <a:ext cx="9144000" cy="457200"/>
+            <a:off x="548640" y="658368"/>
+            <a:ext cx="10058400" cy="320040"/>
           </a:xfrm>
           <a:prstGeom prst="rect">
             <a:avLst/>
@@ -5480,7 +5605,7 @@
           <a:lstStyle/>
           <a:p>
             <a:pPr algn="l">
-              <a:defRPr sz="1800" b="0">
+              <a:defRPr sz="1300" b="0">
                 <a:solidFill>
                   <a:srgbClr val="05A2C6"/>
                 </a:solidFill>
@@ -5488,7 +5613,323 @@
               </a:defRPr>
             </a:pPr>
             <a:r>
-              <a:t>Resolution · Unlock · Knowledge capture</a:t>
+              <a:t>Change-set investigation tool</a:t>
+            </a:r>
+          </a:p>
+        </p:txBody>
+      </p:sp>
+      <p:sp>
+        <p:nvSpPr>
+          <p:cNvPr id="6" name="TextBox 5"/>
+          <p:cNvSpPr txBox="1"/>
+          <p:nvPr/>
+        </p:nvSpPr>
+        <p:spPr>
+          <a:xfrm>
+            <a:off x="548640" y="1298448"/>
+            <a:ext cx="4892040" cy="4754880"/>
+          </a:xfrm>
+          <a:prstGeom prst="rect">
+            <a:avLst/>
+          </a:prstGeom>
+          <a:noFill/>
+        </p:spPr>
+        <p:txBody>
+          <a:bodyPr wrap="square">
+            <a:spAutoFit/>
+          </a:bodyPr>
+          <a:lstStyle/>
+          <a:p>
+            <a:pPr>
+              <a:lnSpc>
+                <a:spcPct val="130000"/>
+              </a:lnSpc>
+              <a:spcAft>
+                <a:spcPts val="800"/>
+              </a:spcAft>
+              <a:defRPr sz="1400">
+                <a:solidFill>
+                  <a:srgbClr val="1E293B"/>
+                </a:solidFill>
+                <a:latin typeface="Segoe UI"/>
+              </a:defRPr>
+            </a:pPr>
+            <a:r>
+              <a:t>  Local utility: GitLabInfoProjUI (read-only GitLab API)</a:t>
+            </a:r>
+          </a:p>
+          <a:p>
+            <a:pPr>
+              <a:lnSpc>
+                <a:spcPct val="130000"/>
+              </a:lnSpc>
+              <a:spcAft>
+                <a:spcPts val="800"/>
+              </a:spcAft>
+              <a:defRPr sz="1400">
+                <a:solidFill>
+                  <a:srgbClr val="1E293B"/>
+                </a:solidFill>
+                <a:latin typeface="Segoe UI"/>
+              </a:defRPr>
+            </a:pPr>
+            <a:r>
+              <a:t>  Manage Token — PAT with read_api scope</a:t>
+            </a:r>
+          </a:p>
+          <a:p>
+            <a:pPr>
+              <a:lnSpc>
+                <a:spcPct val="130000"/>
+              </a:lnSpc>
+              <a:spcAft>
+                <a:spcPts val="800"/>
+              </a:spcAft>
+              <a:defRPr sz="1400">
+                <a:solidFill>
+                  <a:srgbClr val="1E293B"/>
+                </a:solidFill>
+                <a:latin typeface="Segoe UI"/>
+              </a:defRPr>
+            </a:pPr>
+            <a:r>
+              <a:t>  Select project + date range (last pass → failure)</a:t>
+            </a:r>
+          </a:p>
+          <a:p>
+            <a:pPr>
+              <a:lnSpc>
+                <a:spcPct val="130000"/>
+              </a:lnSpc>
+              <a:spcAft>
+                <a:spcPts val="800"/>
+              </a:spcAft>
+              <a:defRPr sz="1400">
+                <a:solidFill>
+                  <a:srgbClr val="1E293B"/>
+                </a:solidFill>
+                <a:latin typeface="Segoe UI"/>
+              </a:defRPr>
+            </a:pPr>
+            <a:r>
+              <a:t>  Tabs: Merge Requests · Commits · Branches · Pipelines</a:t>
+            </a:r>
+          </a:p>
+          <a:p>
+            <a:pPr>
+              <a:lnSpc>
+                <a:spcPct val="130000"/>
+              </a:lnSpc>
+              <a:spcAft>
+                <a:spcPts val="800"/>
+              </a:spcAft>
+              <a:defRPr sz="1400">
+                <a:solidFill>
+                  <a:srgbClr val="1E293B"/>
+                </a:solidFill>
+                <a:latin typeface="Segoe UI"/>
+              </a:defRPr>
+            </a:pPr>
+            <a:r>
+              <a:t>  Filter Merged · Search by author or branch</a:t>
+            </a:r>
+          </a:p>
+          <a:p>
+            <a:pPr>
+              <a:lnSpc>
+                <a:spcPct val="130000"/>
+              </a:lnSpc>
+              <a:spcAft>
+                <a:spcPts val="800"/>
+              </a:spcAft>
+              <a:defRPr sz="1400">
+                <a:solidFill>
+                  <a:srgbClr val="1E293B"/>
+                </a:solidFill>
+                <a:latin typeface="Segoe UI"/>
+              </a:defRPr>
+            </a:pPr>
+            <a:r>
+              <a:t>  Export CSV/Excel or Copy to clipboard</a:t>
+            </a:r>
+          </a:p>
+        </p:txBody>
+      </p:sp>
+      <p:sp>
+        <p:nvSpPr>
+          <p:cNvPr id="7" name="Rounded Rectangle 6"/>
+          <p:cNvSpPr/>
+          <p:nvPr/>
+        </p:nvSpPr>
+        <p:spPr>
+          <a:xfrm>
+            <a:off x="6263640" y="1298448"/>
+            <a:ext cx="5477256" cy="5001768"/>
+          </a:xfrm>
+          <a:prstGeom prst="roundRect">
+            <a:avLst>
+              <a:gd name="adj" fmla="val 6000"/>
+            </a:avLst>
+          </a:prstGeom>
+          <a:solidFill>
+            <a:srgbClr val="FFFFFF"/>
+          </a:solidFill>
+          <a:ln w="15875">
+            <a:solidFill>
+              <a:srgbClr val="E2E8F0"/>
+            </a:solidFill>
+          </a:ln>
+        </p:spPr>
+        <p:style>
+          <a:lnRef idx="1">
+            <a:schemeClr val="accent1"/>
+          </a:lnRef>
+          <a:fillRef idx="3">
+            <a:schemeClr val="accent1"/>
+          </a:fillRef>
+          <a:effectRef idx="2">
+            <a:schemeClr val="accent1"/>
+          </a:effectRef>
+          <a:fontRef idx="minor">
+            <a:schemeClr val="lt1"/>
+          </a:fontRef>
+        </p:style>
+        <p:txBody>
+          <a:bodyPr rtlCol="0" anchor="ctr"/>
+          <a:lstStyle/>
+          <a:p>
+            <a:pPr algn="ctr"/>
+          </a:p>
+        </p:txBody>
+      </p:sp>
+      <p:pic>
+        <p:nvPicPr>
+          <p:cNvPr id="8" name="Picture 7" descr="gitlab_project_manager_ui.png"/>
+          <p:cNvPicPr>
+            <a:picLocks noChangeAspect="1"/>
+          </p:cNvPicPr>
+          <p:nvPr/>
+        </p:nvPicPr>
+        <p:blipFill>
+          <a:blip r:embed="rId2"/>
+          <a:stretch>
+            <a:fillRect/>
+          </a:stretch>
+        </p:blipFill>
+        <p:spPr>
+          <a:xfrm>
+            <a:off x="6373368" y="1408176"/>
+            <a:ext cx="5257800" cy="2105173"/>
+          </a:xfrm>
+          <a:prstGeom prst="rect">
+            <a:avLst/>
+          </a:prstGeom>
+        </p:spPr>
+      </p:pic>
+      <p:sp>
+        <p:nvSpPr>
+          <p:cNvPr id="9" name="TextBox 8"/>
+          <p:cNvSpPr txBox="1"/>
+          <p:nvPr/>
+        </p:nvSpPr>
+        <p:spPr>
+          <a:xfrm>
+            <a:off x="6373368" y="3568213"/>
+            <a:ext cx="5257800" cy="347472"/>
+          </a:xfrm>
+          <a:prstGeom prst="rect">
+            <a:avLst/>
+          </a:prstGeom>
+          <a:noFill/>
+        </p:spPr>
+        <p:txBody>
+          <a:bodyPr wrap="square" anchor="t" lIns="50800" rIns="50800">
+            <a:spAutoFit/>
+          </a:bodyPr>
+          <a:lstStyle/>
+          <a:p>
+            <a:pPr algn="ctr">
+              <a:defRPr sz="1000" b="0">
+                <a:solidFill>
+                  <a:srgbClr val="94A3B8"/>
+                </a:solidFill>
+                <a:latin typeface="Segoe UI"/>
+              </a:defRPr>
+            </a:pPr>
+            <a:r>
+              <a:t>Parameter panel — project, date presets, Generate</a:t>
+            </a:r>
+          </a:p>
+        </p:txBody>
+      </p:sp>
+      <p:sp>
+        <p:nvSpPr>
+          <p:cNvPr id="10" name="TextBox 9"/>
+          <p:cNvSpPr txBox="1"/>
+          <p:nvPr/>
+        </p:nvSpPr>
+        <p:spPr>
+          <a:xfrm>
+            <a:off x="548640" y="6473952"/>
+            <a:ext cx="9144000" cy="256032"/>
+          </a:xfrm>
+          <a:prstGeom prst="rect">
+            <a:avLst/>
+          </a:prstGeom>
+          <a:noFill/>
+        </p:spPr>
+        <p:txBody>
+          <a:bodyPr wrap="square" anchor="t" lIns="50800" rIns="50800">
+            <a:spAutoFit/>
+          </a:bodyPr>
+          <a:lstStyle/>
+          <a:p>
+            <a:pPr algn="l">
+              <a:defRPr sz="900" b="0">
+                <a:solidFill>
+                  <a:srgbClr val="94A3B8"/>
+                </a:solidFill>
+                <a:latin typeface="Segoe UI"/>
+              </a:defRPr>
+            </a:pPr>
+            <a:r>
+              <a:t>QA Automation Standard  ·  Automation Bug Lifecycle  ·  Internal</a:t>
+            </a:r>
+          </a:p>
+        </p:txBody>
+      </p:sp>
+      <p:sp>
+        <p:nvSpPr>
+          <p:cNvPr id="11" name="TextBox 10"/>
+          <p:cNvSpPr txBox="1"/>
+          <p:nvPr/>
+        </p:nvSpPr>
+        <p:spPr>
+          <a:xfrm>
+            <a:off x="11109960" y="6473952"/>
+            <a:ext cx="640080" cy="256032"/>
+          </a:xfrm>
+          <a:prstGeom prst="rect">
+            <a:avLst/>
+          </a:prstGeom>
+          <a:noFill/>
+        </p:spPr>
+        <p:txBody>
+          <a:bodyPr wrap="square" anchor="t" lIns="50800" rIns="50800">
+            <a:spAutoFit/>
+          </a:bodyPr>
+          <a:lstStyle/>
+          <a:p>
+            <a:pPr algn="r">
+              <a:defRPr sz="900" b="0">
+                <a:solidFill>
+                  <a:srgbClr val="94A3B8"/>
+                </a:solidFill>
+                <a:latin typeface="Segoe UI"/>
+              </a:defRPr>
+            </a:pPr>
+            <a:r>
+              <a:t>13</a:t>
             </a:r>
           </a:p>
         </p:txBody>
@@ -5638,7 +6079,7 @@
               </a:defRPr>
             </a:pPr>
             <a:r>
-              <a:t>Defect Lifecycle</a:t>
+              <a:t>GitLab Project Manager — Sample Output</a:t>
             </a:r>
           </a:p>
         </p:txBody>
@@ -5674,21 +6115,158 @@
               </a:defRPr>
             </a:pPr>
             <a:r>
-              <a:t>JIRA states</a:t>
-            </a:r>
-          </a:p>
-        </p:txBody>
-      </p:sp>
-      <p:sp>
-        <p:nvSpPr>
-          <p:cNvPr id="6" name="Rounded Rectangle 5"/>
+              <a:t>Who changed what — application footprint</a:t>
+            </a:r>
+          </a:p>
+        </p:txBody>
+      </p:sp>
+      <p:sp>
+        <p:nvSpPr>
+          <p:cNvPr id="6" name="TextBox 5"/>
+          <p:cNvSpPr txBox="1"/>
+          <p:nvPr/>
+        </p:nvSpPr>
+        <p:spPr>
+          <a:xfrm>
+            <a:off x="6263640" y="1298448"/>
+            <a:ext cx="4892040" cy="4754880"/>
+          </a:xfrm>
+          <a:prstGeom prst="rect">
+            <a:avLst/>
+          </a:prstGeom>
+          <a:noFill/>
+        </p:spPr>
+        <p:txBody>
+          <a:bodyPr wrap="square">
+            <a:spAutoFit/>
+          </a:bodyPr>
+          <a:lstStyle/>
+          <a:p>
+            <a:pPr>
+              <a:lnSpc>
+                <a:spcPct val="130000"/>
+              </a:lnSpc>
+              <a:spcAft>
+                <a:spcPts val="800"/>
+              </a:spcAft>
+              <a:defRPr sz="1400">
+                <a:solidFill>
+                  <a:srgbClr val="1E293B"/>
+                </a:solidFill>
+                <a:latin typeface="Segoe UI"/>
+              </a:defRPr>
+            </a:pPr>
+            <a:r>
+              <a:t>  Project: monolith · Type: Merge Requests</a:t>
+            </a:r>
+          </a:p>
+          <a:p>
+            <a:pPr>
+              <a:lnSpc>
+                <a:spcPct val="130000"/>
+              </a:lnSpc>
+              <a:spcAft>
+                <a:spcPts val="800"/>
+              </a:spcAft>
+              <a:defRPr sz="1400">
+                <a:solidFill>
+                  <a:srgbClr val="1E293B"/>
+                </a:solidFill>
+                <a:latin typeface="Segoe UI"/>
+              </a:defRPr>
+            </a:pPr>
+            <a:r>
+              <a:t>  Date range: last green run → failure date</a:t>
+            </a:r>
+          </a:p>
+          <a:p>
+            <a:pPr>
+              <a:lnSpc>
+                <a:spcPct val="130000"/>
+              </a:lnSpc>
+              <a:spcAft>
+                <a:spcPts val="800"/>
+              </a:spcAft>
+              <a:defRPr sz="1400">
+                <a:solidFill>
+                  <a:srgbClr val="1E293B"/>
+                </a:solidFill>
+                <a:latin typeface="Segoe UI"/>
+              </a:defRPr>
+            </a:pPr>
+            <a:r>
+              <a:t>  Per MR: Title · Author · Reviewers · Merged by</a:t>
+            </a:r>
+          </a:p>
+          <a:p>
+            <a:pPr>
+              <a:lnSpc>
+                <a:spcPct val="130000"/>
+              </a:lnSpc>
+              <a:spcAft>
+                <a:spcPts val="800"/>
+              </a:spcAft>
+              <a:defRPr sz="1400">
+                <a:solidFill>
+                  <a:srgbClr val="1E293B"/>
+                </a:solidFill>
+                <a:latin typeface="Segoe UI"/>
+              </a:defRPr>
+            </a:pPr>
+            <a:r>
+              <a:t>  Branch flow: source → target (e.g. feature/GRF-1394 → main)</a:t>
+            </a:r>
+          </a:p>
+          <a:p>
+            <a:pPr>
+              <a:lnSpc>
+                <a:spcPct val="130000"/>
+              </a:lnSpc>
+              <a:spcAft>
+                <a:spcPts val="800"/>
+              </a:spcAft>
+              <a:defRPr sz="1400">
+                <a:solidFill>
+                  <a:srgbClr val="1E293B"/>
+                </a:solidFill>
+                <a:latin typeface="Segoe UI"/>
+              </a:defRPr>
+            </a:pPr>
+            <a:r>
+              <a:t>  Created At · Merged At (EST timestamps)</a:t>
+            </a:r>
+          </a:p>
+          <a:p>
+            <a:pPr>
+              <a:lnSpc>
+                <a:spcPct val="130000"/>
+              </a:lnSpc>
+              <a:spcAft>
+                <a:spcPts val="800"/>
+              </a:spcAft>
+              <a:defRPr sz="1400">
+                <a:solidFill>
+                  <a:srgbClr val="1E293B"/>
+                </a:solidFill>
+                <a:latin typeface="Segoe UI"/>
+              </a:defRPr>
+            </a:pPr>
+            <a:r>
+              <a:t>  Paste Change Set section into JIRA comment or failure email</a:t>
+            </a:r>
+          </a:p>
+        </p:txBody>
+      </p:sp>
+      <p:sp>
+        <p:nvSpPr>
+          <p:cNvPr id="7" name="Rounded Rectangle 6"/>
           <p:cNvSpPr/>
           <p:nvPr/>
         </p:nvSpPr>
         <p:spPr>
           <a:xfrm>
             <a:off x="548640" y="1298448"/>
-            <a:ext cx="11313871" cy="4910328"/>
+            <a:ext cx="5477256" cy="5001768"/>
           </a:xfrm>
           <a:prstGeom prst="roundRect">
             <a:avLst>
@@ -5728,7 +6306,7 @@
       </p:sp>
       <p:pic>
         <p:nvPicPr>
-          <p:cNvPr id="7" name="Picture 6" descr="chart_defect_lifecycle.png"/>
+          <p:cNvPr id="8" name="Picture 7" descr="gitlab_mr_results_sample.png"/>
           <p:cNvPicPr>
             <a:picLocks noChangeAspect="1"/>
           </p:cNvPicPr>
@@ -5743,7 +6321,7 @@
         <p:spPr>
           <a:xfrm>
             <a:off x="658368" y="1408176"/>
-            <a:ext cx="11094415" cy="3004737"/>
+            <a:ext cx="5257800" cy="3835524"/>
           </a:xfrm>
           <a:prstGeom prst="rect">
             <a:avLst/>
@@ -5752,14 +6330,14 @@
       </p:pic>
       <p:sp>
         <p:nvSpPr>
-          <p:cNvPr id="8" name="TextBox 7"/>
+          <p:cNvPr id="9" name="TextBox 8"/>
           <p:cNvSpPr txBox="1"/>
           <p:nvPr/>
         </p:nvSpPr>
         <p:spPr>
           <a:xfrm>
-            <a:off x="658368" y="4467777"/>
-            <a:ext cx="11094415" cy="347472"/>
+            <a:off x="658368" y="5298564"/>
+            <a:ext cx="5257800" cy="347472"/>
           </a:xfrm>
           <a:prstGeom prst="rect">
             <a:avLst/>
@@ -5781,14 +6359,14 @@
               </a:defRPr>
             </a:pPr>
             <a:r>
-              <a:t>04_EXECUTION/DEFECT_LIFECYCLE.md · TRIAGE_RULES.md</a:t>
-            </a:r>
-          </a:p>
-        </p:txBody>
-      </p:sp>
-      <p:sp>
-        <p:nvSpPr>
-          <p:cNvPr id="9" name="TextBox 8"/>
+              <a:t>Real output — MRs in window with authors and branches</a:t>
+            </a:r>
+          </a:p>
+        </p:txBody>
+      </p:sp>
+      <p:sp>
+        <p:nvSpPr>
+          <p:cNvPr id="10" name="TextBox 9"/>
           <p:cNvSpPr txBox="1"/>
           <p:nvPr/>
         </p:nvSpPr>
@@ -5824,7 +6402,7 @@
       </p:sp>
       <p:sp>
         <p:nvSpPr>
-          <p:cNvPr id="10" name="TextBox 9"/>
+          <p:cNvPr id="11" name="TextBox 10"/>
           <p:cNvSpPr txBox="1"/>
           <p:nvPr/>
         </p:nvSpPr>
@@ -6003,7 +6581,7 @@
               </a:defRPr>
             </a:pPr>
             <a:r>
-              <a:t>Resolution Standard</a:t>
+              <a:t>Repository Investigation Order</a:t>
             </a:r>
           </a:p>
         </p:txBody>
@@ -6039,158 +6617,92 @@
               </a:defRPr>
             </a:pPr>
             <a:r>
-              <a:t>Confluence 1b. Automation Bug Resolution Follow-Up</a:t>
-            </a:r>
-          </a:p>
-        </p:txBody>
-      </p:sp>
-      <p:sp>
-        <p:nvSpPr>
-          <p:cNvPr id="6" name="TextBox 5"/>
+              <a:t>Cross-reference MR authors with failing test area</a:t>
+            </a:r>
+          </a:p>
+        </p:txBody>
+      </p:sp>
+      <p:sp>
+        <p:nvSpPr>
+          <p:cNvPr id="6" name="Rounded Rectangle 5"/>
+          <p:cNvSpPr/>
+          <p:nvPr/>
+        </p:nvSpPr>
+        <p:spPr>
+          <a:xfrm>
+            <a:off x="548640" y="1298448"/>
+            <a:ext cx="11313871" cy="4910328"/>
+          </a:xfrm>
+          <a:prstGeom prst="roundRect">
+            <a:avLst>
+              <a:gd name="adj" fmla="val 6000"/>
+            </a:avLst>
+          </a:prstGeom>
+          <a:solidFill>
+            <a:srgbClr val="FFFFFF"/>
+          </a:solidFill>
+          <a:ln w="15875">
+            <a:solidFill>
+              <a:srgbClr val="E2E8F0"/>
+            </a:solidFill>
+          </a:ln>
+        </p:spPr>
+        <p:style>
+          <a:lnRef idx="1">
+            <a:schemeClr val="accent1"/>
+          </a:lnRef>
+          <a:fillRef idx="3">
+            <a:schemeClr val="accent1"/>
+          </a:fillRef>
+          <a:effectRef idx="2">
+            <a:schemeClr val="accent1"/>
+          </a:effectRef>
+          <a:fontRef idx="minor">
+            <a:schemeClr val="lt1"/>
+          </a:fontRef>
+        </p:style>
+        <p:txBody>
+          <a:bodyPr rtlCol="0" anchor="ctr"/>
+          <a:lstStyle/>
+          <a:p>
+            <a:pPr algn="ctr"/>
+          </a:p>
+        </p:txBody>
+      </p:sp>
+      <p:pic>
+        <p:nvPicPr>
+          <p:cNvPr id="7" name="Picture 6" descr="chart_repo_priority.png"/>
+          <p:cNvPicPr>
+            <a:picLocks noChangeAspect="1"/>
+          </p:cNvPicPr>
+          <p:nvPr/>
+        </p:nvPicPr>
+        <p:blipFill>
+          <a:blip r:embed="rId2"/>
+          <a:stretch>
+            <a:fillRect/>
+          </a:stretch>
+        </p:blipFill>
+        <p:spPr>
+          <a:xfrm>
+            <a:off x="658368" y="1408176"/>
+            <a:ext cx="8883384" cy="4343400"/>
+          </a:xfrm>
+          <a:prstGeom prst="rect">
+            <a:avLst/>
+          </a:prstGeom>
+        </p:spPr>
+      </p:pic>
+      <p:sp>
+        <p:nvSpPr>
+          <p:cNvPr id="8" name="TextBox 7"/>
           <p:cNvSpPr txBox="1"/>
           <p:nvPr/>
         </p:nvSpPr>
         <p:spPr>
           <a:xfrm>
-            <a:off x="548640" y="1298448"/>
-            <a:ext cx="11094415" cy="4937760"/>
-          </a:xfrm>
-          <a:prstGeom prst="rect">
-            <a:avLst/>
-          </a:prstGeom>
-          <a:noFill/>
-        </p:spPr>
-        <p:txBody>
-          <a:bodyPr wrap="square">
-            <a:spAutoFit/>
-          </a:bodyPr>
-          <a:lstStyle/>
-          <a:p>
-            <a:pPr>
-              <a:lnSpc>
-                <a:spcPct val="130000"/>
-              </a:lnSpc>
-              <a:spcAft>
-                <a:spcPts val="800"/>
-              </a:spcAft>
-              <a:defRPr sz="1500">
-                <a:solidFill>
-                  <a:srgbClr val="1E293B"/>
-                </a:solidFill>
-                <a:latin typeface="Segoe UI"/>
-              </a:defRPr>
-            </a:pPr>
-            <a:r>
-              <a:t>  Dev delivers fix or revert on affected branch</a:t>
-            </a:r>
-          </a:p>
-          <a:p>
-            <a:pPr>
-              <a:lnSpc>
-                <a:spcPct val="130000"/>
-              </a:lnSpc>
-              <a:spcAft>
-                <a:spcPts val="800"/>
-              </a:spcAft>
-              <a:defRPr sz="1500">
-                <a:solidFill>
-                  <a:srgbClr val="1E293B"/>
-                </a:solidFill>
-                <a:latin typeface="Segoe UI"/>
-              </a:defRPr>
-            </a:pPr>
-            <a:r>
-              <a:t>  QA reruns impacted scenarios (full regression optional)</a:t>
-            </a:r>
-          </a:p>
-          <a:p>
-            <a:pPr>
-              <a:lnSpc>
-                <a:spcPct val="130000"/>
-              </a:lnSpc>
-              <a:spcAft>
-                <a:spcPts val="800"/>
-              </a:spcAft>
-              <a:defRPr sz="1500">
-                <a:solidFill>
-                  <a:srgbClr val="1E293B"/>
-                </a:solidFill>
-                <a:latin typeface="Segoe UI"/>
-              </a:defRPr>
-            </a:pPr>
-            <a:r>
-              <a:t>  Update JIRA with RCA → Verified → Closed</a:t>
-            </a:r>
-          </a:p>
-          <a:p>
-            <a:pPr>
-              <a:lnSpc>
-                <a:spcPct val="130000"/>
-              </a:lnSpc>
-              <a:spcAft>
-                <a:spcPts val="800"/>
-              </a:spcAft>
-              <a:defRPr sz="1500">
-                <a:solidFill>
-                  <a:srgbClr val="1E293B"/>
-                </a:solidFill>
-                <a:latin typeface="Segoe UI"/>
-              </a:defRPr>
-            </a:pPr>
-            <a:r>
-              <a:t>  Send resolution email — same To/Cc as failure (template 1b)</a:t>
-            </a:r>
-          </a:p>
-          <a:p>
-            <a:pPr>
-              <a:lnSpc>
-                <a:spcPct val="130000"/>
-              </a:lnSpc>
-              <a:spcAft>
-                <a:spcPts val="800"/>
-              </a:spcAft>
-              <a:defRPr sz="1500">
-                <a:solidFill>
-                  <a:srgbClr val="1E293B"/>
-                </a:solidFill>
-                <a:latin typeface="Segoe UI"/>
-              </a:defRPr>
-            </a:pPr>
-            <a:r>
-              <a:t>  Unlock monolith/main + automation/main if locked</a:t>
-            </a:r>
-          </a:p>
-          <a:p>
-            <a:pPr>
-              <a:lnSpc>
-                <a:spcPct val="130000"/>
-              </a:lnSpc>
-              <a:spcAft>
-                <a:spcPts val="800"/>
-              </a:spcAft>
-              <a:defRPr sz="1500">
-                <a:solidFill>
-                  <a:srgbClr val="1E293B"/>
-                </a:solidFill>
-                <a:latin typeface="Segoe UI"/>
-              </a:defRPr>
-            </a:pPr>
-            <a:r>
-              <a:t>  Update bug .md: JIRA link, Status Closed, resolution section filled</a:t>
-            </a:r>
-          </a:p>
-        </p:txBody>
-      </p:sp>
-      <p:sp>
-        <p:nvSpPr>
-          <p:cNvPr id="7" name="TextBox 6"/>
-          <p:cNvSpPr txBox="1"/>
-          <p:nvPr/>
-        </p:nvSpPr>
-        <p:spPr>
-          <a:xfrm>
-            <a:off x="548640" y="6473952"/>
-            <a:ext cx="9144000" cy="256032"/>
+            <a:off x="658368" y="5806440"/>
+            <a:ext cx="11094415" cy="347472"/>
           </a:xfrm>
           <a:prstGeom prst="rect">
             <a:avLst/>
@@ -6203,6 +6715,42 @@
           </a:bodyPr>
           <a:lstStyle/>
           <a:p>
+            <a:pPr algn="ctr">
+              <a:defRPr sz="1000" b="0">
+                <a:solidFill>
+                  <a:srgbClr val="94A3B8"/>
+                </a:solidFill>
+                <a:latin typeface="Segoe UI"/>
+              </a:defRPr>
+            </a:pPr>
+            <a:r>
+              <a:t>Start monolith (app) → automation → qa-automation → prime-test-automation</a:t>
+            </a:r>
+          </a:p>
+        </p:txBody>
+      </p:sp>
+      <p:sp>
+        <p:nvSpPr>
+          <p:cNvPr id="9" name="TextBox 8"/>
+          <p:cNvSpPr txBox="1"/>
+          <p:nvPr/>
+        </p:nvSpPr>
+        <p:spPr>
+          <a:xfrm>
+            <a:off x="548640" y="6473952"/>
+            <a:ext cx="9144000" cy="256032"/>
+          </a:xfrm>
+          <a:prstGeom prst="rect">
+            <a:avLst/>
+          </a:prstGeom>
+          <a:noFill/>
+        </p:spPr>
+        <p:txBody>
+          <a:bodyPr wrap="square" anchor="t" lIns="50800" rIns="50800">
+            <a:spAutoFit/>
+          </a:bodyPr>
+          <a:lstStyle/>
+          <a:p>
             <a:pPr algn="l">
               <a:defRPr sz="900" b="0">
                 <a:solidFill>
@@ -6219,7 +6767,7 @@
       </p:sp>
       <p:sp>
         <p:nvSpPr>
-          <p:cNvPr id="8" name="TextBox 7"/>
+          <p:cNvPr id="10" name="TextBox 9"/>
           <p:cNvSpPr txBox="1"/>
           <p:nvPr/>
         </p:nvSpPr>
@@ -6267,7 +6815,7 @@
     <p:bg>
       <p:bgPr>
         <a:solidFill>
-          <a:srgbClr val="F8FAFC"/>
+          <a:srgbClr val="003241"/>
         </a:solidFill>
         <a:effectLst/>
       </p:bgPr>
@@ -6281,58 +6829,13 @@
       <p:grpSpPr/>
       <p:sp>
         <p:nvSpPr>
-          <p:cNvPr id="2" name="Rounded Rectangle 1"/>
+          <p:cNvPr id="2" name="Rectangle 1"/>
           <p:cNvSpPr/>
           <p:nvPr/>
         </p:nvSpPr>
         <p:spPr>
           <a:xfrm>
-            <a:off x="0" y="0"/>
-            <a:ext cx="12191695" cy="1005840"/>
-          </a:xfrm>
-          <a:prstGeom prst="roundRect">
-            <a:avLst>
-              <a:gd name="adj" fmla="val 6000"/>
-            </a:avLst>
-          </a:prstGeom>
-          <a:solidFill>
-            <a:srgbClr val="003241"/>
-          </a:solidFill>
-          <a:ln>
-            <a:noFill/>
-          </a:ln>
-        </p:spPr>
-        <p:style>
-          <a:lnRef idx="1">
-            <a:schemeClr val="accent1"/>
-          </a:lnRef>
-          <a:fillRef idx="3">
-            <a:schemeClr val="accent1"/>
-          </a:fillRef>
-          <a:effectRef idx="2">
-            <a:schemeClr val="accent1"/>
-          </a:effectRef>
-          <a:fontRef idx="minor">
-            <a:schemeClr val="lt1"/>
-          </a:fontRef>
-        </p:style>
-        <p:txBody>
-          <a:bodyPr rtlCol="0" anchor="ctr"/>
-          <a:lstStyle/>
-          <a:p>
-            <a:pPr algn="ctr"/>
-          </a:p>
-        </p:txBody>
-      </p:sp>
-      <p:sp>
-        <p:nvSpPr>
-          <p:cNvPr id="3" name="Rectangle 2"/>
-          <p:cNvSpPr/>
-          <p:nvPr/>
-        </p:nvSpPr>
-        <p:spPr>
-          <a:xfrm>
-            <a:off x="0" y="1005840"/>
+            <a:off x="0" y="3200400"/>
             <a:ext cx="12191695" cy="64008"/>
           </a:xfrm>
           <a:prstGeom prst="rect">
@@ -6369,14 +6872,14 @@
       </p:sp>
       <p:sp>
         <p:nvSpPr>
-          <p:cNvPr id="4" name="TextBox 3"/>
+          <p:cNvPr id="3" name="TextBox 2"/>
           <p:cNvSpPr txBox="1"/>
           <p:nvPr/>
         </p:nvSpPr>
         <p:spPr>
           <a:xfrm>
-            <a:off x="548640" y="182880"/>
-            <a:ext cx="10058400" cy="502920"/>
+            <a:off x="548640" y="2148840"/>
+            <a:ext cx="10058400" cy="777240"/>
           </a:xfrm>
           <a:prstGeom prst="rect">
             <a:avLst/>
@@ -6390,7 +6893,7 @@
           <a:lstStyle/>
           <a:p>
             <a:pPr algn="l">
-              <a:defRPr sz="3000" b="1">
+              <a:defRPr sz="3800" b="1">
                 <a:solidFill>
                   <a:srgbClr val="FFFFFF"/>
                 </a:solidFill>
@@ -6398,21 +6901,21 @@
               </a:defRPr>
             </a:pPr>
             <a:r>
-              <a:t>Multi-Failure Rollup</a:t>
-            </a:r>
-          </a:p>
-        </p:txBody>
-      </p:sp>
-      <p:sp>
-        <p:nvSpPr>
-          <p:cNvPr id="5" name="TextBox 4"/>
+              <a:t>Critical Path</a:t>
+            </a:r>
+          </a:p>
+        </p:txBody>
+      </p:sp>
+      <p:sp>
+        <p:nvSpPr>
+          <p:cNvPr id="4" name="TextBox 3"/>
           <p:cNvSpPr txBox="1"/>
           <p:nvPr/>
         </p:nvSpPr>
         <p:spPr>
           <a:xfrm>
-            <a:off x="548640" y="658368"/>
-            <a:ext cx="10058400" cy="320040"/>
+            <a:off x="548640" y="3401568"/>
+            <a:ext cx="9144000" cy="457200"/>
           </a:xfrm>
           <a:prstGeom prst="rect">
             <a:avLst/>
@@ -6426,7 +6929,7 @@
           <a:lstStyle/>
           <a:p>
             <a:pPr algn="l">
-              <a:defRPr sz="1300" b="0">
+              <a:defRPr sz="1800" b="0">
                 <a:solidFill>
                   <a:srgbClr val="05A2C6"/>
                 </a:solidFill>
@@ -6434,197 +6937,7 @@
               </a:defRPr>
             </a:pPr>
             <a:r>
-              <a:t>When many tests fail at once</a:t>
-            </a:r>
-          </a:p>
-        </p:txBody>
-      </p:sp>
-      <p:sp>
-        <p:nvSpPr>
-          <p:cNvPr id="6" name="TextBox 5"/>
-          <p:cNvSpPr txBox="1"/>
-          <p:nvPr/>
-        </p:nvSpPr>
-        <p:spPr>
-          <a:xfrm>
-            <a:off x="548640" y="1298448"/>
-            <a:ext cx="11094415" cy="4937760"/>
-          </a:xfrm>
-          <a:prstGeom prst="rect">
-            <a:avLst/>
-          </a:prstGeom>
-          <a:noFill/>
-        </p:spPr>
-        <p:txBody>
-          <a:bodyPr wrap="square">
-            <a:spAutoFit/>
-          </a:bodyPr>
-          <a:lstStyle/>
-          <a:p>
-            <a:pPr>
-              <a:lnSpc>
-                <a:spcPct val="130000"/>
-              </a:lnSpc>
-              <a:spcAft>
-                <a:spcPts val="800"/>
-              </a:spcAft>
-              <a:defRPr sz="1500">
-                <a:solidFill>
-                  <a:srgbClr val="1E293B"/>
-                </a:solidFill>
-                <a:latin typeface="Segoe UI"/>
-              </a:defRPr>
-            </a:pPr>
-            <a:r>
-              <a:t>  Large nightly failures (e.g. 62/358) — group by feature/plan, not per test</a:t>
-            </a:r>
-          </a:p>
-          <a:p>
-            <a:pPr>
-              <a:lnSpc>
-                <a:spcPct val="130000"/>
-              </a:lnSpc>
-              <a:spcAft>
-                <a:spcPts val="800"/>
-              </a:spcAft>
-              <a:defRPr sz="1500">
-                <a:solidFill>
-                  <a:srgbClr val="1E293B"/>
-                </a:solidFill>
-                <a:latin typeface="Segoe UI"/>
-              </a:defRPr>
-            </a:pPr>
-            <a:r>
-              <a:t>  Build failure matrix with root-cause hints per traunch</a:t>
-            </a:r>
-          </a:p>
-          <a:p>
-            <a:pPr>
-              <a:lnSpc>
-                <a:spcPct val="130000"/>
-              </a:lnSpc>
-              <a:spcAft>
-                <a:spcPts val="800"/>
-              </a:spcAft>
-              <a:defRPr sz="1500">
-                <a:solidFill>
-                  <a:srgbClr val="1E293B"/>
-                </a:solidFill>
-                <a:latin typeface="Segoe UI"/>
-              </a:defRPr>
-            </a:pPr>
-            <a:r>
-              <a:t>  One JIRA per root cause — umbrella + children when needed</a:t>
-            </a:r>
-          </a:p>
-          <a:p>
-            <a:pPr>
-              <a:lnSpc>
-                <a:spcPct val="130000"/>
-              </a:lnSpc>
-              <a:spcAft>
-                <a:spcPts val="800"/>
-              </a:spcAft>
-              <a:defRPr sz="1500">
-                <a:solidFill>
-                  <a:srgbClr val="1E293B"/>
-                </a:solidFill>
-                <a:latin typeface="Segoe UI"/>
-              </a:defRPr>
-            </a:pPr>
-            <a:r>
-              <a:t>  Single combined email/Teams with matrix reference</a:t>
-            </a:r>
-          </a:p>
-          <a:p>
-            <a:pPr>
-              <a:lnSpc>
-                <a:spcPct val="130000"/>
-              </a:lnSpc>
-              <a:spcAft>
-                <a:spcPts val="800"/>
-              </a:spcAft>
-              <a:defRPr sz="1500">
-                <a:solidFill>
-                  <a:srgbClr val="1E293B"/>
-                </a:solidFill>
-                <a:latin typeface="Segoe UI"/>
-              </a:defRPr>
-            </a:pPr>
-            <a:r>
-              <a:t>  Example: 04202026_DailyRegression_PipelineFailureRollup.md</a:t>
-            </a:r>
-          </a:p>
-        </p:txBody>
-      </p:sp>
-      <p:sp>
-        <p:nvSpPr>
-          <p:cNvPr id="7" name="TextBox 6"/>
-          <p:cNvSpPr txBox="1"/>
-          <p:nvPr/>
-        </p:nvSpPr>
-        <p:spPr>
-          <a:xfrm>
-            <a:off x="548640" y="6473952"/>
-            <a:ext cx="9144000" cy="256032"/>
-          </a:xfrm>
-          <a:prstGeom prst="rect">
-            <a:avLst/>
-          </a:prstGeom>
-          <a:noFill/>
-        </p:spPr>
-        <p:txBody>
-          <a:bodyPr wrap="square" anchor="t" lIns="50800" rIns="50800">
-            <a:spAutoFit/>
-          </a:bodyPr>
-          <a:lstStyle/>
-          <a:p>
-            <a:pPr algn="l">
-              <a:defRPr sz="900" b="0">
-                <a:solidFill>
-                  <a:srgbClr val="94A3B8"/>
-                </a:solidFill>
-                <a:latin typeface="Segoe UI"/>
-              </a:defRPr>
-            </a:pPr>
-            <a:r>
-              <a:t>QA Automation Standard  ·  Automation Bug Lifecycle  ·  Internal</a:t>
-            </a:r>
-          </a:p>
-        </p:txBody>
-      </p:sp>
-      <p:sp>
-        <p:nvSpPr>
-          <p:cNvPr id="8" name="TextBox 7"/>
-          <p:cNvSpPr txBox="1"/>
-          <p:nvPr/>
-        </p:nvSpPr>
-        <p:spPr>
-          <a:xfrm>
-            <a:off x="11109960" y="6473952"/>
-            <a:ext cx="640080" cy="256032"/>
-          </a:xfrm>
-          <a:prstGeom prst="rect">
-            <a:avLst/>
-          </a:prstGeom>
-          <a:noFill/>
-        </p:spPr>
-        <p:txBody>
-          <a:bodyPr wrap="square" anchor="t" lIns="50800" rIns="50800">
-            <a:spAutoFit/>
-          </a:bodyPr>
-          <a:lstStyle/>
-          <a:p>
-            <a:pPr algn="r">
-              <a:defRPr sz="900" b="0">
-                <a:solidFill>
-                  <a:srgbClr val="94A3B8"/>
-                </a:solidFill>
-                <a:latin typeface="Segoe UI"/>
-              </a:defRPr>
-            </a:pPr>
-            <a:r>
-              <a:t>16</a:t>
+              <a:t>Lock · Respond · Resolve within 24 hours</a:t>
             </a:r>
           </a:p>
         </p:txBody>
@@ -6774,7 +7087,7 @@
               </a:defRPr>
             </a:pPr>
             <a:r>
-              <a:t>Repository Map — Where Standards Live</a:t>
+              <a:t>Critical Defects — Main Lock &amp; SLA</a:t>
             </a:r>
           </a:p>
         </p:txBody>
@@ -6810,7 +7123,7 @@
               </a:defRPr>
             </a:pPr>
             <a:r>
-              <a:t>If it's not in the repo, treat as unknown — per ROLE.md</a:t>
+              <a:t>Accountability when the pipeline must stop</a:t>
             </a:r>
           </a:p>
         </p:txBody>
@@ -6852,7 +7165,7 @@
               </a:defRPr>
             </a:pPr>
             <a:r>
-              <a:t>  00_SYSTEM — PROMPTS.md (H), ROLE.md, CONSTRAINTS.md, GLOSSARY.md</a:t>
+              <a:t>  Legitimate critical defect → lock monolith/main + automation/main</a:t>
             </a:r>
           </a:p>
           <a:p>
@@ -6871,7 +7184,7 @@
               </a:defRPr>
             </a:pPr>
             <a:r>
-              <a:t>  04_EXECUTION — DEFECT_LIFECYCLE, TRIAGE_RULES, FLAKINESS_PLAYBOOK, RCA_PROCESS</a:t>
+              <a:t>  Responsible party must respond immediately — name visible in change set</a:t>
             </a:r>
           </a:p>
           <a:p>
@@ -6890,7 +7203,7 @@
               </a:defRPr>
             </a:pPr>
             <a:r>
-              <a:t>  05_ONBOARDING — HOW_TO_REPETITIVE_TASKS.md (step-by-step)</a:t>
+              <a:t>  Target: resolution within 24 hours (revert or fix + verified regression)</a:t>
             </a:r>
           </a:p>
           <a:p>
@@ -6909,7 +7222,7 @@
               </a:defRPr>
             </a:pPr>
             <a:r>
-              <a:t>  06_TEMPLATES — JIRA_TICKET_TEMPLATE, RCA_TEMPLATE</a:t>
+              <a:t>  Not for environment, data, or flaky failures</a:t>
             </a:r>
           </a:p>
           <a:p>
@@ -6928,7 +7241,7 @@
               </a:defRPr>
             </a:pPr>
             <a:r>
-              <a:t>  10_IMPORTS_RAW — regression_reports/, Confluence Bug Handling PDFs</a:t>
+              <a:t>  </a:t>
             </a:r>
           </a:p>
           <a:p>
@@ -6947,7 +7260,45 @@
               </a:defRPr>
             </a:pPr>
             <a:r>
-              <a:t>  This module — automation-bug-lifecycle/ (playbook + deck + generator)</a:t>
+              <a:t>  Notify: failure email + Teams from Prompt H output</a:t>
+            </a:r>
+          </a:p>
+          <a:p>
+            <a:pPr>
+              <a:lnSpc>
+                <a:spcPct val="130000"/>
+              </a:lnSpc>
+              <a:spcAft>
+                <a:spcPts val="800"/>
+              </a:spcAft>
+              <a:defRPr sz="1500">
+                <a:solidFill>
+                  <a:srgbClr val="1E293B"/>
+                </a:solidFill>
+                <a:latin typeface="Segoe UI"/>
+              </a:defRPr>
+            </a:pPr>
+            <a:r>
+              <a:t>  Track: JIRA with change set comment until Verified → Closed</a:t>
+            </a:r>
+          </a:p>
+          <a:p>
+            <a:pPr>
+              <a:lnSpc>
+                <a:spcPct val="130000"/>
+              </a:lnSpc>
+              <a:spcAft>
+                <a:spcPts val="800"/>
+              </a:spcAft>
+              <a:defRPr sz="1500">
+                <a:solidFill>
+                  <a:srgbClr val="1E293B"/>
+                </a:solidFill>
+                <a:latin typeface="Segoe UI"/>
+              </a:defRPr>
+            </a:pPr>
+            <a:r>
+              <a:t>  Close: resolution email → unlock main branches</a:t>
             </a:r>
           </a:p>
         </p:txBody>
@@ -7169,7 +7520,7 @@
               </a:defRPr>
             </a:pPr>
             <a:r>
-              <a:t>Key Takeaways</a:t>
+              <a:t>Defect Lifecycle</a:t>
             </a:r>
           </a:p>
         </p:txBody>
@@ -7205,7 +7556,372 @@
               </a:defRPr>
             </a:pPr>
             <a:r>
-              <a:t>QA Automation operating norm</a:t>
+              <a:t>JIRA states</a:t>
+            </a:r>
+          </a:p>
+        </p:txBody>
+      </p:sp>
+      <p:sp>
+        <p:nvSpPr>
+          <p:cNvPr id="6" name="Rounded Rectangle 5"/>
+          <p:cNvSpPr/>
+          <p:nvPr/>
+        </p:nvSpPr>
+        <p:spPr>
+          <a:xfrm>
+            <a:off x="548640" y="1298448"/>
+            <a:ext cx="11313871" cy="4910328"/>
+          </a:xfrm>
+          <a:prstGeom prst="roundRect">
+            <a:avLst>
+              <a:gd name="adj" fmla="val 6000"/>
+            </a:avLst>
+          </a:prstGeom>
+          <a:solidFill>
+            <a:srgbClr val="FFFFFF"/>
+          </a:solidFill>
+          <a:ln w="15875">
+            <a:solidFill>
+              <a:srgbClr val="E2E8F0"/>
+            </a:solidFill>
+          </a:ln>
+        </p:spPr>
+        <p:style>
+          <a:lnRef idx="1">
+            <a:schemeClr val="accent1"/>
+          </a:lnRef>
+          <a:fillRef idx="3">
+            <a:schemeClr val="accent1"/>
+          </a:fillRef>
+          <a:effectRef idx="2">
+            <a:schemeClr val="accent1"/>
+          </a:effectRef>
+          <a:fontRef idx="minor">
+            <a:schemeClr val="lt1"/>
+          </a:fontRef>
+        </p:style>
+        <p:txBody>
+          <a:bodyPr rtlCol="0" anchor="ctr"/>
+          <a:lstStyle/>
+          <a:p>
+            <a:pPr algn="ctr"/>
+          </a:p>
+        </p:txBody>
+      </p:sp>
+      <p:pic>
+        <p:nvPicPr>
+          <p:cNvPr id="7" name="Picture 6" descr="chart_defect_lifecycle.png"/>
+          <p:cNvPicPr>
+            <a:picLocks noChangeAspect="1"/>
+          </p:cNvPicPr>
+          <p:nvPr/>
+        </p:nvPicPr>
+        <p:blipFill>
+          <a:blip r:embed="rId2"/>
+          <a:stretch>
+            <a:fillRect/>
+          </a:stretch>
+        </p:blipFill>
+        <p:spPr>
+          <a:xfrm>
+            <a:off x="658368" y="1408176"/>
+            <a:ext cx="11094415" cy="3004737"/>
+          </a:xfrm>
+          <a:prstGeom prst="rect">
+            <a:avLst/>
+          </a:prstGeom>
+        </p:spPr>
+      </p:pic>
+      <p:sp>
+        <p:nvSpPr>
+          <p:cNvPr id="8" name="TextBox 7"/>
+          <p:cNvSpPr txBox="1"/>
+          <p:nvPr/>
+        </p:nvSpPr>
+        <p:spPr>
+          <a:xfrm>
+            <a:off x="658368" y="4467777"/>
+            <a:ext cx="11094415" cy="347472"/>
+          </a:xfrm>
+          <a:prstGeom prst="rect">
+            <a:avLst/>
+          </a:prstGeom>
+          <a:noFill/>
+        </p:spPr>
+        <p:txBody>
+          <a:bodyPr wrap="square" anchor="t" lIns="50800" rIns="50800">
+            <a:spAutoFit/>
+          </a:bodyPr>
+          <a:lstStyle/>
+          <a:p>
+            <a:pPr algn="ctr">
+              <a:defRPr sz="1000" b="0">
+                <a:solidFill>
+                  <a:srgbClr val="94A3B8"/>
+                </a:solidFill>
+                <a:latin typeface="Segoe UI"/>
+              </a:defRPr>
+            </a:pPr>
+            <a:r>
+              <a:t>process/DEFECT_LIFECYCLE.md · TRIAGE_RULES.md</a:t>
+            </a:r>
+          </a:p>
+        </p:txBody>
+      </p:sp>
+      <p:sp>
+        <p:nvSpPr>
+          <p:cNvPr id="9" name="TextBox 8"/>
+          <p:cNvSpPr txBox="1"/>
+          <p:nvPr/>
+        </p:nvSpPr>
+        <p:spPr>
+          <a:xfrm>
+            <a:off x="548640" y="6473952"/>
+            <a:ext cx="9144000" cy="256032"/>
+          </a:xfrm>
+          <a:prstGeom prst="rect">
+            <a:avLst/>
+          </a:prstGeom>
+          <a:noFill/>
+        </p:spPr>
+        <p:txBody>
+          <a:bodyPr wrap="square" anchor="t" lIns="50800" rIns="50800">
+            <a:spAutoFit/>
+          </a:bodyPr>
+          <a:lstStyle/>
+          <a:p>
+            <a:pPr algn="l">
+              <a:defRPr sz="900" b="0">
+                <a:solidFill>
+                  <a:srgbClr val="94A3B8"/>
+                </a:solidFill>
+                <a:latin typeface="Segoe UI"/>
+              </a:defRPr>
+            </a:pPr>
+            <a:r>
+              <a:t>QA Automation Standard  ·  Automation Bug Lifecycle  ·  Internal</a:t>
+            </a:r>
+          </a:p>
+        </p:txBody>
+      </p:sp>
+      <p:sp>
+        <p:nvSpPr>
+          <p:cNvPr id="10" name="TextBox 9"/>
+          <p:cNvSpPr txBox="1"/>
+          <p:nvPr/>
+        </p:nvSpPr>
+        <p:spPr>
+          <a:xfrm>
+            <a:off x="11109960" y="6473952"/>
+            <a:ext cx="640080" cy="256032"/>
+          </a:xfrm>
+          <a:prstGeom prst="rect">
+            <a:avLst/>
+          </a:prstGeom>
+          <a:noFill/>
+        </p:spPr>
+        <p:txBody>
+          <a:bodyPr wrap="square" anchor="t" lIns="50800" rIns="50800">
+            <a:spAutoFit/>
+          </a:bodyPr>
+          <a:lstStyle/>
+          <a:p>
+            <a:pPr algn="r">
+              <a:defRPr sz="900" b="0">
+                <a:solidFill>
+                  <a:srgbClr val="94A3B8"/>
+                </a:solidFill>
+                <a:latin typeface="Segoe UI"/>
+              </a:defRPr>
+            </a:pPr>
+            <a:r>
+              <a:t>18</a:t>
+            </a:r>
+          </a:p>
+        </p:txBody>
+      </p:sp>
+    </p:spTree>
+  </p:cSld>
+  <p:clrMapOvr>
+    <a:masterClrMapping/>
+  </p:clrMapOvr>
+</p:sld>
+</file>
+
+<file path=ppt/slides/slide19.xml><?xml version="1.0" encoding="utf-8"?>
+<p:sld xmlns:a="http://schemas.openxmlformats.org/drawingml/2006/main" xmlns:p="http://schemas.openxmlformats.org/presentationml/2006/main" xmlns:r="http://schemas.openxmlformats.org/officeDocument/2006/relationships">
+  <p:cSld>
+    <p:bg>
+      <p:bgPr>
+        <a:solidFill>
+          <a:srgbClr val="F8FAFC"/>
+        </a:solidFill>
+        <a:effectLst/>
+      </p:bgPr>
+    </p:bg>
+    <p:spTree>
+      <p:nvGrpSpPr>
+        <p:cNvPr id="1" name=""/>
+        <p:cNvGrpSpPr/>
+        <p:nvPr/>
+      </p:nvGrpSpPr>
+      <p:grpSpPr/>
+      <p:sp>
+        <p:nvSpPr>
+          <p:cNvPr id="2" name="Rounded Rectangle 1"/>
+          <p:cNvSpPr/>
+          <p:nvPr/>
+        </p:nvSpPr>
+        <p:spPr>
+          <a:xfrm>
+            <a:off x="0" y="0"/>
+            <a:ext cx="12191695" cy="1005840"/>
+          </a:xfrm>
+          <a:prstGeom prst="roundRect">
+            <a:avLst>
+              <a:gd name="adj" fmla="val 6000"/>
+            </a:avLst>
+          </a:prstGeom>
+          <a:solidFill>
+            <a:srgbClr val="003241"/>
+          </a:solidFill>
+          <a:ln>
+            <a:noFill/>
+          </a:ln>
+        </p:spPr>
+        <p:style>
+          <a:lnRef idx="1">
+            <a:schemeClr val="accent1"/>
+          </a:lnRef>
+          <a:fillRef idx="3">
+            <a:schemeClr val="accent1"/>
+          </a:fillRef>
+          <a:effectRef idx="2">
+            <a:schemeClr val="accent1"/>
+          </a:effectRef>
+          <a:fontRef idx="minor">
+            <a:schemeClr val="lt1"/>
+          </a:fontRef>
+        </p:style>
+        <p:txBody>
+          <a:bodyPr rtlCol="0" anchor="ctr"/>
+          <a:lstStyle/>
+          <a:p>
+            <a:pPr algn="ctr"/>
+          </a:p>
+        </p:txBody>
+      </p:sp>
+      <p:sp>
+        <p:nvSpPr>
+          <p:cNvPr id="3" name="Rectangle 2"/>
+          <p:cNvSpPr/>
+          <p:nvPr/>
+        </p:nvSpPr>
+        <p:spPr>
+          <a:xfrm>
+            <a:off x="0" y="1005840"/>
+            <a:ext cx="12191695" cy="64008"/>
+          </a:xfrm>
+          <a:prstGeom prst="rect">
+            <a:avLst/>
+          </a:prstGeom>
+          <a:solidFill>
+            <a:srgbClr val="009E86"/>
+          </a:solidFill>
+          <a:ln>
+            <a:noFill/>
+          </a:ln>
+        </p:spPr>
+        <p:style>
+          <a:lnRef idx="1">
+            <a:schemeClr val="accent1"/>
+          </a:lnRef>
+          <a:fillRef idx="3">
+            <a:schemeClr val="accent1"/>
+          </a:fillRef>
+          <a:effectRef idx="2">
+            <a:schemeClr val="accent1"/>
+          </a:effectRef>
+          <a:fontRef idx="minor">
+            <a:schemeClr val="lt1"/>
+          </a:fontRef>
+        </p:style>
+        <p:txBody>
+          <a:bodyPr rtlCol="0" anchor="ctr"/>
+          <a:lstStyle/>
+          <a:p>
+            <a:pPr algn="ctr"/>
+          </a:p>
+        </p:txBody>
+      </p:sp>
+      <p:sp>
+        <p:nvSpPr>
+          <p:cNvPr id="4" name="TextBox 3"/>
+          <p:cNvSpPr txBox="1"/>
+          <p:nvPr/>
+        </p:nvSpPr>
+        <p:spPr>
+          <a:xfrm>
+            <a:off x="548640" y="182880"/>
+            <a:ext cx="10058400" cy="502920"/>
+          </a:xfrm>
+          <a:prstGeom prst="rect">
+            <a:avLst/>
+          </a:prstGeom>
+          <a:noFill/>
+        </p:spPr>
+        <p:txBody>
+          <a:bodyPr wrap="square" anchor="t" lIns="50800" rIns="50800">
+            <a:spAutoFit/>
+          </a:bodyPr>
+          <a:lstStyle/>
+          <a:p>
+            <a:pPr algn="l">
+              <a:defRPr sz="3000" b="1">
+                <a:solidFill>
+                  <a:srgbClr val="FFFFFF"/>
+                </a:solidFill>
+                <a:latin typeface="Segoe UI"/>
+              </a:defRPr>
+            </a:pPr>
+            <a:r>
+              <a:t>Resolution Standard</a:t>
+            </a:r>
+          </a:p>
+        </p:txBody>
+      </p:sp>
+      <p:sp>
+        <p:nvSpPr>
+          <p:cNvPr id="5" name="TextBox 4"/>
+          <p:cNvSpPr txBox="1"/>
+          <p:nvPr/>
+        </p:nvSpPr>
+        <p:spPr>
+          <a:xfrm>
+            <a:off x="548640" y="658368"/>
+            <a:ext cx="10058400" cy="320040"/>
+          </a:xfrm>
+          <a:prstGeom prst="rect">
+            <a:avLst/>
+          </a:prstGeom>
+          <a:noFill/>
+        </p:spPr>
+        <p:txBody>
+          <a:bodyPr wrap="square" anchor="t" lIns="50800" rIns="50800">
+            <a:spAutoFit/>
+          </a:bodyPr>
+          <a:lstStyle/>
+          <a:p>
+            <a:pPr algn="l">
+              <a:defRPr sz="1300" b="0">
+                <a:solidFill>
+                  <a:srgbClr val="05A2C6"/>
+                </a:solidFill>
+                <a:latin typeface="Segoe UI"/>
+              </a:defRPr>
+            </a:pPr>
+            <a:r>
+              <a:t>Confluence 1b. Automation Bug Resolution Follow-Up</a:t>
             </a:r>
           </a:p>
         </p:txBody>
@@ -7247,7 +7963,7 @@
               </a:defRPr>
             </a:pPr>
             <a:r>
-              <a:t>  Triage first — not every failure is a defect</a:t>
+              <a:t>  Dev delivers fix or revert on affected branch</a:t>
             </a:r>
           </a:p>
           <a:p>
@@ -7266,7 +7982,7 @@
               </a:defRPr>
             </a:pPr>
             <a:r>
-              <a:t>  One evidence folder · one Prompt H run · one bug .md per issue</a:t>
+              <a:t>  QA reruns impacted scenarios (full regression optional)</a:t>
             </a:r>
           </a:p>
           <a:p>
@@ -7285,7 +8001,7 @@
               </a:defRPr>
             </a:pPr>
             <a:r>
-              <a:t>  Communications use leadership-approved templates — no improvisation</a:t>
+              <a:t>  Update JIRA with RCA → Verified → Closed</a:t>
             </a:r>
           </a:p>
           <a:p>
@@ -7304,7 +8020,7 @@
               </a:defRPr>
             </a:pPr>
             <a:r>
-              <a:t>  GitLab PM answers who merged and committed in the failure window</a:t>
+              <a:t>  Send resolution email — same To/Cc as failure (template 1b)</a:t>
             </a:r>
           </a:p>
           <a:p>
@@ -7323,7 +8039,7 @@
               </a:defRPr>
             </a:pPr>
             <a:r>
-              <a:t>  Standard applies to any team, any program, going forward</a:t>
+              <a:t>  Unlock monolith/main + automation/main if locked</a:t>
             </a:r>
           </a:p>
           <a:p>
@@ -7342,7 +8058,7 @@
               </a:defRPr>
             </a:pPr>
             <a:r>
-              <a:t>  Full playbook: automation-bug-lifecycle/_output/Automation-Bug-Lifecycle-Playbook.docx</a:t>
+              <a:t>  Update bug .md: JIRA link, Status Closed, resolution section filled</a:t>
             </a:r>
           </a:p>
         </p:txBody>
@@ -7414,7 +8130,7 @@
               </a:defRPr>
             </a:pPr>
             <a:r>
-              <a:t>18</a:t>
+              <a:t>19</a:t>
             </a:r>
           </a:p>
         </p:txBody>
@@ -7564,7 +8280,7 @@
               </a:defRPr>
             </a:pPr>
             <a:r>
-              <a:t>What This Standard Defines</a:t>
+              <a:t>Continuation — Where We Left Off</a:t>
             </a:r>
           </a:p>
         </p:txBody>
@@ -7600,7 +8316,7 @@
               </a:defRPr>
             </a:pPr>
             <a:r>
-              <a:t>Operating norm for all teams</a:t>
+              <a:t>From standard to daily practice</a:t>
             </a:r>
           </a:p>
         </p:txBody>
@@ -7642,7 +8358,7 @@
               </a:defRPr>
             </a:pPr>
             <a:r>
-              <a:t>  Repeatable response when V2 (Jenkins) or V3 (GitLab) regression fails</a:t>
+              <a:t>  Prior sessions: defined the Automation Bug Lifecycle standard (triage → evidence → notify → resolve)</a:t>
             </a:r>
           </a:p>
           <a:p>
@@ -7661,7 +8377,7 @@
               </a:defRPr>
             </a:pPr>
             <a:r>
-              <a:t>  Applies to any QA Automation team — UI, API, performance, any program</a:t>
+              <a:t>  Today: how we operationalize it with this repo, Cursor AI, and GitLab Project Manager</a:t>
             </a:r>
           </a:p>
           <a:p>
@@ -7680,7 +8396,7 @@
               </a:defRPr>
             </a:pPr>
             <a:r>
-              <a:t>  Single source of truth: qa-automation-kb (00_SYSTEM through 11_BACKLOG)</a:t>
+              <a:t>  Goal: any engineer can run the full workflow in ~15 minutes per real defect</a:t>
             </a:r>
           </a:p>
           <a:p>
@@ -7699,7 +8415,7 @@
               </a:defRPr>
             </a:pPr>
             <a:r>
-              <a:t>  Integrates triage rules, Prompt H, leadership-approved comms, and GitLab change-set tooling</a:t>
+              <a:t>  Not meeting-specific — QA Automation operating norm for all teams and programs</a:t>
             </a:r>
           </a:p>
           <a:p>
@@ -7718,7 +8434,7 @@
               </a:defRPr>
             </a:pPr>
             <a:r>
-              <a:t>  Goal: fast, accurate footprint — not ad-hoc firefighting or noisy JIRA</a:t>
+              <a:t>  Evidence examples already in evidence/regression-reports/ — real failures, real outputs</a:t>
             </a:r>
           </a:p>
         </p:txBody>
@@ -7791,6 +8507,1586 @@
             </a:pPr>
             <a:r>
               <a:t>2</a:t>
+            </a:r>
+          </a:p>
+        </p:txBody>
+      </p:sp>
+    </p:spTree>
+  </p:cSld>
+  <p:clrMapOvr>
+    <a:masterClrMapping/>
+  </p:clrMapOvr>
+</p:sld>
+</file>
+
+<file path=ppt/slides/slide20.xml><?xml version="1.0" encoding="utf-8"?>
+<p:sld xmlns:a="http://schemas.openxmlformats.org/drawingml/2006/main" xmlns:p="http://schemas.openxmlformats.org/presentationml/2006/main" xmlns:r="http://schemas.openxmlformats.org/officeDocument/2006/relationships">
+  <p:cSld>
+    <p:bg>
+      <p:bgPr>
+        <a:solidFill>
+          <a:srgbClr val="F8FAFC"/>
+        </a:solidFill>
+        <a:effectLst/>
+      </p:bgPr>
+    </p:bg>
+    <p:spTree>
+      <p:nvGrpSpPr>
+        <p:cNvPr id="1" name=""/>
+        <p:cNvGrpSpPr/>
+        <p:nvPr/>
+      </p:nvGrpSpPr>
+      <p:grpSpPr/>
+      <p:sp>
+        <p:nvSpPr>
+          <p:cNvPr id="2" name="Rounded Rectangle 1"/>
+          <p:cNvSpPr/>
+          <p:nvPr/>
+        </p:nvSpPr>
+        <p:spPr>
+          <a:xfrm>
+            <a:off x="0" y="0"/>
+            <a:ext cx="12191695" cy="1005840"/>
+          </a:xfrm>
+          <a:prstGeom prst="roundRect">
+            <a:avLst>
+              <a:gd name="adj" fmla="val 6000"/>
+            </a:avLst>
+          </a:prstGeom>
+          <a:solidFill>
+            <a:srgbClr val="003241"/>
+          </a:solidFill>
+          <a:ln>
+            <a:noFill/>
+          </a:ln>
+        </p:spPr>
+        <p:style>
+          <a:lnRef idx="1">
+            <a:schemeClr val="accent1"/>
+          </a:lnRef>
+          <a:fillRef idx="3">
+            <a:schemeClr val="accent1"/>
+          </a:fillRef>
+          <a:effectRef idx="2">
+            <a:schemeClr val="accent1"/>
+          </a:effectRef>
+          <a:fontRef idx="minor">
+            <a:schemeClr val="lt1"/>
+          </a:fontRef>
+        </p:style>
+        <p:txBody>
+          <a:bodyPr rtlCol="0" anchor="ctr"/>
+          <a:lstStyle/>
+          <a:p>
+            <a:pPr algn="ctr"/>
+          </a:p>
+        </p:txBody>
+      </p:sp>
+      <p:sp>
+        <p:nvSpPr>
+          <p:cNvPr id="3" name="Rectangle 2"/>
+          <p:cNvSpPr/>
+          <p:nvPr/>
+        </p:nvSpPr>
+        <p:spPr>
+          <a:xfrm>
+            <a:off x="0" y="1005840"/>
+            <a:ext cx="12191695" cy="64008"/>
+          </a:xfrm>
+          <a:prstGeom prst="rect">
+            <a:avLst/>
+          </a:prstGeom>
+          <a:solidFill>
+            <a:srgbClr val="009E86"/>
+          </a:solidFill>
+          <a:ln>
+            <a:noFill/>
+          </a:ln>
+        </p:spPr>
+        <p:style>
+          <a:lnRef idx="1">
+            <a:schemeClr val="accent1"/>
+          </a:lnRef>
+          <a:fillRef idx="3">
+            <a:schemeClr val="accent1"/>
+          </a:fillRef>
+          <a:effectRef idx="2">
+            <a:schemeClr val="accent1"/>
+          </a:effectRef>
+          <a:fontRef idx="minor">
+            <a:schemeClr val="lt1"/>
+          </a:fontRef>
+        </p:style>
+        <p:txBody>
+          <a:bodyPr rtlCol="0" anchor="ctr"/>
+          <a:lstStyle/>
+          <a:p>
+            <a:pPr algn="ctr"/>
+          </a:p>
+        </p:txBody>
+      </p:sp>
+      <p:sp>
+        <p:nvSpPr>
+          <p:cNvPr id="4" name="TextBox 3"/>
+          <p:cNvSpPr txBox="1"/>
+          <p:nvPr/>
+        </p:nvSpPr>
+        <p:spPr>
+          <a:xfrm>
+            <a:off x="548640" y="182880"/>
+            <a:ext cx="10058400" cy="502920"/>
+          </a:xfrm>
+          <a:prstGeom prst="rect">
+            <a:avLst/>
+          </a:prstGeom>
+          <a:noFill/>
+        </p:spPr>
+        <p:txBody>
+          <a:bodyPr wrap="square" anchor="t" lIns="50800" rIns="50800">
+            <a:spAutoFit/>
+          </a:bodyPr>
+          <a:lstStyle/>
+          <a:p>
+            <a:pPr algn="l">
+              <a:defRPr sz="3000" b="1">
+                <a:solidFill>
+                  <a:srgbClr val="FFFFFF"/>
+                </a:solidFill>
+                <a:latin typeface="Segoe UI"/>
+              </a:defRPr>
+            </a:pPr>
+            <a:r>
+              <a:t>How Your Team Tries It</a:t>
+            </a:r>
+          </a:p>
+        </p:txBody>
+      </p:sp>
+      <p:sp>
+        <p:nvSpPr>
+          <p:cNvPr id="5" name="TextBox 4"/>
+          <p:cNvSpPr txBox="1"/>
+          <p:nvPr/>
+        </p:nvSpPr>
+        <p:spPr>
+          <a:xfrm>
+            <a:off x="548640" y="658368"/>
+            <a:ext cx="10058400" cy="320040"/>
+          </a:xfrm>
+          <a:prstGeom prst="rect">
+            <a:avLst/>
+          </a:prstGeom>
+          <a:noFill/>
+        </p:spPr>
+        <p:txBody>
+          <a:bodyPr wrap="square" anchor="t" lIns="50800" rIns="50800">
+            <a:spAutoFit/>
+          </a:bodyPr>
+          <a:lstStyle/>
+          <a:p>
+            <a:pPr algn="l">
+              <a:defRPr sz="1300" b="0">
+                <a:solidFill>
+                  <a:srgbClr val="05A2C6"/>
+                </a:solidFill>
+                <a:latin typeface="Segoe UI"/>
+              </a:defRPr>
+            </a:pPr>
+            <a:r>
+              <a:t>Hands-on adoption — start with a real or sample failure</a:t>
+            </a:r>
+          </a:p>
+        </p:txBody>
+      </p:sp>
+      <p:sp>
+        <p:nvSpPr>
+          <p:cNvPr id="6" name="TextBox 5"/>
+          <p:cNvSpPr txBox="1"/>
+          <p:nvPr/>
+        </p:nvSpPr>
+        <p:spPr>
+          <a:xfrm>
+            <a:off x="548640" y="1298448"/>
+            <a:ext cx="11094415" cy="4937760"/>
+          </a:xfrm>
+          <a:prstGeom prst="rect">
+            <a:avLst/>
+          </a:prstGeom>
+          <a:noFill/>
+        </p:spPr>
+        <p:txBody>
+          <a:bodyPr wrap="square">
+            <a:spAutoFit/>
+          </a:bodyPr>
+          <a:lstStyle/>
+          <a:p>
+            <a:pPr>
+              <a:lnSpc>
+                <a:spcPct val="130000"/>
+              </a:lnSpc>
+              <a:spcAft>
+                <a:spcPts val="800"/>
+              </a:spcAft>
+              <a:defRPr sz="1500">
+                <a:solidFill>
+                  <a:srgbClr val="1E293B"/>
+                </a:solidFill>
+                <a:latin typeface="Segoe UI"/>
+              </a:defRPr>
+            </a:pPr>
+            <a:r>
+              <a:t>  One-time: copy cursor-kit/SKILL.md → .cursor/skills/ · clone GitLab PM</a:t>
+            </a:r>
+          </a:p>
+          <a:p>
+            <a:pPr>
+              <a:lnSpc>
+                <a:spcPct val="130000"/>
+              </a:lnSpc>
+              <a:spcAft>
+                <a:spcPts val="800"/>
+              </a:spcAft>
+              <a:defRPr sz="1500">
+                <a:solidFill>
+                  <a:srgbClr val="1E293B"/>
+                </a:solidFill>
+                <a:latin typeface="Segoe UI"/>
+              </a:defRPr>
+            </a:pPr>
+            <a:r>
+              <a:t>  Per failure: new-evidence-folder.ps1 → drop screenshots and logs</a:t>
+            </a:r>
+          </a:p>
+          <a:p>
+            <a:pPr>
+              <a:lnSpc>
+                <a:spcPct val="130000"/>
+              </a:lnSpc>
+              <a:spcAft>
+                <a:spcPts val="800"/>
+              </a:spcAft>
+              <a:defRPr sz="1500">
+                <a:solidFill>
+                  <a:srgbClr val="1E293B"/>
+                </a:solidFill>
+                <a:latin typeface="Segoe UI"/>
+              </a:defRPr>
+            </a:pPr>
+            <a:r>
+              <a:t>  Triage: prompts/01 — env/flaky stops here; defect continues</a:t>
+            </a:r>
+          </a:p>
+          <a:p>
+            <a:pPr>
+              <a:lnSpc>
+                <a:spcPct val="130000"/>
+              </a:lnSpc>
+              <a:spcAft>
+                <a:spcPts val="800"/>
+              </a:spcAft>
+              <a:defRPr sz="1500">
+                <a:solidFill>
+                  <a:srgbClr val="1E293B"/>
+                </a:solidFill>
+                <a:latin typeface="Segoe UI"/>
+              </a:defRPr>
+            </a:pPr>
+            <a:r>
+              <a:t>  Prompt H: prompts/02 — attach images → one .md with JIRA + email + Teams</a:t>
+            </a:r>
+          </a:p>
+          <a:p>
+            <a:pPr>
+              <a:lnSpc>
+                <a:spcPct val="130000"/>
+              </a:lnSpc>
+              <a:spcAft>
+                <a:spcPts val="800"/>
+              </a:spcAft>
+              <a:defRPr sz="1500">
+                <a:solidFill>
+                  <a:srgbClr val="1E293B"/>
+                </a:solidFill>
+                <a:latin typeface="Segoe UI"/>
+              </a:defRPr>
+            </a:pPr>
+            <a:r>
+              <a:t>  Create JIRA, send email, post Teams — copy from generated file</a:t>
+            </a:r>
+          </a:p>
+          <a:p>
+            <a:pPr>
+              <a:lnSpc>
+                <a:spcPct val="130000"/>
+              </a:lnSpc>
+              <a:spcAft>
+                <a:spcPts val="800"/>
+              </a:spcAft>
+              <a:defRPr sz="1500">
+                <a:solidFill>
+                  <a:srgbClr val="1E293B"/>
+                </a:solidFill>
+                <a:latin typeface="Segoe UI"/>
+              </a:defRPr>
+            </a:pPr>
+            <a:r>
+              <a:t>  GitLab PM: date range → paste change set → optional prompts/03</a:t>
+            </a:r>
+          </a:p>
+          <a:p>
+            <a:pPr>
+              <a:lnSpc>
+                <a:spcPct val="130000"/>
+              </a:lnSpc>
+              <a:spcAft>
+                <a:spcPts val="800"/>
+              </a:spcAft>
+              <a:defRPr sz="1500">
+                <a:solidFill>
+                  <a:srgbClr val="1E293B"/>
+                </a:solidFill>
+                <a:latin typeface="Segoe UI"/>
+              </a:defRPr>
+            </a:pPr>
+            <a:r>
+              <a:t>  When fixed: prompts/04 resolution email · unlock main · close JIRA</a:t>
+            </a:r>
+          </a:p>
+        </p:txBody>
+      </p:sp>
+      <p:sp>
+        <p:nvSpPr>
+          <p:cNvPr id="7" name="TextBox 6"/>
+          <p:cNvSpPr txBox="1"/>
+          <p:nvPr/>
+        </p:nvSpPr>
+        <p:spPr>
+          <a:xfrm>
+            <a:off x="548640" y="6473952"/>
+            <a:ext cx="9144000" cy="256032"/>
+          </a:xfrm>
+          <a:prstGeom prst="rect">
+            <a:avLst/>
+          </a:prstGeom>
+          <a:noFill/>
+        </p:spPr>
+        <p:txBody>
+          <a:bodyPr wrap="square" anchor="t" lIns="50800" rIns="50800">
+            <a:spAutoFit/>
+          </a:bodyPr>
+          <a:lstStyle/>
+          <a:p>
+            <a:pPr algn="l">
+              <a:defRPr sz="900" b="0">
+                <a:solidFill>
+                  <a:srgbClr val="94A3B8"/>
+                </a:solidFill>
+                <a:latin typeface="Segoe UI"/>
+              </a:defRPr>
+            </a:pPr>
+            <a:r>
+              <a:t>QA Automation Standard  ·  Automation Bug Lifecycle  ·  Internal</a:t>
+            </a:r>
+          </a:p>
+        </p:txBody>
+      </p:sp>
+      <p:sp>
+        <p:nvSpPr>
+          <p:cNvPr id="8" name="TextBox 7"/>
+          <p:cNvSpPr txBox="1"/>
+          <p:nvPr/>
+        </p:nvSpPr>
+        <p:spPr>
+          <a:xfrm>
+            <a:off x="11109960" y="6473952"/>
+            <a:ext cx="640080" cy="256032"/>
+          </a:xfrm>
+          <a:prstGeom prst="rect">
+            <a:avLst/>
+          </a:prstGeom>
+          <a:noFill/>
+        </p:spPr>
+        <p:txBody>
+          <a:bodyPr wrap="square" anchor="t" lIns="50800" rIns="50800">
+            <a:spAutoFit/>
+          </a:bodyPr>
+          <a:lstStyle/>
+          <a:p>
+            <a:pPr algn="r">
+              <a:defRPr sz="900" b="0">
+                <a:solidFill>
+                  <a:srgbClr val="94A3B8"/>
+                </a:solidFill>
+                <a:latin typeface="Segoe UI"/>
+              </a:defRPr>
+            </a:pPr>
+            <a:r>
+              <a:t>20</a:t>
+            </a:r>
+          </a:p>
+        </p:txBody>
+      </p:sp>
+    </p:spTree>
+  </p:cSld>
+  <p:clrMapOvr>
+    <a:masterClrMapping/>
+  </p:clrMapOvr>
+</p:sld>
+</file>
+
+<file path=ppt/slides/slide21.xml><?xml version="1.0" encoding="utf-8"?>
+<p:sld xmlns:a="http://schemas.openxmlformats.org/drawingml/2006/main" xmlns:p="http://schemas.openxmlformats.org/presentationml/2006/main" xmlns:r="http://schemas.openxmlformats.org/officeDocument/2006/relationships">
+  <p:cSld>
+    <p:bg>
+      <p:bgPr>
+        <a:solidFill>
+          <a:srgbClr val="F8FAFC"/>
+        </a:solidFill>
+        <a:effectLst/>
+      </p:bgPr>
+    </p:bg>
+    <p:spTree>
+      <p:nvGrpSpPr>
+        <p:cNvPr id="1" name=""/>
+        <p:cNvGrpSpPr/>
+        <p:nvPr/>
+      </p:nvGrpSpPr>
+      <p:grpSpPr/>
+      <p:sp>
+        <p:nvSpPr>
+          <p:cNvPr id="2" name="Rounded Rectangle 1"/>
+          <p:cNvSpPr/>
+          <p:nvPr/>
+        </p:nvSpPr>
+        <p:spPr>
+          <a:xfrm>
+            <a:off x="0" y="0"/>
+            <a:ext cx="12191695" cy="1005840"/>
+          </a:xfrm>
+          <a:prstGeom prst="roundRect">
+            <a:avLst>
+              <a:gd name="adj" fmla="val 6000"/>
+            </a:avLst>
+          </a:prstGeom>
+          <a:solidFill>
+            <a:srgbClr val="003241"/>
+          </a:solidFill>
+          <a:ln>
+            <a:noFill/>
+          </a:ln>
+        </p:spPr>
+        <p:style>
+          <a:lnRef idx="1">
+            <a:schemeClr val="accent1"/>
+          </a:lnRef>
+          <a:fillRef idx="3">
+            <a:schemeClr val="accent1"/>
+          </a:fillRef>
+          <a:effectRef idx="2">
+            <a:schemeClr val="accent1"/>
+          </a:effectRef>
+          <a:fontRef idx="minor">
+            <a:schemeClr val="lt1"/>
+          </a:fontRef>
+        </p:style>
+        <p:txBody>
+          <a:bodyPr rtlCol="0" anchor="ctr"/>
+          <a:lstStyle/>
+          <a:p>
+            <a:pPr algn="ctr"/>
+          </a:p>
+        </p:txBody>
+      </p:sp>
+      <p:sp>
+        <p:nvSpPr>
+          <p:cNvPr id="3" name="Rectangle 2"/>
+          <p:cNvSpPr/>
+          <p:nvPr/>
+        </p:nvSpPr>
+        <p:spPr>
+          <a:xfrm>
+            <a:off x="0" y="1005840"/>
+            <a:ext cx="12191695" cy="64008"/>
+          </a:xfrm>
+          <a:prstGeom prst="rect">
+            <a:avLst/>
+          </a:prstGeom>
+          <a:solidFill>
+            <a:srgbClr val="009E86"/>
+          </a:solidFill>
+          <a:ln>
+            <a:noFill/>
+          </a:ln>
+        </p:spPr>
+        <p:style>
+          <a:lnRef idx="1">
+            <a:schemeClr val="accent1"/>
+          </a:lnRef>
+          <a:fillRef idx="3">
+            <a:schemeClr val="accent1"/>
+          </a:fillRef>
+          <a:effectRef idx="2">
+            <a:schemeClr val="accent1"/>
+          </a:effectRef>
+          <a:fontRef idx="minor">
+            <a:schemeClr val="lt1"/>
+          </a:fontRef>
+        </p:style>
+        <p:txBody>
+          <a:bodyPr rtlCol="0" anchor="ctr"/>
+          <a:lstStyle/>
+          <a:p>
+            <a:pPr algn="ctr"/>
+          </a:p>
+        </p:txBody>
+      </p:sp>
+      <p:sp>
+        <p:nvSpPr>
+          <p:cNvPr id="4" name="TextBox 3"/>
+          <p:cNvSpPr txBox="1"/>
+          <p:nvPr/>
+        </p:nvSpPr>
+        <p:spPr>
+          <a:xfrm>
+            <a:off x="548640" y="182880"/>
+            <a:ext cx="10058400" cy="502920"/>
+          </a:xfrm>
+          <a:prstGeom prst="rect">
+            <a:avLst/>
+          </a:prstGeom>
+          <a:noFill/>
+        </p:spPr>
+        <p:txBody>
+          <a:bodyPr wrap="square" anchor="t" lIns="50800" rIns="50800">
+            <a:spAutoFit/>
+          </a:bodyPr>
+          <a:lstStyle/>
+          <a:p>
+            <a:pPr algn="l">
+              <a:defRPr sz="3000" b="1">
+                <a:solidFill>
+                  <a:srgbClr val="FFFFFF"/>
+                </a:solidFill>
+                <a:latin typeface="Segoe UI"/>
+              </a:defRPr>
+            </a:pPr>
+            <a:r>
+              <a:t>Multi-Failure Rollup</a:t>
+            </a:r>
+          </a:p>
+        </p:txBody>
+      </p:sp>
+      <p:sp>
+        <p:nvSpPr>
+          <p:cNvPr id="5" name="TextBox 4"/>
+          <p:cNvSpPr txBox="1"/>
+          <p:nvPr/>
+        </p:nvSpPr>
+        <p:spPr>
+          <a:xfrm>
+            <a:off x="548640" y="658368"/>
+            <a:ext cx="10058400" cy="320040"/>
+          </a:xfrm>
+          <a:prstGeom prst="rect">
+            <a:avLst/>
+          </a:prstGeom>
+          <a:noFill/>
+        </p:spPr>
+        <p:txBody>
+          <a:bodyPr wrap="square" anchor="t" lIns="50800" rIns="50800">
+            <a:spAutoFit/>
+          </a:bodyPr>
+          <a:lstStyle/>
+          <a:p>
+            <a:pPr algn="l">
+              <a:defRPr sz="1300" b="0">
+                <a:solidFill>
+                  <a:srgbClr val="05A2C6"/>
+                </a:solidFill>
+                <a:latin typeface="Segoe UI"/>
+              </a:defRPr>
+            </a:pPr>
+            <a:r>
+              <a:t>When many tests fail at once</a:t>
+            </a:r>
+          </a:p>
+        </p:txBody>
+      </p:sp>
+      <p:sp>
+        <p:nvSpPr>
+          <p:cNvPr id="6" name="TextBox 5"/>
+          <p:cNvSpPr txBox="1"/>
+          <p:nvPr/>
+        </p:nvSpPr>
+        <p:spPr>
+          <a:xfrm>
+            <a:off x="548640" y="1298448"/>
+            <a:ext cx="11094415" cy="4937760"/>
+          </a:xfrm>
+          <a:prstGeom prst="rect">
+            <a:avLst/>
+          </a:prstGeom>
+          <a:noFill/>
+        </p:spPr>
+        <p:txBody>
+          <a:bodyPr wrap="square">
+            <a:spAutoFit/>
+          </a:bodyPr>
+          <a:lstStyle/>
+          <a:p>
+            <a:pPr>
+              <a:lnSpc>
+                <a:spcPct val="130000"/>
+              </a:lnSpc>
+              <a:spcAft>
+                <a:spcPts val="800"/>
+              </a:spcAft>
+              <a:defRPr sz="1500">
+                <a:solidFill>
+                  <a:srgbClr val="1E293B"/>
+                </a:solidFill>
+                <a:latin typeface="Segoe UI"/>
+              </a:defRPr>
+            </a:pPr>
+            <a:r>
+              <a:t>  Large nightly failures (e.g. 62/358) — group by feature/plan, not per test</a:t>
+            </a:r>
+          </a:p>
+          <a:p>
+            <a:pPr>
+              <a:lnSpc>
+                <a:spcPct val="130000"/>
+              </a:lnSpc>
+              <a:spcAft>
+                <a:spcPts val="800"/>
+              </a:spcAft>
+              <a:defRPr sz="1500">
+                <a:solidFill>
+                  <a:srgbClr val="1E293B"/>
+                </a:solidFill>
+                <a:latin typeface="Segoe UI"/>
+              </a:defRPr>
+            </a:pPr>
+            <a:r>
+              <a:t>  Build failure matrix with root-cause hints per traunch</a:t>
+            </a:r>
+          </a:p>
+          <a:p>
+            <a:pPr>
+              <a:lnSpc>
+                <a:spcPct val="130000"/>
+              </a:lnSpc>
+              <a:spcAft>
+                <a:spcPts val="800"/>
+              </a:spcAft>
+              <a:defRPr sz="1500">
+                <a:solidFill>
+                  <a:srgbClr val="1E293B"/>
+                </a:solidFill>
+                <a:latin typeface="Segoe UI"/>
+              </a:defRPr>
+            </a:pPr>
+            <a:r>
+              <a:t>  One JIRA per root cause — umbrella + children when needed</a:t>
+            </a:r>
+          </a:p>
+          <a:p>
+            <a:pPr>
+              <a:lnSpc>
+                <a:spcPct val="130000"/>
+              </a:lnSpc>
+              <a:spcAft>
+                <a:spcPts val="800"/>
+              </a:spcAft>
+              <a:defRPr sz="1500">
+                <a:solidFill>
+                  <a:srgbClr val="1E293B"/>
+                </a:solidFill>
+                <a:latin typeface="Segoe UI"/>
+              </a:defRPr>
+            </a:pPr>
+            <a:r>
+              <a:t>  Single combined email/Teams with matrix reference</a:t>
+            </a:r>
+          </a:p>
+          <a:p>
+            <a:pPr>
+              <a:lnSpc>
+                <a:spcPct val="130000"/>
+              </a:lnSpc>
+              <a:spcAft>
+                <a:spcPts val="800"/>
+              </a:spcAft>
+              <a:defRPr sz="1500">
+                <a:solidFill>
+                  <a:srgbClr val="1E293B"/>
+                </a:solidFill>
+                <a:latin typeface="Segoe UI"/>
+              </a:defRPr>
+            </a:pPr>
+            <a:r>
+              <a:t>  prompts/05-multi-failure-rollup.md</a:t>
+            </a:r>
+          </a:p>
+        </p:txBody>
+      </p:sp>
+      <p:sp>
+        <p:nvSpPr>
+          <p:cNvPr id="7" name="TextBox 6"/>
+          <p:cNvSpPr txBox="1"/>
+          <p:nvPr/>
+        </p:nvSpPr>
+        <p:spPr>
+          <a:xfrm>
+            <a:off x="548640" y="6473952"/>
+            <a:ext cx="9144000" cy="256032"/>
+          </a:xfrm>
+          <a:prstGeom prst="rect">
+            <a:avLst/>
+          </a:prstGeom>
+          <a:noFill/>
+        </p:spPr>
+        <p:txBody>
+          <a:bodyPr wrap="square" anchor="t" lIns="50800" rIns="50800">
+            <a:spAutoFit/>
+          </a:bodyPr>
+          <a:lstStyle/>
+          <a:p>
+            <a:pPr algn="l">
+              <a:defRPr sz="900" b="0">
+                <a:solidFill>
+                  <a:srgbClr val="94A3B8"/>
+                </a:solidFill>
+                <a:latin typeface="Segoe UI"/>
+              </a:defRPr>
+            </a:pPr>
+            <a:r>
+              <a:t>QA Automation Standard  ·  Automation Bug Lifecycle  ·  Internal</a:t>
+            </a:r>
+          </a:p>
+        </p:txBody>
+      </p:sp>
+      <p:sp>
+        <p:nvSpPr>
+          <p:cNvPr id="8" name="TextBox 7"/>
+          <p:cNvSpPr txBox="1"/>
+          <p:nvPr/>
+        </p:nvSpPr>
+        <p:spPr>
+          <a:xfrm>
+            <a:off x="11109960" y="6473952"/>
+            <a:ext cx="640080" cy="256032"/>
+          </a:xfrm>
+          <a:prstGeom prst="rect">
+            <a:avLst/>
+          </a:prstGeom>
+          <a:noFill/>
+        </p:spPr>
+        <p:txBody>
+          <a:bodyPr wrap="square" anchor="t" lIns="50800" rIns="50800">
+            <a:spAutoFit/>
+          </a:bodyPr>
+          <a:lstStyle/>
+          <a:p>
+            <a:pPr algn="r">
+              <a:defRPr sz="900" b="0">
+                <a:solidFill>
+                  <a:srgbClr val="94A3B8"/>
+                </a:solidFill>
+                <a:latin typeface="Segoe UI"/>
+              </a:defRPr>
+            </a:pPr>
+            <a:r>
+              <a:t>21</a:t>
+            </a:r>
+          </a:p>
+        </p:txBody>
+      </p:sp>
+    </p:spTree>
+  </p:cSld>
+  <p:clrMapOvr>
+    <a:masterClrMapping/>
+  </p:clrMapOvr>
+</p:sld>
+</file>
+
+<file path=ppt/slides/slide22.xml><?xml version="1.0" encoding="utf-8"?>
+<p:sld xmlns:a="http://schemas.openxmlformats.org/drawingml/2006/main" xmlns:p="http://schemas.openxmlformats.org/presentationml/2006/main" xmlns:r="http://schemas.openxmlformats.org/officeDocument/2006/relationships">
+  <p:cSld>
+    <p:bg>
+      <p:bgPr>
+        <a:solidFill>
+          <a:srgbClr val="F8FAFC"/>
+        </a:solidFill>
+        <a:effectLst/>
+      </p:bgPr>
+    </p:bg>
+    <p:spTree>
+      <p:nvGrpSpPr>
+        <p:cNvPr id="1" name=""/>
+        <p:cNvGrpSpPr/>
+        <p:nvPr/>
+      </p:nvGrpSpPr>
+      <p:grpSpPr/>
+      <p:sp>
+        <p:nvSpPr>
+          <p:cNvPr id="2" name="Rounded Rectangle 1"/>
+          <p:cNvSpPr/>
+          <p:nvPr/>
+        </p:nvSpPr>
+        <p:spPr>
+          <a:xfrm>
+            <a:off x="0" y="0"/>
+            <a:ext cx="12191695" cy="1005840"/>
+          </a:xfrm>
+          <a:prstGeom prst="roundRect">
+            <a:avLst>
+              <a:gd name="adj" fmla="val 6000"/>
+            </a:avLst>
+          </a:prstGeom>
+          <a:solidFill>
+            <a:srgbClr val="003241"/>
+          </a:solidFill>
+          <a:ln>
+            <a:noFill/>
+          </a:ln>
+        </p:spPr>
+        <p:style>
+          <a:lnRef idx="1">
+            <a:schemeClr val="accent1"/>
+          </a:lnRef>
+          <a:fillRef idx="3">
+            <a:schemeClr val="accent1"/>
+          </a:fillRef>
+          <a:effectRef idx="2">
+            <a:schemeClr val="accent1"/>
+          </a:effectRef>
+          <a:fontRef idx="minor">
+            <a:schemeClr val="lt1"/>
+          </a:fontRef>
+        </p:style>
+        <p:txBody>
+          <a:bodyPr rtlCol="0" anchor="ctr"/>
+          <a:lstStyle/>
+          <a:p>
+            <a:pPr algn="ctr"/>
+          </a:p>
+        </p:txBody>
+      </p:sp>
+      <p:sp>
+        <p:nvSpPr>
+          <p:cNvPr id="3" name="Rectangle 2"/>
+          <p:cNvSpPr/>
+          <p:nvPr/>
+        </p:nvSpPr>
+        <p:spPr>
+          <a:xfrm>
+            <a:off x="0" y="1005840"/>
+            <a:ext cx="12191695" cy="64008"/>
+          </a:xfrm>
+          <a:prstGeom prst="rect">
+            <a:avLst/>
+          </a:prstGeom>
+          <a:solidFill>
+            <a:srgbClr val="009E86"/>
+          </a:solidFill>
+          <a:ln>
+            <a:noFill/>
+          </a:ln>
+        </p:spPr>
+        <p:style>
+          <a:lnRef idx="1">
+            <a:schemeClr val="accent1"/>
+          </a:lnRef>
+          <a:fillRef idx="3">
+            <a:schemeClr val="accent1"/>
+          </a:fillRef>
+          <a:effectRef idx="2">
+            <a:schemeClr val="accent1"/>
+          </a:effectRef>
+          <a:fontRef idx="minor">
+            <a:schemeClr val="lt1"/>
+          </a:fontRef>
+        </p:style>
+        <p:txBody>
+          <a:bodyPr rtlCol="0" anchor="ctr"/>
+          <a:lstStyle/>
+          <a:p>
+            <a:pPr algn="ctr"/>
+          </a:p>
+        </p:txBody>
+      </p:sp>
+      <p:sp>
+        <p:nvSpPr>
+          <p:cNvPr id="4" name="TextBox 3"/>
+          <p:cNvSpPr txBox="1"/>
+          <p:nvPr/>
+        </p:nvSpPr>
+        <p:spPr>
+          <a:xfrm>
+            <a:off x="548640" y="182880"/>
+            <a:ext cx="10058400" cy="502920"/>
+          </a:xfrm>
+          <a:prstGeom prst="rect">
+            <a:avLst/>
+          </a:prstGeom>
+          <a:noFill/>
+        </p:spPr>
+        <p:txBody>
+          <a:bodyPr wrap="square" anchor="t" lIns="50800" rIns="50800">
+            <a:spAutoFit/>
+          </a:bodyPr>
+          <a:lstStyle/>
+          <a:p>
+            <a:pPr algn="l">
+              <a:defRPr sz="3000" b="1">
+                <a:solidFill>
+                  <a:srgbClr val="FFFFFF"/>
+                </a:solidFill>
+                <a:latin typeface="Segoe UI"/>
+              </a:defRPr>
+            </a:pPr>
+            <a:r>
+              <a:t>Repository Map</a:t>
+            </a:r>
+          </a:p>
+        </p:txBody>
+      </p:sp>
+      <p:sp>
+        <p:nvSpPr>
+          <p:cNvPr id="5" name="TextBox 4"/>
+          <p:cNvSpPr txBox="1"/>
+          <p:nvPr/>
+        </p:nvSpPr>
+        <p:spPr>
+          <a:xfrm>
+            <a:off x="548640" y="658368"/>
+            <a:ext cx="10058400" cy="320040"/>
+          </a:xfrm>
+          <a:prstGeom prst="rect">
+            <a:avLst/>
+          </a:prstGeom>
+          <a:noFill/>
+        </p:spPr>
+        <p:txBody>
+          <a:bodyPr wrap="square" anchor="t" lIns="50800" rIns="50800">
+            <a:spAutoFit/>
+          </a:bodyPr>
+          <a:lstStyle/>
+          <a:p>
+            <a:pPr algn="l">
+              <a:defRPr sz="1300" b="0">
+                <a:solidFill>
+                  <a:srgbClr val="05A2C6"/>
+                </a:solidFill>
+                <a:latin typeface="Segoe UI"/>
+              </a:defRPr>
+            </a:pPr>
+            <a:r>
+              <a:t>If it's not in the repo, treat as unknown — per ROLE.md</a:t>
+            </a:r>
+          </a:p>
+        </p:txBody>
+      </p:sp>
+      <p:sp>
+        <p:nvSpPr>
+          <p:cNvPr id="6" name="TextBox 5"/>
+          <p:cNvSpPr txBox="1"/>
+          <p:nvPr/>
+        </p:nvSpPr>
+        <p:spPr>
+          <a:xfrm>
+            <a:off x="548640" y="1298448"/>
+            <a:ext cx="11094415" cy="4937760"/>
+          </a:xfrm>
+          <a:prstGeom prst="rect">
+            <a:avLst/>
+          </a:prstGeom>
+          <a:noFill/>
+        </p:spPr>
+        <p:txBody>
+          <a:bodyPr wrap="square">
+            <a:spAutoFit/>
+          </a:bodyPr>
+          <a:lstStyle/>
+          <a:p>
+            <a:pPr>
+              <a:lnSpc>
+                <a:spcPct val="130000"/>
+              </a:lnSpc>
+              <a:spcAft>
+                <a:spcPts val="800"/>
+              </a:spcAft>
+              <a:defRPr sz="1500">
+                <a:solidFill>
+                  <a:srgbClr val="1E293B"/>
+                </a:solidFill>
+                <a:latin typeface="Segoe UI"/>
+              </a:defRPr>
+            </a:pPr>
+            <a:r>
+              <a:t>  WORKFLOW.md — detailed shell guide (this presentation's companion)</a:t>
+            </a:r>
+          </a:p>
+          <a:p>
+            <a:pPr>
+              <a:lnSpc>
+                <a:spcPct val="130000"/>
+              </a:lnSpc>
+              <a:spcAft>
+                <a:spcPts val="800"/>
+              </a:spcAft>
+              <a:defRPr sz="1500">
+                <a:solidFill>
+                  <a:srgbClr val="1E293B"/>
+                </a:solidFill>
+                <a:latin typeface="Segoe UI"/>
+              </a:defRPr>
+            </a:pPr>
+            <a:r>
+              <a:t>  evidence/regression-reports/ — drop zone + real examples</a:t>
+            </a:r>
+          </a:p>
+          <a:p>
+            <a:pPr>
+              <a:lnSpc>
+                <a:spcPct val="130000"/>
+              </a:lnSpc>
+              <a:spcAft>
+                <a:spcPts val="800"/>
+              </a:spcAft>
+              <a:defRPr sz="1500">
+                <a:solidFill>
+                  <a:srgbClr val="1E293B"/>
+                </a:solidFill>
+                <a:latin typeface="Segoe UI"/>
+              </a:defRPr>
+            </a:pPr>
+            <a:r>
+              <a:t>  prompts/ 01–05 — triage, Prompt H, change set, resolution, rollup</a:t>
+            </a:r>
+          </a:p>
+          <a:p>
+            <a:pPr>
+              <a:lnSpc>
+                <a:spcPct val="130000"/>
+              </a:lnSpc>
+              <a:spcAft>
+                <a:spcPts val="800"/>
+              </a:spcAft>
+              <a:defRPr sz="1500">
+                <a:solidFill>
+                  <a:srgbClr val="1E293B"/>
+                </a:solidFill>
+                <a:latin typeface="Segoe UI"/>
+              </a:defRPr>
+            </a:pPr>
+            <a:r>
+              <a:t>  process/ — TRIAGE_RULES, FLAKINESS_PLAYBOOK, DEFECT_LIFECYCLE, RCA</a:t>
+            </a:r>
+          </a:p>
+          <a:p>
+            <a:pPr>
+              <a:lnSpc>
+                <a:spcPct val="130000"/>
+              </a:lnSpc>
+              <a:spcAft>
+                <a:spcPts val="800"/>
+              </a:spcAft>
+              <a:defRPr sz="1500">
+                <a:solidFill>
+                  <a:srgbClr val="1E293B"/>
+                </a:solidFill>
+                <a:latin typeface="Segoe UI"/>
+              </a:defRPr>
+            </a:pPr>
+            <a:r>
+              <a:t>  deliverables/ — this deck + Automation-Bug-Lifecycle-Playbook.docx</a:t>
+            </a:r>
+          </a:p>
+          <a:p>
+            <a:pPr>
+              <a:lnSpc>
+                <a:spcPct val="130000"/>
+              </a:lnSpc>
+              <a:spcAft>
+                <a:spcPts val="800"/>
+              </a:spcAft>
+              <a:defRPr sz="1500">
+                <a:solidFill>
+                  <a:srgbClr val="1E293B"/>
+                </a:solidFill>
+                <a:latin typeface="Segoe UI"/>
+              </a:defRPr>
+            </a:pPr>
+            <a:r>
+              <a:t>  qa-knowledge-base/00_SYSTEM/PROMPTS.md — master Prompt H reference</a:t>
+            </a:r>
+          </a:p>
+        </p:txBody>
+      </p:sp>
+      <p:sp>
+        <p:nvSpPr>
+          <p:cNvPr id="7" name="TextBox 6"/>
+          <p:cNvSpPr txBox="1"/>
+          <p:nvPr/>
+        </p:nvSpPr>
+        <p:spPr>
+          <a:xfrm>
+            <a:off x="548640" y="6473952"/>
+            <a:ext cx="9144000" cy="256032"/>
+          </a:xfrm>
+          <a:prstGeom prst="rect">
+            <a:avLst/>
+          </a:prstGeom>
+          <a:noFill/>
+        </p:spPr>
+        <p:txBody>
+          <a:bodyPr wrap="square" anchor="t" lIns="50800" rIns="50800">
+            <a:spAutoFit/>
+          </a:bodyPr>
+          <a:lstStyle/>
+          <a:p>
+            <a:pPr algn="l">
+              <a:defRPr sz="900" b="0">
+                <a:solidFill>
+                  <a:srgbClr val="94A3B8"/>
+                </a:solidFill>
+                <a:latin typeface="Segoe UI"/>
+              </a:defRPr>
+            </a:pPr>
+            <a:r>
+              <a:t>QA Automation Standard  ·  Automation Bug Lifecycle  ·  Internal</a:t>
+            </a:r>
+          </a:p>
+        </p:txBody>
+      </p:sp>
+      <p:sp>
+        <p:nvSpPr>
+          <p:cNvPr id="8" name="TextBox 7"/>
+          <p:cNvSpPr txBox="1"/>
+          <p:nvPr/>
+        </p:nvSpPr>
+        <p:spPr>
+          <a:xfrm>
+            <a:off x="11109960" y="6473952"/>
+            <a:ext cx="640080" cy="256032"/>
+          </a:xfrm>
+          <a:prstGeom prst="rect">
+            <a:avLst/>
+          </a:prstGeom>
+          <a:noFill/>
+        </p:spPr>
+        <p:txBody>
+          <a:bodyPr wrap="square" anchor="t" lIns="50800" rIns="50800">
+            <a:spAutoFit/>
+          </a:bodyPr>
+          <a:lstStyle/>
+          <a:p>
+            <a:pPr algn="r">
+              <a:defRPr sz="900" b="0">
+                <a:solidFill>
+                  <a:srgbClr val="94A3B8"/>
+                </a:solidFill>
+                <a:latin typeface="Segoe UI"/>
+              </a:defRPr>
+            </a:pPr>
+            <a:r>
+              <a:t>22</a:t>
+            </a:r>
+          </a:p>
+        </p:txBody>
+      </p:sp>
+    </p:spTree>
+  </p:cSld>
+  <p:clrMapOvr>
+    <a:masterClrMapping/>
+  </p:clrMapOvr>
+</p:sld>
+</file>
+
+<file path=ppt/slides/slide23.xml><?xml version="1.0" encoding="utf-8"?>
+<p:sld xmlns:a="http://schemas.openxmlformats.org/drawingml/2006/main" xmlns:p="http://schemas.openxmlformats.org/presentationml/2006/main" xmlns:r="http://schemas.openxmlformats.org/officeDocument/2006/relationships">
+  <p:cSld>
+    <p:bg>
+      <p:bgPr>
+        <a:solidFill>
+          <a:srgbClr val="F8FAFC"/>
+        </a:solidFill>
+        <a:effectLst/>
+      </p:bgPr>
+    </p:bg>
+    <p:spTree>
+      <p:nvGrpSpPr>
+        <p:cNvPr id="1" name=""/>
+        <p:cNvGrpSpPr/>
+        <p:nvPr/>
+      </p:nvGrpSpPr>
+      <p:grpSpPr/>
+      <p:sp>
+        <p:nvSpPr>
+          <p:cNvPr id="2" name="Rounded Rectangle 1"/>
+          <p:cNvSpPr/>
+          <p:nvPr/>
+        </p:nvSpPr>
+        <p:spPr>
+          <a:xfrm>
+            <a:off x="0" y="0"/>
+            <a:ext cx="12191695" cy="1005840"/>
+          </a:xfrm>
+          <a:prstGeom prst="roundRect">
+            <a:avLst>
+              <a:gd name="adj" fmla="val 6000"/>
+            </a:avLst>
+          </a:prstGeom>
+          <a:solidFill>
+            <a:srgbClr val="003241"/>
+          </a:solidFill>
+          <a:ln>
+            <a:noFill/>
+          </a:ln>
+        </p:spPr>
+        <p:style>
+          <a:lnRef idx="1">
+            <a:schemeClr val="accent1"/>
+          </a:lnRef>
+          <a:fillRef idx="3">
+            <a:schemeClr val="accent1"/>
+          </a:fillRef>
+          <a:effectRef idx="2">
+            <a:schemeClr val="accent1"/>
+          </a:effectRef>
+          <a:fontRef idx="minor">
+            <a:schemeClr val="lt1"/>
+          </a:fontRef>
+        </p:style>
+        <p:txBody>
+          <a:bodyPr rtlCol="0" anchor="ctr"/>
+          <a:lstStyle/>
+          <a:p>
+            <a:pPr algn="ctr"/>
+          </a:p>
+        </p:txBody>
+      </p:sp>
+      <p:sp>
+        <p:nvSpPr>
+          <p:cNvPr id="3" name="Rectangle 2"/>
+          <p:cNvSpPr/>
+          <p:nvPr/>
+        </p:nvSpPr>
+        <p:spPr>
+          <a:xfrm>
+            <a:off x="0" y="1005840"/>
+            <a:ext cx="12191695" cy="64008"/>
+          </a:xfrm>
+          <a:prstGeom prst="rect">
+            <a:avLst/>
+          </a:prstGeom>
+          <a:solidFill>
+            <a:srgbClr val="009E86"/>
+          </a:solidFill>
+          <a:ln>
+            <a:noFill/>
+          </a:ln>
+        </p:spPr>
+        <p:style>
+          <a:lnRef idx="1">
+            <a:schemeClr val="accent1"/>
+          </a:lnRef>
+          <a:fillRef idx="3">
+            <a:schemeClr val="accent1"/>
+          </a:fillRef>
+          <a:effectRef idx="2">
+            <a:schemeClr val="accent1"/>
+          </a:effectRef>
+          <a:fontRef idx="minor">
+            <a:schemeClr val="lt1"/>
+          </a:fontRef>
+        </p:style>
+        <p:txBody>
+          <a:bodyPr rtlCol="0" anchor="ctr"/>
+          <a:lstStyle/>
+          <a:p>
+            <a:pPr algn="ctr"/>
+          </a:p>
+        </p:txBody>
+      </p:sp>
+      <p:sp>
+        <p:nvSpPr>
+          <p:cNvPr id="4" name="TextBox 3"/>
+          <p:cNvSpPr txBox="1"/>
+          <p:nvPr/>
+        </p:nvSpPr>
+        <p:spPr>
+          <a:xfrm>
+            <a:off x="548640" y="182880"/>
+            <a:ext cx="10058400" cy="502920"/>
+          </a:xfrm>
+          <a:prstGeom prst="rect">
+            <a:avLst/>
+          </a:prstGeom>
+          <a:noFill/>
+        </p:spPr>
+        <p:txBody>
+          <a:bodyPr wrap="square" anchor="t" lIns="50800" rIns="50800">
+            <a:spAutoFit/>
+          </a:bodyPr>
+          <a:lstStyle/>
+          <a:p>
+            <a:pPr algn="l">
+              <a:defRPr sz="3000" b="1">
+                <a:solidFill>
+                  <a:srgbClr val="FFFFFF"/>
+                </a:solidFill>
+                <a:latin typeface="Segoe UI"/>
+              </a:defRPr>
+            </a:pPr>
+            <a:r>
+              <a:t>Key Takeaways</a:t>
+            </a:r>
+          </a:p>
+        </p:txBody>
+      </p:sp>
+      <p:sp>
+        <p:nvSpPr>
+          <p:cNvPr id="5" name="TextBox 4"/>
+          <p:cNvSpPr txBox="1"/>
+          <p:nvPr/>
+        </p:nvSpPr>
+        <p:spPr>
+          <a:xfrm>
+            <a:off x="548640" y="658368"/>
+            <a:ext cx="10058400" cy="320040"/>
+          </a:xfrm>
+          <a:prstGeom prst="rect">
+            <a:avLst/>
+          </a:prstGeom>
+          <a:noFill/>
+        </p:spPr>
+        <p:txBody>
+          <a:bodyPr wrap="square" anchor="t" lIns="50800" rIns="50800">
+            <a:spAutoFit/>
+          </a:bodyPr>
+          <a:lstStyle/>
+          <a:p>
+            <a:pPr algn="l">
+              <a:defRPr sz="1300" b="0">
+                <a:solidFill>
+                  <a:srgbClr val="05A2C6"/>
+                </a:solidFill>
+                <a:latin typeface="Segoe UI"/>
+              </a:defRPr>
+            </a:pPr>
+            <a:r>
+              <a:t>QA Automation operating norm</a:t>
+            </a:r>
+          </a:p>
+        </p:txBody>
+      </p:sp>
+      <p:sp>
+        <p:nvSpPr>
+          <p:cNvPr id="6" name="TextBox 5"/>
+          <p:cNvSpPr txBox="1"/>
+          <p:nvPr/>
+        </p:nvSpPr>
+        <p:spPr>
+          <a:xfrm>
+            <a:off x="548640" y="1298448"/>
+            <a:ext cx="11094415" cy="4937760"/>
+          </a:xfrm>
+          <a:prstGeom prst="rect">
+            <a:avLst/>
+          </a:prstGeom>
+          <a:noFill/>
+        </p:spPr>
+        <p:txBody>
+          <a:bodyPr wrap="square">
+            <a:spAutoFit/>
+          </a:bodyPr>
+          <a:lstStyle/>
+          <a:p>
+            <a:pPr>
+              <a:lnSpc>
+                <a:spcPct val="130000"/>
+              </a:lnSpc>
+              <a:spcAft>
+                <a:spcPts val="800"/>
+              </a:spcAft>
+              <a:defRPr sz="1500">
+                <a:solidFill>
+                  <a:srgbClr val="1E293B"/>
+                </a:solidFill>
+                <a:latin typeface="Segoe UI"/>
+              </a:defRPr>
+            </a:pPr>
+            <a:r>
+              <a:t>  Visibility solved: evidence folder + change set + consistent comms</a:t>
+            </a:r>
+          </a:p>
+          <a:p>
+            <a:pPr>
+              <a:lnSpc>
+                <a:spcPct val="130000"/>
+              </a:lnSpc>
+              <a:spcAft>
+                <a:spcPts val="800"/>
+              </a:spcAft>
+              <a:defRPr sz="1500">
+                <a:solidFill>
+                  <a:srgbClr val="1E293B"/>
+                </a:solidFill>
+                <a:latin typeface="Segoe UI"/>
+              </a:defRPr>
+            </a:pPr>
+            <a:r>
+              <a:t>  Triage first — not every failure is a defect</a:t>
+            </a:r>
+          </a:p>
+          <a:p>
+            <a:pPr>
+              <a:lnSpc>
+                <a:spcPct val="130000"/>
+              </a:lnSpc>
+              <a:spcAft>
+                <a:spcPts val="800"/>
+              </a:spcAft>
+              <a:defRPr sz="1500">
+                <a:solidFill>
+                  <a:srgbClr val="1E293B"/>
+                </a:solidFill>
+                <a:latin typeface="Segoe UI"/>
+              </a:defRPr>
+            </a:pPr>
+            <a:r>
+              <a:t>  One folder · one Prompt H run · one bug .md per issue</a:t>
+            </a:r>
+          </a:p>
+          <a:p>
+            <a:pPr>
+              <a:lnSpc>
+                <a:spcPct val="130000"/>
+              </a:lnSpc>
+              <a:spcAft>
+                <a:spcPts val="800"/>
+              </a:spcAft>
+              <a:defRPr sz="1500">
+                <a:solidFill>
+                  <a:srgbClr val="1E293B"/>
+                </a:solidFill>
+                <a:latin typeface="Segoe UI"/>
+              </a:defRPr>
+            </a:pPr>
+            <a:r>
+              <a:t>  Dump and send — leadership-approved templates, no improvisation</a:t>
+            </a:r>
+          </a:p>
+          <a:p>
+            <a:pPr>
+              <a:lnSpc>
+                <a:spcPct val="130000"/>
+              </a:lnSpc>
+              <a:spcAft>
+                <a:spcPts val="800"/>
+              </a:spcAft>
+              <a:defRPr sz="1500">
+                <a:solidFill>
+                  <a:srgbClr val="1E293B"/>
+                </a:solidFill>
+                <a:latin typeface="Segoe UI"/>
+              </a:defRPr>
+            </a:pPr>
+            <a:r>
+              <a:t>  Critical defects: lock main, responsible party responds, 24-hour resolution</a:t>
+            </a:r>
+          </a:p>
+          <a:p>
+            <a:pPr>
+              <a:lnSpc>
+                <a:spcPct val="130000"/>
+              </a:lnSpc>
+              <a:spcAft>
+                <a:spcPts val="800"/>
+              </a:spcAft>
+              <a:defRPr sz="1500">
+                <a:solidFill>
+                  <a:srgbClr val="1E293B"/>
+                </a:solidFill>
+                <a:latin typeface="Segoe UI"/>
+              </a:defRPr>
+            </a:pPr>
+            <a:r>
+              <a:t>  Full playbook: deliverables/Automation-Bug-Lifecycle-Playbook.docx</a:t>
+            </a:r>
+          </a:p>
+        </p:txBody>
+      </p:sp>
+      <p:sp>
+        <p:nvSpPr>
+          <p:cNvPr id="7" name="TextBox 6"/>
+          <p:cNvSpPr txBox="1"/>
+          <p:nvPr/>
+        </p:nvSpPr>
+        <p:spPr>
+          <a:xfrm>
+            <a:off x="548640" y="6473952"/>
+            <a:ext cx="9144000" cy="256032"/>
+          </a:xfrm>
+          <a:prstGeom prst="rect">
+            <a:avLst/>
+          </a:prstGeom>
+          <a:noFill/>
+        </p:spPr>
+        <p:txBody>
+          <a:bodyPr wrap="square" anchor="t" lIns="50800" rIns="50800">
+            <a:spAutoFit/>
+          </a:bodyPr>
+          <a:lstStyle/>
+          <a:p>
+            <a:pPr algn="l">
+              <a:defRPr sz="900" b="0">
+                <a:solidFill>
+                  <a:srgbClr val="94A3B8"/>
+                </a:solidFill>
+                <a:latin typeface="Segoe UI"/>
+              </a:defRPr>
+            </a:pPr>
+            <a:r>
+              <a:t>QA Automation Standard  ·  Automation Bug Lifecycle  ·  Internal</a:t>
+            </a:r>
+          </a:p>
+        </p:txBody>
+      </p:sp>
+      <p:sp>
+        <p:nvSpPr>
+          <p:cNvPr id="8" name="TextBox 7"/>
+          <p:cNvSpPr txBox="1"/>
+          <p:nvPr/>
+        </p:nvSpPr>
+        <p:spPr>
+          <a:xfrm>
+            <a:off x="11109960" y="6473952"/>
+            <a:ext cx="640080" cy="256032"/>
+          </a:xfrm>
+          <a:prstGeom prst="rect">
+            <a:avLst/>
+          </a:prstGeom>
+          <a:noFill/>
+        </p:spPr>
+        <p:txBody>
+          <a:bodyPr wrap="square" anchor="t" lIns="50800" rIns="50800">
+            <a:spAutoFit/>
+          </a:bodyPr>
+          <a:lstStyle/>
+          <a:p>
+            <a:pPr algn="r">
+              <a:defRPr sz="900" b="0">
+                <a:solidFill>
+                  <a:srgbClr val="94A3B8"/>
+                </a:solidFill>
+                <a:latin typeface="Segoe UI"/>
+              </a:defRPr>
+            </a:pPr>
+            <a:r>
+              <a:t>23</a:t>
             </a:r>
           </a:p>
         </p:txBody>
@@ -7940,7 +10236,7 @@
               </a:defRPr>
             </a:pPr>
             <a:r>
-              <a:t>End-to-End Workflow</a:t>
+              <a:t>The Challenge — Visibility</a:t>
             </a:r>
           </a:p>
         </p:txBody>
@@ -7976,92 +10272,139 @@
               </a:defRPr>
             </a:pPr>
             <a:r>
-              <a:t>Seven steps — every regression failure</a:t>
-            </a:r>
-          </a:p>
-        </p:txBody>
-      </p:sp>
-      <p:sp>
-        <p:nvSpPr>
-          <p:cNvPr id="6" name="Rounded Rectangle 5"/>
-          <p:cNvSpPr/>
+              <a:t>Why we built this module</a:t>
+            </a:r>
+          </a:p>
+        </p:txBody>
+      </p:sp>
+      <p:sp>
+        <p:nvSpPr>
+          <p:cNvPr id="6" name="TextBox 5"/>
+          <p:cNvSpPr txBox="1"/>
           <p:nvPr/>
         </p:nvSpPr>
         <p:spPr>
           <a:xfrm>
             <a:off x="548640" y="1298448"/>
-            <a:ext cx="11313871" cy="4910328"/>
-          </a:xfrm>
-          <a:prstGeom prst="roundRect">
-            <a:avLst>
-              <a:gd name="adj" fmla="val 6000"/>
-            </a:avLst>
-          </a:prstGeom>
-          <a:solidFill>
-            <a:srgbClr val="FFFFFF"/>
-          </a:solidFill>
-          <a:ln w="15875">
-            <a:solidFill>
-              <a:srgbClr val="E2E8F0"/>
-            </a:solidFill>
-          </a:ln>
-        </p:spPr>
-        <p:style>
-          <a:lnRef idx="1">
-            <a:schemeClr val="accent1"/>
-          </a:lnRef>
-          <a:fillRef idx="3">
-            <a:schemeClr val="accent1"/>
-          </a:fillRef>
-          <a:effectRef idx="2">
-            <a:schemeClr val="accent1"/>
-          </a:effectRef>
-          <a:fontRef idx="minor">
-            <a:schemeClr val="lt1"/>
-          </a:fontRef>
-        </p:style>
-        <p:txBody>
-          <a:bodyPr rtlCol="0" anchor="ctr"/>
-          <a:lstStyle/>
-          <a:p>
-            <a:pPr algn="ctr"/>
-          </a:p>
-        </p:txBody>
-      </p:sp>
-      <p:pic>
-        <p:nvPicPr>
-          <p:cNvPr id="7" name="Picture 6" descr="chart_end_to_end_workflow.png"/>
-          <p:cNvPicPr>
-            <a:picLocks noChangeAspect="1"/>
-          </p:cNvPicPr>
-          <p:nvPr/>
-        </p:nvPicPr>
-        <p:blipFill>
-          <a:blip r:embed="rId2"/>
-          <a:stretch>
-            <a:fillRect/>
-          </a:stretch>
-        </p:blipFill>
-        <p:spPr>
-          <a:xfrm>
-            <a:off x="658368" y="1408176"/>
-            <a:ext cx="10289364" cy="4343400"/>
-          </a:xfrm>
-          <a:prstGeom prst="rect">
-            <a:avLst/>
-          </a:prstGeom>
-        </p:spPr>
-      </p:pic>
-      <p:sp>
-        <p:nvSpPr>
-          <p:cNvPr id="8" name="TextBox 7"/>
+            <a:ext cx="11094415" cy="4937760"/>
+          </a:xfrm>
+          <a:prstGeom prst="rect">
+            <a:avLst/>
+          </a:prstGeom>
+          <a:noFill/>
+        </p:spPr>
+        <p:txBody>
+          <a:bodyPr wrap="square">
+            <a:spAutoFit/>
+          </a:bodyPr>
+          <a:lstStyle/>
+          <a:p>
+            <a:pPr>
+              <a:lnSpc>
+                <a:spcPct val="130000"/>
+              </a:lnSpc>
+              <a:spcAft>
+                <a:spcPts val="800"/>
+              </a:spcAft>
+              <a:defRPr sz="1500">
+                <a:solidFill>
+                  <a:srgbClr val="1E293B"/>
+                </a:solidFill>
+                <a:latin typeface="Segoe UI"/>
+              </a:defRPr>
+            </a:pPr>
+            <a:r>
+              <a:t>  Who merged or committed between last green run and failure?</a:t>
+            </a:r>
+          </a:p>
+          <a:p>
+            <a:pPr>
+              <a:lnSpc>
+                <a:spcPct val="130000"/>
+              </a:lnSpc>
+              <a:spcAft>
+                <a:spcPts val="800"/>
+              </a:spcAft>
+              <a:defRPr sz="1500">
+                <a:solidFill>
+                  <a:srgbClr val="1E293B"/>
+                </a:solidFill>
+                <a:latin typeface="Segoe UI"/>
+              </a:defRPr>
+            </a:pPr>
+            <a:r>
+              <a:t>  Communications inconsistent — JIRA and email drafted differently every time</a:t>
+            </a:r>
+          </a:p>
+          <a:p>
+            <a:pPr>
+              <a:lnSpc>
+                <a:spcPct val="130000"/>
+              </a:lnSpc>
+              <a:spcAft>
+                <a:spcPts val="800"/>
+              </a:spcAft>
+              <a:defRPr sz="1500">
+                <a:solidFill>
+                  <a:srgbClr val="1E293B"/>
+                </a:solidFill>
+                <a:latin typeface="Segoe UI"/>
+              </a:defRPr>
+            </a:pPr>
+            <a:r>
+              <a:t>  Evidence scattered — screenshots in chat, logs in CI, no single folder</a:t>
+            </a:r>
+          </a:p>
+          <a:p>
+            <a:pPr>
+              <a:lnSpc>
+                <a:spcPct val="130000"/>
+              </a:lnSpc>
+              <a:spcAft>
+                <a:spcPts val="800"/>
+              </a:spcAft>
+              <a:defRPr sz="1500">
+                <a:solidFill>
+                  <a:srgbClr val="1E293B"/>
+                </a:solidFill>
+                <a:latin typeface="Segoe UI"/>
+              </a:defRPr>
+            </a:pPr>
+            <a:r>
+              <a:t>  Critical defects lacked clear accountability and resolution timeline</a:t>
+            </a:r>
+          </a:p>
+          <a:p>
+            <a:pPr>
+              <a:lnSpc>
+                <a:spcPct val="130000"/>
+              </a:lnSpc>
+              <a:spcAft>
+                <a:spcPts val="800"/>
+              </a:spcAft>
+              <a:defRPr sz="1500">
+                <a:solidFill>
+                  <a:srgbClr val="1E293B"/>
+                </a:solidFill>
+                <a:latin typeface="Segoe UI"/>
+              </a:defRPr>
+            </a:pPr>
+            <a:r>
+              <a:t>  Tribal knowledge — process lived in people's heads, not the repo</a:t>
+            </a:r>
+          </a:p>
+        </p:txBody>
+      </p:sp>
+      <p:sp>
+        <p:nvSpPr>
+          <p:cNvPr id="7" name="TextBox 6"/>
           <p:cNvSpPr txBox="1"/>
           <p:nvPr/>
         </p:nvSpPr>
         <p:spPr>
           <a:xfrm>
-            <a:off x="658368" y="5806440"/>
-            <a:ext cx="11094415" cy="347472"/>
+            <a:off x="548640" y="6473952"/>
+            <a:ext cx="9144000" cy="256032"/>
           </a:xfrm>
           <a:prstGeom prst="rect">
             <a:avLst/>
@@ -8074,42 +10417,6 @@
           </a:bodyPr>
           <a:lstStyle/>
           <a:p>
-            <a:pPr algn="ctr">
-              <a:defRPr sz="1000" b="0">
-                <a:solidFill>
-                  <a:srgbClr val="94A3B8"/>
-                </a:solidFill>
-                <a:latin typeface="Segoe UI"/>
-              </a:defRPr>
-            </a:pPr>
-            <a:r>
-              <a:t>Detect → Triage → Evidence → Cursor H → JIRA/Notify → Change Set → Resolve</a:t>
-            </a:r>
-          </a:p>
-        </p:txBody>
-      </p:sp>
-      <p:sp>
-        <p:nvSpPr>
-          <p:cNvPr id="9" name="TextBox 8"/>
-          <p:cNvSpPr txBox="1"/>
-          <p:nvPr/>
-        </p:nvSpPr>
-        <p:spPr>
-          <a:xfrm>
-            <a:off x="548640" y="6473952"/>
-            <a:ext cx="9144000" cy="256032"/>
-          </a:xfrm>
-          <a:prstGeom prst="rect">
-            <a:avLst/>
-          </a:prstGeom>
-          <a:noFill/>
-        </p:spPr>
-        <p:txBody>
-          <a:bodyPr wrap="square" anchor="t" lIns="50800" rIns="50800">
-            <a:spAutoFit/>
-          </a:bodyPr>
-          <a:lstStyle/>
-          <a:p>
             <a:pPr algn="l">
               <a:defRPr sz="900" b="0">
                 <a:solidFill>
@@ -8126,7 +10433,7 @@
       </p:sp>
       <p:sp>
         <p:nvSpPr>
-          <p:cNvPr id="10" name="TextBox 9"/>
+          <p:cNvPr id="8" name="TextBox 7"/>
           <p:cNvSpPr txBox="1"/>
           <p:nvPr/>
         </p:nvSpPr>
@@ -8305,7 +10612,7 @@
               </a:defRPr>
             </a:pPr>
             <a:r>
-              <a:t>Step 1 — Triage Before You Log</a:t>
+              <a:t>The Solution — Repo + AI Agent + GitLab PM</a:t>
             </a:r>
           </a:p>
         </p:txBody>
@@ -8341,92 +10648,139 @@
               </a:defRPr>
             </a:pPr>
             <a:r>
-              <a:t>Decision tree validated against TRIAGE_RULES.md + FLAKINESS_PLAYBOOK.md</a:t>
-            </a:r>
-          </a:p>
-        </p:txBody>
-      </p:sp>
-      <p:sp>
-        <p:nvSpPr>
-          <p:cNvPr id="6" name="Rounded Rectangle 5"/>
-          <p:cNvSpPr/>
+              <a:t>Three tools, one repeatable flow</a:t>
+            </a:r>
+          </a:p>
+        </p:txBody>
+      </p:sp>
+      <p:sp>
+        <p:nvSpPr>
+          <p:cNvPr id="6" name="TextBox 5"/>
+          <p:cNvSpPr txBox="1"/>
           <p:nvPr/>
         </p:nvSpPr>
         <p:spPr>
           <a:xfrm>
             <a:off x="548640" y="1298448"/>
-            <a:ext cx="11313871" cy="4910328"/>
-          </a:xfrm>
-          <a:prstGeom prst="roundRect">
-            <a:avLst>
-              <a:gd name="adj" fmla="val 6000"/>
-            </a:avLst>
-          </a:prstGeom>
-          <a:solidFill>
-            <a:srgbClr val="FFFFFF"/>
-          </a:solidFill>
-          <a:ln w="15875">
-            <a:solidFill>
-              <a:srgbClr val="E2E8F0"/>
-            </a:solidFill>
-          </a:ln>
-        </p:spPr>
-        <p:style>
-          <a:lnRef idx="1">
-            <a:schemeClr val="accent1"/>
-          </a:lnRef>
-          <a:fillRef idx="3">
-            <a:schemeClr val="accent1"/>
-          </a:fillRef>
-          <a:effectRef idx="2">
-            <a:schemeClr val="accent1"/>
-          </a:effectRef>
-          <a:fontRef idx="minor">
-            <a:schemeClr val="lt1"/>
-          </a:fontRef>
-        </p:style>
-        <p:txBody>
-          <a:bodyPr rtlCol="0" anchor="ctr"/>
-          <a:lstStyle/>
-          <a:p>
-            <a:pPr algn="ctr"/>
-          </a:p>
-        </p:txBody>
-      </p:sp>
-      <p:pic>
-        <p:nvPicPr>
-          <p:cNvPr id="7" name="Picture 6" descr="chart_triage_decision.png"/>
-          <p:cNvPicPr>
-            <a:picLocks noChangeAspect="1"/>
-          </p:cNvPicPr>
-          <p:nvPr/>
-        </p:nvPicPr>
-        <p:blipFill>
-          <a:blip r:embed="rId2"/>
-          <a:stretch>
-            <a:fillRect/>
-          </a:stretch>
-        </p:blipFill>
-        <p:spPr>
-          <a:xfrm>
-            <a:off x="658368" y="1408176"/>
-            <a:ext cx="7125194" cy="4343400"/>
-          </a:xfrm>
-          <a:prstGeom prst="rect">
-            <a:avLst/>
-          </a:prstGeom>
-        </p:spPr>
-      </p:pic>
-      <p:sp>
-        <p:nvSpPr>
-          <p:cNvPr id="8" name="TextBox 7"/>
+            <a:ext cx="11094415" cy="4937760"/>
+          </a:xfrm>
+          <a:prstGeom prst="rect">
+            <a:avLst/>
+          </a:prstGeom>
+          <a:noFill/>
+        </p:spPr>
+        <p:txBody>
+          <a:bodyPr wrap="square">
+            <a:spAutoFit/>
+          </a:bodyPr>
+          <a:lstStyle/>
+          <a:p>
+            <a:pPr>
+              <a:lnSpc>
+                <a:spcPct val="130000"/>
+              </a:lnSpc>
+              <a:spcAft>
+                <a:spcPts val="800"/>
+              </a:spcAft>
+              <a:defRPr sz="1500">
+                <a:solidFill>
+                  <a:srgbClr val="1E293B"/>
+                </a:solidFill>
+                <a:latin typeface="Segoe UI"/>
+              </a:defRPr>
+            </a:pPr>
+            <a:r>
+              <a:t>  qa-automation-kb/automation-bug-lifecycle/ — prompts, process, evidence, deliverables</a:t>
+            </a:r>
+          </a:p>
+          <a:p>
+            <a:pPr>
+              <a:lnSpc>
+                <a:spcPct val="130000"/>
+              </a:lnSpc>
+              <a:spcAft>
+                <a:spcPts val="800"/>
+              </a:spcAft>
+              <a:defRPr sz="1500">
+                <a:solidFill>
+                  <a:srgbClr val="1E293B"/>
+                </a:solidFill>
+                <a:latin typeface="Segoe UI"/>
+              </a:defRPr>
+            </a:pPr>
+            <a:r>
+              <a:t>  Evidence folder — drop screenshots, logs, report URL under regression-reports/MMDDYYYY/</a:t>
+            </a:r>
+          </a:p>
+          <a:p>
+            <a:pPr>
+              <a:lnSpc>
+                <a:spcPct val="130000"/>
+              </a:lnSpc>
+              <a:spcAft>
+                <a:spcPts val="800"/>
+              </a:spcAft>
+              <a:defRPr sz="1500">
+                <a:solidFill>
+                  <a:srgbClr val="1E293B"/>
+                </a:solidFill>
+                <a:latin typeface="Segoe UI"/>
+              </a:defRPr>
+            </a:pPr>
+            <a:r>
+              <a:t>  Cursor Prompt H — one prompt → JIRA block + email + Teams in one .md file</a:t>
+            </a:r>
+          </a:p>
+          <a:p>
+            <a:pPr>
+              <a:lnSpc>
+                <a:spcPct val="130000"/>
+              </a:lnSpc>
+              <a:spcAft>
+                <a:spcPts val="800"/>
+              </a:spcAft>
+              <a:defRPr sz="1500">
+                <a:solidFill>
+                  <a:srgbClr val="1E293B"/>
+                </a:solidFill>
+                <a:latin typeface="Segoe UI"/>
+              </a:defRPr>
+            </a:pPr>
+            <a:r>
+              <a:t>  GitLab Project Manager — change set: MRs, commits, authors in the failure window</a:t>
+            </a:r>
+          </a:p>
+          <a:p>
+            <a:pPr>
+              <a:lnSpc>
+                <a:spcPct val="130000"/>
+              </a:lnSpc>
+              <a:spcAft>
+                <a:spcPts val="800"/>
+              </a:spcAft>
+              <a:defRPr sz="1500">
+                <a:solidFill>
+                  <a:srgbClr val="1E293B"/>
+                </a:solidFill>
+                <a:latin typeface="Segoe UI"/>
+              </a:defRPr>
+            </a:pPr>
+            <a:r>
+              <a:t>  Shell guide: WORKFLOW.md · Checklist: QUICK-START.md</a:t>
+            </a:r>
+          </a:p>
+        </p:txBody>
+      </p:sp>
+      <p:sp>
+        <p:nvSpPr>
+          <p:cNvPr id="7" name="TextBox 6"/>
           <p:cNvSpPr txBox="1"/>
           <p:nvPr/>
         </p:nvSpPr>
         <p:spPr>
           <a:xfrm>
-            <a:off x="658368" y="5806440"/>
-            <a:ext cx="11094415" cy="347472"/>
+            <a:off x="548640" y="6473952"/>
+            <a:ext cx="9144000" cy="256032"/>
           </a:xfrm>
           <a:prstGeom prst="rect">
             <a:avLst/>
@@ -8439,42 +10793,6 @@
           </a:bodyPr>
           <a:lstStyle/>
           <a:p>
-            <a:pPr algn="ctr">
-              <a:defRPr sz="1000" b="0">
-                <a:solidFill>
-                  <a:srgbClr val="94A3B8"/>
-                </a:solidFill>
-                <a:latin typeface="Segoe UI"/>
-              </a:defRPr>
-            </a:pPr>
-            <a:r>
-              <a:t>Environment and flaky failures do not enter the full bug cycle</a:t>
-            </a:r>
-          </a:p>
-        </p:txBody>
-      </p:sp>
-      <p:sp>
-        <p:nvSpPr>
-          <p:cNvPr id="9" name="TextBox 8"/>
-          <p:cNvSpPr txBox="1"/>
-          <p:nvPr/>
-        </p:nvSpPr>
-        <p:spPr>
-          <a:xfrm>
-            <a:off x="548640" y="6473952"/>
-            <a:ext cx="9144000" cy="256032"/>
-          </a:xfrm>
-          <a:prstGeom prst="rect">
-            <a:avLst/>
-          </a:prstGeom>
-          <a:noFill/>
-        </p:spPr>
-        <p:txBody>
-          <a:bodyPr wrap="square" anchor="t" lIns="50800" rIns="50800">
-            <a:spAutoFit/>
-          </a:bodyPr>
-          <a:lstStyle/>
-          <a:p>
             <a:pPr algn="l">
               <a:defRPr sz="900" b="0">
                 <a:solidFill>
@@ -8491,7 +10809,7 @@
       </p:sp>
       <p:sp>
         <p:nvSpPr>
-          <p:cNvPr id="10" name="TextBox 9"/>
+          <p:cNvPr id="8" name="TextBox 7"/>
           <p:cNvSpPr txBox="1"/>
           <p:nvPr/>
         </p:nvSpPr>
@@ -8539,7 +10857,7 @@
     <p:bg>
       <p:bgPr>
         <a:solidFill>
-          <a:srgbClr val="003241"/>
+          <a:srgbClr val="F8FAFC"/>
         </a:solidFill>
         <a:effectLst/>
       </p:bgPr>
@@ -8553,13 +10871,58 @@
       <p:grpSpPr/>
       <p:sp>
         <p:nvSpPr>
-          <p:cNvPr id="2" name="Rectangle 1"/>
+          <p:cNvPr id="2" name="Rounded Rectangle 1"/>
           <p:cNvSpPr/>
           <p:nvPr/>
         </p:nvSpPr>
         <p:spPr>
           <a:xfrm>
-            <a:off x="0" y="3200400"/>
+            <a:off x="0" y="0"/>
+            <a:ext cx="12191695" cy="1005840"/>
+          </a:xfrm>
+          <a:prstGeom prst="roundRect">
+            <a:avLst>
+              <a:gd name="adj" fmla="val 6000"/>
+            </a:avLst>
+          </a:prstGeom>
+          <a:solidFill>
+            <a:srgbClr val="003241"/>
+          </a:solidFill>
+          <a:ln>
+            <a:noFill/>
+          </a:ln>
+        </p:spPr>
+        <p:style>
+          <a:lnRef idx="1">
+            <a:schemeClr val="accent1"/>
+          </a:lnRef>
+          <a:fillRef idx="3">
+            <a:schemeClr val="accent1"/>
+          </a:fillRef>
+          <a:effectRef idx="2">
+            <a:schemeClr val="accent1"/>
+          </a:effectRef>
+          <a:fontRef idx="minor">
+            <a:schemeClr val="lt1"/>
+          </a:fontRef>
+        </p:style>
+        <p:txBody>
+          <a:bodyPr rtlCol="0" anchor="ctr"/>
+          <a:lstStyle/>
+          <a:p>
+            <a:pPr algn="ctr"/>
+          </a:p>
+        </p:txBody>
+      </p:sp>
+      <p:sp>
+        <p:nvSpPr>
+          <p:cNvPr id="3" name="Rectangle 2"/>
+          <p:cNvSpPr/>
+          <p:nvPr/>
+        </p:nvSpPr>
+        <p:spPr>
+          <a:xfrm>
+            <a:off x="0" y="1005840"/>
             <a:ext cx="12191695" cy="64008"/>
           </a:xfrm>
           <a:prstGeom prst="rect">
@@ -8596,14 +10959,14 @@
       </p:sp>
       <p:sp>
         <p:nvSpPr>
-          <p:cNvPr id="3" name="TextBox 2"/>
+          <p:cNvPr id="4" name="TextBox 3"/>
           <p:cNvSpPr txBox="1"/>
           <p:nvPr/>
         </p:nvSpPr>
         <p:spPr>
           <a:xfrm>
-            <a:off x="548640" y="2148840"/>
-            <a:ext cx="10058400" cy="777240"/>
+            <a:off x="548640" y="182880"/>
+            <a:ext cx="10058400" cy="502920"/>
           </a:xfrm>
           <a:prstGeom prst="rect">
             <a:avLst/>
@@ -8617,7 +10980,7 @@
           <a:lstStyle/>
           <a:p>
             <a:pPr algn="l">
-              <a:defRPr sz="3800" b="1">
+              <a:defRPr sz="3000" b="1">
                 <a:solidFill>
                   <a:srgbClr val="FFFFFF"/>
                 </a:solidFill>
@@ -8625,21 +10988,21 @@
               </a:defRPr>
             </a:pPr>
             <a:r>
-              <a:t>Act on a Real Defect</a:t>
-            </a:r>
-          </a:p>
-        </p:txBody>
-      </p:sp>
-      <p:sp>
-        <p:nvSpPr>
-          <p:cNvPr id="4" name="TextBox 3"/>
+              <a:t>End-to-End Workflow</a:t>
+            </a:r>
+          </a:p>
+        </p:txBody>
+      </p:sp>
+      <p:sp>
+        <p:nvSpPr>
+          <p:cNvPr id="5" name="TextBox 4"/>
           <p:cNvSpPr txBox="1"/>
           <p:nvPr/>
         </p:nvSpPr>
         <p:spPr>
           <a:xfrm>
-            <a:off x="548640" y="3401568"/>
-            <a:ext cx="9144000" cy="457200"/>
+            <a:off x="548640" y="658368"/>
+            <a:ext cx="10058400" cy="320040"/>
           </a:xfrm>
           <a:prstGeom prst="rect">
             <a:avLst/>
@@ -8653,7 +11016,7 @@
           <a:lstStyle/>
           <a:p>
             <a:pPr algn="l">
-              <a:defRPr sz="1800" b="0">
+              <a:defRPr sz="1300" b="0">
                 <a:solidFill>
                   <a:srgbClr val="05A2C6"/>
                 </a:solidFill>
@@ -8661,7 +11024,186 @@
               </a:defRPr>
             </a:pPr>
             <a:r>
-              <a:t>Evidence · Communications · Change set</a:t>
+              <a:t>Seven steps — every regression failure</a:t>
+            </a:r>
+          </a:p>
+        </p:txBody>
+      </p:sp>
+      <p:sp>
+        <p:nvSpPr>
+          <p:cNvPr id="6" name="Rounded Rectangle 5"/>
+          <p:cNvSpPr/>
+          <p:nvPr/>
+        </p:nvSpPr>
+        <p:spPr>
+          <a:xfrm>
+            <a:off x="548640" y="1298448"/>
+            <a:ext cx="11313871" cy="4910328"/>
+          </a:xfrm>
+          <a:prstGeom prst="roundRect">
+            <a:avLst>
+              <a:gd name="adj" fmla="val 6000"/>
+            </a:avLst>
+          </a:prstGeom>
+          <a:solidFill>
+            <a:srgbClr val="FFFFFF"/>
+          </a:solidFill>
+          <a:ln w="15875">
+            <a:solidFill>
+              <a:srgbClr val="E2E8F0"/>
+            </a:solidFill>
+          </a:ln>
+        </p:spPr>
+        <p:style>
+          <a:lnRef idx="1">
+            <a:schemeClr val="accent1"/>
+          </a:lnRef>
+          <a:fillRef idx="3">
+            <a:schemeClr val="accent1"/>
+          </a:fillRef>
+          <a:effectRef idx="2">
+            <a:schemeClr val="accent1"/>
+          </a:effectRef>
+          <a:fontRef idx="minor">
+            <a:schemeClr val="lt1"/>
+          </a:fontRef>
+        </p:style>
+        <p:txBody>
+          <a:bodyPr rtlCol="0" anchor="ctr"/>
+          <a:lstStyle/>
+          <a:p>
+            <a:pPr algn="ctr"/>
+          </a:p>
+        </p:txBody>
+      </p:sp>
+      <p:pic>
+        <p:nvPicPr>
+          <p:cNvPr id="7" name="Picture 6" descr="chart_end_to_end_workflow.png"/>
+          <p:cNvPicPr>
+            <a:picLocks noChangeAspect="1"/>
+          </p:cNvPicPr>
+          <p:nvPr/>
+        </p:nvPicPr>
+        <p:blipFill>
+          <a:blip r:embed="rId2"/>
+          <a:stretch>
+            <a:fillRect/>
+          </a:stretch>
+        </p:blipFill>
+        <p:spPr>
+          <a:xfrm>
+            <a:off x="658368" y="1408176"/>
+            <a:ext cx="10289364" cy="4343400"/>
+          </a:xfrm>
+          <a:prstGeom prst="rect">
+            <a:avLst/>
+          </a:prstGeom>
+        </p:spPr>
+      </p:pic>
+      <p:sp>
+        <p:nvSpPr>
+          <p:cNvPr id="8" name="TextBox 7"/>
+          <p:cNvSpPr txBox="1"/>
+          <p:nvPr/>
+        </p:nvSpPr>
+        <p:spPr>
+          <a:xfrm>
+            <a:off x="658368" y="5806440"/>
+            <a:ext cx="11094415" cy="347472"/>
+          </a:xfrm>
+          <a:prstGeom prst="rect">
+            <a:avLst/>
+          </a:prstGeom>
+          <a:noFill/>
+        </p:spPr>
+        <p:txBody>
+          <a:bodyPr wrap="square" anchor="t" lIns="50800" rIns="50800">
+            <a:spAutoFit/>
+          </a:bodyPr>
+          <a:lstStyle/>
+          <a:p>
+            <a:pPr algn="ctr">
+              <a:defRPr sz="1000" b="0">
+                <a:solidFill>
+                  <a:srgbClr val="94A3B8"/>
+                </a:solidFill>
+                <a:latin typeface="Segoe UI"/>
+              </a:defRPr>
+            </a:pPr>
+            <a:r>
+              <a:t>Detect → Triage → Evidence → Cursor H → JIRA/Notify → Change Set → Resolve</a:t>
+            </a:r>
+          </a:p>
+        </p:txBody>
+      </p:sp>
+      <p:sp>
+        <p:nvSpPr>
+          <p:cNvPr id="9" name="TextBox 8"/>
+          <p:cNvSpPr txBox="1"/>
+          <p:nvPr/>
+        </p:nvSpPr>
+        <p:spPr>
+          <a:xfrm>
+            <a:off x="548640" y="6473952"/>
+            <a:ext cx="9144000" cy="256032"/>
+          </a:xfrm>
+          <a:prstGeom prst="rect">
+            <a:avLst/>
+          </a:prstGeom>
+          <a:noFill/>
+        </p:spPr>
+        <p:txBody>
+          <a:bodyPr wrap="square" anchor="t" lIns="50800" rIns="50800">
+            <a:spAutoFit/>
+          </a:bodyPr>
+          <a:lstStyle/>
+          <a:p>
+            <a:pPr algn="l">
+              <a:defRPr sz="900" b="0">
+                <a:solidFill>
+                  <a:srgbClr val="94A3B8"/>
+                </a:solidFill>
+                <a:latin typeface="Segoe UI"/>
+              </a:defRPr>
+            </a:pPr>
+            <a:r>
+              <a:t>QA Automation Standard  ·  Automation Bug Lifecycle  ·  Internal</a:t>
+            </a:r>
+          </a:p>
+        </p:txBody>
+      </p:sp>
+      <p:sp>
+        <p:nvSpPr>
+          <p:cNvPr id="10" name="TextBox 9"/>
+          <p:cNvSpPr txBox="1"/>
+          <p:nvPr/>
+        </p:nvSpPr>
+        <p:spPr>
+          <a:xfrm>
+            <a:off x="11109960" y="6473952"/>
+            <a:ext cx="640080" cy="256032"/>
+          </a:xfrm>
+          <a:prstGeom prst="rect">
+            <a:avLst/>
+          </a:prstGeom>
+          <a:noFill/>
+        </p:spPr>
+        <p:txBody>
+          <a:bodyPr wrap="square" anchor="t" lIns="50800" rIns="50800">
+            <a:spAutoFit/>
+          </a:bodyPr>
+          <a:lstStyle/>
+          <a:p>
+            <a:pPr algn="r">
+              <a:defRPr sz="900" b="0">
+                <a:solidFill>
+                  <a:srgbClr val="94A3B8"/>
+                </a:solidFill>
+                <a:latin typeface="Segoe UI"/>
+              </a:defRPr>
+            </a:pPr>
+            <a:r>
+              <a:t>5</a:t>
             </a:r>
           </a:p>
         </p:txBody>
@@ -8811,7 +11353,7 @@
               </a:defRPr>
             </a:pPr>
             <a:r>
-              <a:t>Four Pillars of the Standard</a:t>
+              <a:t>Step 1 — Triage Before You Log</a:t>
             </a:r>
           </a:p>
         </p:txBody>
@@ -8847,7 +11389,7 @@
               </a:defRPr>
             </a:pPr>
             <a:r>
-              <a:t>Validated against repository standards</a:t>
+              <a:t>Decision tree — TRIAGE_RULES.md + FLAKINESS_PLAYBOOK.md</a:t>
             </a:r>
           </a:p>
         </p:txBody>
@@ -8861,7 +11403,7 @@
         <p:spPr>
           <a:xfrm>
             <a:off x="548640" y="1298448"/>
-            <a:ext cx="5349240" cy="2148840"/>
+            <a:ext cx="11313871" cy="4910328"/>
           </a:xfrm>
           <a:prstGeom prst="roundRect">
             <a:avLst>
@@ -8899,49 +11441,30 @@
           </a:p>
         </p:txBody>
       </p:sp>
-      <p:sp>
-        <p:nvSpPr>
-          <p:cNvPr id="7" name="Rectangle 6"/>
-          <p:cNvSpPr/>
-          <p:nvPr/>
-        </p:nvSpPr>
-        <p:spPr>
-          <a:xfrm>
-            <a:off x="548640" y="1298448"/>
-            <a:ext cx="5349240" cy="73152"/>
-          </a:xfrm>
-          <a:prstGeom prst="rect">
-            <a:avLst/>
-          </a:prstGeom>
-          <a:solidFill>
-            <a:srgbClr val="C27800"/>
-          </a:solidFill>
-          <a:ln>
-            <a:noFill/>
-          </a:ln>
-        </p:spPr>
-        <p:style>
-          <a:lnRef idx="1">
-            <a:schemeClr val="accent1"/>
-          </a:lnRef>
-          <a:fillRef idx="3">
-            <a:schemeClr val="accent1"/>
-          </a:fillRef>
-          <a:effectRef idx="2">
-            <a:schemeClr val="accent1"/>
-          </a:effectRef>
-          <a:fontRef idx="minor">
-            <a:schemeClr val="lt1"/>
-          </a:fontRef>
-        </p:style>
-        <p:txBody>
-          <a:bodyPr rtlCol="0" anchor="ctr"/>
-          <a:lstStyle/>
-          <a:p>
-            <a:pPr algn="ctr"/>
-          </a:p>
-        </p:txBody>
-      </p:sp>
+      <p:pic>
+        <p:nvPicPr>
+          <p:cNvPr id="7" name="Picture 6" descr="chart_triage_decision.png"/>
+          <p:cNvPicPr>
+            <a:picLocks noChangeAspect="1"/>
+          </p:cNvPicPr>
+          <p:nvPr/>
+        </p:nvPicPr>
+        <p:blipFill>
+          <a:blip r:embed="rId2"/>
+          <a:stretch>
+            <a:fillRect/>
+          </a:stretch>
+        </p:blipFill>
+        <p:spPr>
+          <a:xfrm>
+            <a:off x="658368" y="1408176"/>
+            <a:ext cx="7125194" cy="4343400"/>
+          </a:xfrm>
+          <a:prstGeom prst="rect">
+            <a:avLst/>
+          </a:prstGeom>
+        </p:spPr>
+      </p:pic>
       <p:sp>
         <p:nvSpPr>
           <p:cNvPr id="8" name="TextBox 7"/>
@@ -8950,8 +11473,8 @@
         </p:nvSpPr>
         <p:spPr>
           <a:xfrm>
-            <a:off x="749808" y="1463040"/>
-            <a:ext cx="457200" cy="365760"/>
+            <a:off x="658368" y="5806440"/>
+            <a:ext cx="11094415" cy="347472"/>
           </a:xfrm>
           <a:prstGeom prst="rect">
             <a:avLst/>
@@ -8964,16 +11487,16 @@
           </a:bodyPr>
           <a:lstStyle/>
           <a:p>
-            <a:pPr algn="l">
-              <a:defRPr sz="2200" b="1">
-                <a:solidFill>
-                  <a:srgbClr val="C27800"/>
-                </a:solidFill>
-                <a:latin typeface="Segoe UI"/>
-              </a:defRPr>
-            </a:pPr>
-            <a:r>
-              <a:t>01</a:t>
+            <a:pPr algn="ctr">
+              <a:defRPr sz="1000" b="0">
+                <a:solidFill>
+                  <a:srgbClr val="94A3B8"/>
+                </a:solidFill>
+                <a:latin typeface="Segoe UI"/>
+              </a:defRPr>
+            </a:pPr>
+            <a:r>
+              <a:t>Environment and flaky failures do not enter the full bug cycle</a:t>
             </a:r>
           </a:p>
         </p:txBody>
@@ -8986,8 +11509,8 @@
         </p:nvSpPr>
         <p:spPr>
           <a:xfrm>
-            <a:off x="749808" y="1801368"/>
-            <a:ext cx="4946904" cy="365760"/>
+            <a:off x="548640" y="6473952"/>
+            <a:ext cx="9144000" cy="256032"/>
           </a:xfrm>
           <a:prstGeom prst="rect">
             <a:avLst/>
@@ -9001,15 +11524,15 @@
           <a:lstStyle/>
           <a:p>
             <a:pPr algn="l">
-              <a:defRPr sz="1600" b="1">
-                <a:solidFill>
-                  <a:srgbClr val="003241"/>
-                </a:solidFill>
-                <a:latin typeface="Segoe UI"/>
-              </a:defRPr>
-            </a:pPr>
-            <a:r>
-              <a:t>Triage &amp; classify</a:t>
+              <a:defRPr sz="900" b="0">
+                <a:solidFill>
+                  <a:srgbClr val="94A3B8"/>
+                </a:solidFill>
+                <a:latin typeface="Segoe UI"/>
+              </a:defRPr>
+            </a:pPr>
+            <a:r>
+              <a:t>QA Automation Standard  ·  Automation Bug Lifecycle  ·  Internal</a:t>
             </a:r>
           </a:p>
         </p:txBody>
@@ -9017,672 +11540,6 @@
       <p:sp>
         <p:nvSpPr>
           <p:cNvPr id="10" name="TextBox 9"/>
-          <p:cNvSpPr txBox="1"/>
-          <p:nvPr/>
-        </p:nvSpPr>
-        <p:spPr>
-          <a:xfrm>
-            <a:off x="749808" y="2167128"/>
-            <a:ext cx="4946904" cy="1188720"/>
-          </a:xfrm>
-          <a:prstGeom prst="rect">
-            <a:avLst/>
-          </a:prstGeom>
-          <a:noFill/>
-        </p:spPr>
-        <p:txBody>
-          <a:bodyPr wrap="square" anchor="t" lIns="50800" rIns="50800">
-            <a:spAutoFit/>
-          </a:bodyPr>
-          <a:lstStyle/>
-          <a:p>
-            <a:pPr algn="l">
-              <a:defRPr sz="1250" b="0">
-                <a:solidFill>
-                  <a:srgbClr val="64748B"/>
-                </a:solidFill>
-                <a:latin typeface="Segoe UI"/>
-              </a:defRPr>
-            </a:pPr>
-            <a:r>
-              <a:t>Per 04_EXECUTION/TRIAGE_RULES.md. Rerun locally. Env vs flaky vs defect. Do not log JIRA for noise.</a:t>
-            </a:r>
-          </a:p>
-        </p:txBody>
-      </p:sp>
-      <p:sp>
-        <p:nvSpPr>
-          <p:cNvPr id="11" name="Rounded Rectangle 10"/>
-          <p:cNvSpPr/>
-          <p:nvPr/>
-        </p:nvSpPr>
-        <p:spPr>
-          <a:xfrm>
-            <a:off x="6263640" y="1298448"/>
-            <a:ext cx="5349240" cy="2148840"/>
-          </a:xfrm>
-          <a:prstGeom prst="roundRect">
-            <a:avLst>
-              <a:gd name="adj" fmla="val 6000"/>
-            </a:avLst>
-          </a:prstGeom>
-          <a:solidFill>
-            <a:srgbClr val="FFFFFF"/>
-          </a:solidFill>
-          <a:ln w="15875">
-            <a:solidFill>
-              <a:srgbClr val="E2E8F0"/>
-            </a:solidFill>
-          </a:ln>
-        </p:spPr>
-        <p:style>
-          <a:lnRef idx="1">
-            <a:schemeClr val="accent1"/>
-          </a:lnRef>
-          <a:fillRef idx="3">
-            <a:schemeClr val="accent1"/>
-          </a:fillRef>
-          <a:effectRef idx="2">
-            <a:schemeClr val="accent1"/>
-          </a:effectRef>
-          <a:fontRef idx="minor">
-            <a:schemeClr val="lt1"/>
-          </a:fontRef>
-        </p:style>
-        <p:txBody>
-          <a:bodyPr rtlCol="0" anchor="ctr"/>
-          <a:lstStyle/>
-          <a:p>
-            <a:pPr algn="ctr"/>
-          </a:p>
-        </p:txBody>
-      </p:sp>
-      <p:sp>
-        <p:nvSpPr>
-          <p:cNvPr id="12" name="Rectangle 11"/>
-          <p:cNvSpPr/>
-          <p:nvPr/>
-        </p:nvSpPr>
-        <p:spPr>
-          <a:xfrm>
-            <a:off x="6263640" y="1298448"/>
-            <a:ext cx="5349240" cy="73152"/>
-          </a:xfrm>
-          <a:prstGeom prst="rect">
-            <a:avLst/>
-          </a:prstGeom>
-          <a:solidFill>
-            <a:srgbClr val="026B84"/>
-          </a:solidFill>
-          <a:ln>
-            <a:noFill/>
-          </a:ln>
-        </p:spPr>
-        <p:style>
-          <a:lnRef idx="1">
-            <a:schemeClr val="accent1"/>
-          </a:lnRef>
-          <a:fillRef idx="3">
-            <a:schemeClr val="accent1"/>
-          </a:fillRef>
-          <a:effectRef idx="2">
-            <a:schemeClr val="accent1"/>
-          </a:effectRef>
-          <a:fontRef idx="minor">
-            <a:schemeClr val="lt1"/>
-          </a:fontRef>
-        </p:style>
-        <p:txBody>
-          <a:bodyPr rtlCol="0" anchor="ctr"/>
-          <a:lstStyle/>
-          <a:p>
-            <a:pPr algn="ctr"/>
-          </a:p>
-        </p:txBody>
-      </p:sp>
-      <p:sp>
-        <p:nvSpPr>
-          <p:cNvPr id="13" name="TextBox 12"/>
-          <p:cNvSpPr txBox="1"/>
-          <p:nvPr/>
-        </p:nvSpPr>
-        <p:spPr>
-          <a:xfrm>
-            <a:off x="6464808" y="1463040"/>
-            <a:ext cx="457200" cy="365760"/>
-          </a:xfrm>
-          <a:prstGeom prst="rect">
-            <a:avLst/>
-          </a:prstGeom>
-          <a:noFill/>
-        </p:spPr>
-        <p:txBody>
-          <a:bodyPr wrap="square" anchor="t" lIns="50800" rIns="50800">
-            <a:spAutoFit/>
-          </a:bodyPr>
-          <a:lstStyle/>
-          <a:p>
-            <a:pPr algn="l">
-              <a:defRPr sz="2200" b="1">
-                <a:solidFill>
-                  <a:srgbClr val="026B84"/>
-                </a:solidFill>
-                <a:latin typeface="Segoe UI"/>
-              </a:defRPr>
-            </a:pPr>
-            <a:r>
-              <a:t>02</a:t>
-            </a:r>
-          </a:p>
-        </p:txBody>
-      </p:sp>
-      <p:sp>
-        <p:nvSpPr>
-          <p:cNvPr id="14" name="TextBox 13"/>
-          <p:cNvSpPr txBox="1"/>
-          <p:nvPr/>
-        </p:nvSpPr>
-        <p:spPr>
-          <a:xfrm>
-            <a:off x="6464808" y="1801368"/>
-            <a:ext cx="4946904" cy="365760"/>
-          </a:xfrm>
-          <a:prstGeom prst="rect">
-            <a:avLst/>
-          </a:prstGeom>
-          <a:noFill/>
-        </p:spPr>
-        <p:txBody>
-          <a:bodyPr wrap="square" anchor="t" lIns="50800" rIns="50800">
-            <a:spAutoFit/>
-          </a:bodyPr>
-          <a:lstStyle/>
-          <a:p>
-            <a:pPr algn="l">
-              <a:defRPr sz="1600" b="1">
-                <a:solidFill>
-                  <a:srgbClr val="003241"/>
-                </a:solidFill>
-                <a:latin typeface="Segoe UI"/>
-              </a:defRPr>
-            </a:pPr>
-            <a:r>
-              <a:t>Evidence folder</a:t>
-            </a:r>
-          </a:p>
-        </p:txBody>
-      </p:sp>
-      <p:sp>
-        <p:nvSpPr>
-          <p:cNvPr id="15" name="TextBox 14"/>
-          <p:cNvSpPr txBox="1"/>
-          <p:nvPr/>
-        </p:nvSpPr>
-        <p:spPr>
-          <a:xfrm>
-            <a:off x="6464808" y="2167128"/>
-            <a:ext cx="4946904" cy="1188720"/>
-          </a:xfrm>
-          <a:prstGeom prst="rect">
-            <a:avLst/>
-          </a:prstGeom>
-          <a:noFill/>
-        </p:spPr>
-        <p:txBody>
-          <a:bodyPr wrap="square" anchor="t" lIns="50800" rIns="50800">
-            <a:spAutoFit/>
-          </a:bodyPr>
-          <a:lstStyle/>
-          <a:p>
-            <a:pPr algn="l">
-              <a:defRPr sz="1250" b="0">
-                <a:solidFill>
-                  <a:srgbClr val="64748B"/>
-                </a:solidFill>
-                <a:latin typeface="Segoe UI"/>
-              </a:defRPr>
-            </a:pPr>
-            <a:r>
-              <a:t>10_IMPORTS_RAW/regression_reports/[MMDDYYYY]/ — screenshots, logs, test data, one bug .md per issue.</a:t>
-            </a:r>
-          </a:p>
-        </p:txBody>
-      </p:sp>
-      <p:sp>
-        <p:nvSpPr>
-          <p:cNvPr id="16" name="Rounded Rectangle 15"/>
-          <p:cNvSpPr/>
-          <p:nvPr/>
-        </p:nvSpPr>
-        <p:spPr>
-          <a:xfrm>
-            <a:off x="548640" y="3813048"/>
-            <a:ext cx="5349240" cy="2148840"/>
-          </a:xfrm>
-          <a:prstGeom prst="roundRect">
-            <a:avLst>
-              <a:gd name="adj" fmla="val 6000"/>
-            </a:avLst>
-          </a:prstGeom>
-          <a:solidFill>
-            <a:srgbClr val="FFFFFF"/>
-          </a:solidFill>
-          <a:ln w="15875">
-            <a:solidFill>
-              <a:srgbClr val="E2E8F0"/>
-            </a:solidFill>
-          </a:ln>
-        </p:spPr>
-        <p:style>
-          <a:lnRef idx="1">
-            <a:schemeClr val="accent1"/>
-          </a:lnRef>
-          <a:fillRef idx="3">
-            <a:schemeClr val="accent1"/>
-          </a:fillRef>
-          <a:effectRef idx="2">
-            <a:schemeClr val="accent1"/>
-          </a:effectRef>
-          <a:fontRef idx="minor">
-            <a:schemeClr val="lt1"/>
-          </a:fontRef>
-        </p:style>
-        <p:txBody>
-          <a:bodyPr rtlCol="0" anchor="ctr"/>
-          <a:lstStyle/>
-          <a:p>
-            <a:pPr algn="ctr"/>
-          </a:p>
-        </p:txBody>
-      </p:sp>
-      <p:sp>
-        <p:nvSpPr>
-          <p:cNvPr id="17" name="Rectangle 16"/>
-          <p:cNvSpPr/>
-          <p:nvPr/>
-        </p:nvSpPr>
-        <p:spPr>
-          <a:xfrm>
-            <a:off x="548640" y="3813048"/>
-            <a:ext cx="5349240" cy="73152"/>
-          </a:xfrm>
-          <a:prstGeom prst="rect">
-            <a:avLst/>
-          </a:prstGeom>
-          <a:solidFill>
-            <a:srgbClr val="2D65B4"/>
-          </a:solidFill>
-          <a:ln>
-            <a:noFill/>
-          </a:ln>
-        </p:spPr>
-        <p:style>
-          <a:lnRef idx="1">
-            <a:schemeClr val="accent1"/>
-          </a:lnRef>
-          <a:fillRef idx="3">
-            <a:schemeClr val="accent1"/>
-          </a:fillRef>
-          <a:effectRef idx="2">
-            <a:schemeClr val="accent1"/>
-          </a:effectRef>
-          <a:fontRef idx="minor">
-            <a:schemeClr val="lt1"/>
-          </a:fontRef>
-        </p:style>
-        <p:txBody>
-          <a:bodyPr rtlCol="0" anchor="ctr"/>
-          <a:lstStyle/>
-          <a:p>
-            <a:pPr algn="ctr"/>
-          </a:p>
-        </p:txBody>
-      </p:sp>
-      <p:sp>
-        <p:nvSpPr>
-          <p:cNvPr id="18" name="TextBox 17"/>
-          <p:cNvSpPr txBox="1"/>
-          <p:nvPr/>
-        </p:nvSpPr>
-        <p:spPr>
-          <a:xfrm>
-            <a:off x="749808" y="3977640"/>
-            <a:ext cx="457200" cy="365760"/>
-          </a:xfrm>
-          <a:prstGeom prst="rect">
-            <a:avLst/>
-          </a:prstGeom>
-          <a:noFill/>
-        </p:spPr>
-        <p:txBody>
-          <a:bodyPr wrap="square" anchor="t" lIns="50800" rIns="50800">
-            <a:spAutoFit/>
-          </a:bodyPr>
-          <a:lstStyle/>
-          <a:p>
-            <a:pPr algn="l">
-              <a:defRPr sz="2200" b="1">
-                <a:solidFill>
-                  <a:srgbClr val="2D65B4"/>
-                </a:solidFill>
-                <a:latin typeface="Segoe UI"/>
-              </a:defRPr>
-            </a:pPr>
-            <a:r>
-              <a:t>03</a:t>
-            </a:r>
-          </a:p>
-        </p:txBody>
-      </p:sp>
-      <p:sp>
-        <p:nvSpPr>
-          <p:cNvPr id="19" name="TextBox 18"/>
-          <p:cNvSpPr txBox="1"/>
-          <p:nvPr/>
-        </p:nvSpPr>
-        <p:spPr>
-          <a:xfrm>
-            <a:off x="749808" y="4315968"/>
-            <a:ext cx="4946904" cy="365760"/>
-          </a:xfrm>
-          <a:prstGeom prst="rect">
-            <a:avLst/>
-          </a:prstGeom>
-          <a:noFill/>
-        </p:spPr>
-        <p:txBody>
-          <a:bodyPr wrap="square" anchor="t" lIns="50800" rIns="50800">
-            <a:spAutoFit/>
-          </a:bodyPr>
-          <a:lstStyle/>
-          <a:p>
-            <a:pPr algn="l">
-              <a:defRPr sz="1600" b="1">
-                <a:solidFill>
-                  <a:srgbClr val="003241"/>
-                </a:solidFill>
-                <a:latin typeface="Segoe UI"/>
-              </a:defRPr>
-            </a:pPr>
-            <a:r>
-              <a:t>Cursor Prompt H</a:t>
-            </a:r>
-          </a:p>
-        </p:txBody>
-      </p:sp>
-      <p:sp>
-        <p:nvSpPr>
-          <p:cNvPr id="20" name="TextBox 19"/>
-          <p:cNvSpPr txBox="1"/>
-          <p:nvPr/>
-        </p:nvSpPr>
-        <p:spPr>
-          <a:xfrm>
-            <a:off x="749808" y="4681728"/>
-            <a:ext cx="4946904" cy="1188720"/>
-          </a:xfrm>
-          <a:prstGeom prst="rect">
-            <a:avLst/>
-          </a:prstGeom>
-          <a:noFill/>
-        </p:spPr>
-        <p:txBody>
-          <a:bodyPr wrap="square" anchor="t" lIns="50800" rIns="50800">
-            <a:spAutoFit/>
-          </a:bodyPr>
-          <a:lstStyle/>
-          <a:p>
-            <a:pPr algn="l">
-              <a:defRPr sz="1250" b="0">
-                <a:solidFill>
-                  <a:srgbClr val="64748B"/>
-                </a:solidFill>
-                <a:latin typeface="Segoe UI"/>
-              </a:defRPr>
-            </a:pPr>
-            <a:r>
-              <a:t>00_SYSTEM/PROMPTS.md — JIRA block, failure email, Teams message, resolution placeholder in one file.</a:t>
-            </a:r>
-          </a:p>
-        </p:txBody>
-      </p:sp>
-      <p:sp>
-        <p:nvSpPr>
-          <p:cNvPr id="21" name="Rounded Rectangle 20"/>
-          <p:cNvSpPr/>
-          <p:nvPr/>
-        </p:nvSpPr>
-        <p:spPr>
-          <a:xfrm>
-            <a:off x="6263640" y="3813048"/>
-            <a:ext cx="5349240" cy="2148840"/>
-          </a:xfrm>
-          <a:prstGeom prst="roundRect">
-            <a:avLst>
-              <a:gd name="adj" fmla="val 6000"/>
-            </a:avLst>
-          </a:prstGeom>
-          <a:solidFill>
-            <a:srgbClr val="FFFFFF"/>
-          </a:solidFill>
-          <a:ln w="15875">
-            <a:solidFill>
-              <a:srgbClr val="E2E8F0"/>
-            </a:solidFill>
-          </a:ln>
-        </p:spPr>
-        <p:style>
-          <a:lnRef idx="1">
-            <a:schemeClr val="accent1"/>
-          </a:lnRef>
-          <a:fillRef idx="3">
-            <a:schemeClr val="accent1"/>
-          </a:fillRef>
-          <a:effectRef idx="2">
-            <a:schemeClr val="accent1"/>
-          </a:effectRef>
-          <a:fontRef idx="minor">
-            <a:schemeClr val="lt1"/>
-          </a:fontRef>
-        </p:style>
-        <p:txBody>
-          <a:bodyPr rtlCol="0" anchor="ctr"/>
-          <a:lstStyle/>
-          <a:p>
-            <a:pPr algn="ctr"/>
-          </a:p>
-        </p:txBody>
-      </p:sp>
-      <p:sp>
-        <p:nvSpPr>
-          <p:cNvPr id="22" name="Rectangle 21"/>
-          <p:cNvSpPr/>
-          <p:nvPr/>
-        </p:nvSpPr>
-        <p:spPr>
-          <a:xfrm>
-            <a:off x="6263640" y="3813048"/>
-            <a:ext cx="5349240" cy="73152"/>
-          </a:xfrm>
-          <a:prstGeom prst="rect">
-            <a:avLst/>
-          </a:prstGeom>
-          <a:solidFill>
-            <a:srgbClr val="009E86"/>
-          </a:solidFill>
-          <a:ln>
-            <a:noFill/>
-          </a:ln>
-        </p:spPr>
-        <p:style>
-          <a:lnRef idx="1">
-            <a:schemeClr val="accent1"/>
-          </a:lnRef>
-          <a:fillRef idx="3">
-            <a:schemeClr val="accent1"/>
-          </a:fillRef>
-          <a:effectRef idx="2">
-            <a:schemeClr val="accent1"/>
-          </a:effectRef>
-          <a:fontRef idx="minor">
-            <a:schemeClr val="lt1"/>
-          </a:fontRef>
-        </p:style>
-        <p:txBody>
-          <a:bodyPr rtlCol="0" anchor="ctr"/>
-          <a:lstStyle/>
-          <a:p>
-            <a:pPr algn="ctr"/>
-          </a:p>
-        </p:txBody>
-      </p:sp>
-      <p:sp>
-        <p:nvSpPr>
-          <p:cNvPr id="23" name="TextBox 22"/>
-          <p:cNvSpPr txBox="1"/>
-          <p:nvPr/>
-        </p:nvSpPr>
-        <p:spPr>
-          <a:xfrm>
-            <a:off x="6464808" y="3977640"/>
-            <a:ext cx="457200" cy="365760"/>
-          </a:xfrm>
-          <a:prstGeom prst="rect">
-            <a:avLst/>
-          </a:prstGeom>
-          <a:noFill/>
-        </p:spPr>
-        <p:txBody>
-          <a:bodyPr wrap="square" anchor="t" lIns="50800" rIns="50800">
-            <a:spAutoFit/>
-          </a:bodyPr>
-          <a:lstStyle/>
-          <a:p>
-            <a:pPr algn="l">
-              <a:defRPr sz="2200" b="1">
-                <a:solidFill>
-                  <a:srgbClr val="009E86"/>
-                </a:solidFill>
-                <a:latin typeface="Segoe UI"/>
-              </a:defRPr>
-            </a:pPr>
-            <a:r>
-              <a:t>04</a:t>
-            </a:r>
-          </a:p>
-        </p:txBody>
-      </p:sp>
-      <p:sp>
-        <p:nvSpPr>
-          <p:cNvPr id="24" name="TextBox 23"/>
-          <p:cNvSpPr txBox="1"/>
-          <p:nvPr/>
-        </p:nvSpPr>
-        <p:spPr>
-          <a:xfrm>
-            <a:off x="6464808" y="4315968"/>
-            <a:ext cx="4946904" cy="365760"/>
-          </a:xfrm>
-          <a:prstGeom prst="rect">
-            <a:avLst/>
-          </a:prstGeom>
-          <a:noFill/>
-        </p:spPr>
-        <p:txBody>
-          <a:bodyPr wrap="square" anchor="t" lIns="50800" rIns="50800">
-            <a:spAutoFit/>
-          </a:bodyPr>
-          <a:lstStyle/>
-          <a:p>
-            <a:pPr algn="l">
-              <a:defRPr sz="1600" b="1">
-                <a:solidFill>
-                  <a:srgbClr val="003241"/>
-                </a:solidFill>
-                <a:latin typeface="Segoe UI"/>
-              </a:defRPr>
-            </a:pPr>
-            <a:r>
-              <a:t>GitLab change set</a:t>
-            </a:r>
-          </a:p>
-        </p:txBody>
-      </p:sp>
-      <p:sp>
-        <p:nvSpPr>
-          <p:cNvPr id="25" name="TextBox 24"/>
-          <p:cNvSpPr txBox="1"/>
-          <p:nvPr/>
-        </p:nvSpPr>
-        <p:spPr>
-          <a:xfrm>
-            <a:off x="6464808" y="4681728"/>
-            <a:ext cx="4946904" cy="1188720"/>
-          </a:xfrm>
-          <a:prstGeom prst="rect">
-            <a:avLst/>
-          </a:prstGeom>
-          <a:noFill/>
-        </p:spPr>
-        <p:txBody>
-          <a:bodyPr wrap="square" anchor="t" lIns="50800" rIns="50800">
-            <a:spAutoFit/>
-          </a:bodyPr>
-          <a:lstStyle/>
-          <a:p>
-            <a:pPr algn="l">
-              <a:defRPr sz="1250" b="0">
-                <a:solidFill>
-                  <a:srgbClr val="64748B"/>
-                </a:solidFill>
-                <a:latin typeface="Segoe UI"/>
-              </a:defRPr>
-            </a:pPr>
-            <a:r>
-              <a:t>GitLab Project Manager — who merged, who committed, which branches between last green run and failure.</a:t>
-            </a:r>
-          </a:p>
-        </p:txBody>
-      </p:sp>
-      <p:sp>
-        <p:nvSpPr>
-          <p:cNvPr id="26" name="TextBox 25"/>
-          <p:cNvSpPr txBox="1"/>
-          <p:nvPr/>
-        </p:nvSpPr>
-        <p:spPr>
-          <a:xfrm>
-            <a:off x="548640" y="6473952"/>
-            <a:ext cx="9144000" cy="256032"/>
-          </a:xfrm>
-          <a:prstGeom prst="rect">
-            <a:avLst/>
-          </a:prstGeom>
-          <a:noFill/>
-        </p:spPr>
-        <p:txBody>
-          <a:bodyPr wrap="square" anchor="t" lIns="50800" rIns="50800">
-            <a:spAutoFit/>
-          </a:bodyPr>
-          <a:lstStyle/>
-          <a:p>
-            <a:pPr algn="l">
-              <a:defRPr sz="900" b="0">
-                <a:solidFill>
-                  <a:srgbClr val="94A3B8"/>
-                </a:solidFill>
-                <a:latin typeface="Segoe UI"/>
-              </a:defRPr>
-            </a:pPr>
-            <a:r>
-              <a:t>QA Automation Standard  ·  Automation Bug Lifecycle  ·  Internal</a:t>
-            </a:r>
-          </a:p>
-        </p:txBody>
-      </p:sp>
-      <p:sp>
-        <p:nvSpPr>
-          <p:cNvPr id="27" name="TextBox 26"/>
           <p:cNvSpPr txBox="1"/>
           <p:nvPr/>
         </p:nvSpPr>
@@ -9730,7 +11587,7 @@
     <p:bg>
       <p:bgPr>
         <a:solidFill>
-          <a:srgbClr val="F8FAFC"/>
+          <a:srgbClr val="003241"/>
         </a:solidFill>
         <a:effectLst/>
       </p:bgPr>
@@ -9744,58 +11601,13 @@
       <p:grpSpPr/>
       <p:sp>
         <p:nvSpPr>
-          <p:cNvPr id="2" name="Rounded Rectangle 1"/>
+          <p:cNvPr id="2" name="Rectangle 1"/>
           <p:cNvSpPr/>
           <p:nvPr/>
         </p:nvSpPr>
         <p:spPr>
           <a:xfrm>
-            <a:off x="0" y="0"/>
-            <a:ext cx="12191695" cy="1005840"/>
-          </a:xfrm>
-          <a:prstGeom prst="roundRect">
-            <a:avLst>
-              <a:gd name="adj" fmla="val 6000"/>
-            </a:avLst>
-          </a:prstGeom>
-          <a:solidFill>
-            <a:srgbClr val="003241"/>
-          </a:solidFill>
-          <a:ln>
-            <a:noFill/>
-          </a:ln>
-        </p:spPr>
-        <p:style>
-          <a:lnRef idx="1">
-            <a:schemeClr val="accent1"/>
-          </a:lnRef>
-          <a:fillRef idx="3">
-            <a:schemeClr val="accent1"/>
-          </a:fillRef>
-          <a:effectRef idx="2">
-            <a:schemeClr val="accent1"/>
-          </a:effectRef>
-          <a:fontRef idx="minor">
-            <a:schemeClr val="lt1"/>
-          </a:fontRef>
-        </p:style>
-        <p:txBody>
-          <a:bodyPr rtlCol="0" anchor="ctr"/>
-          <a:lstStyle/>
-          <a:p>
-            <a:pPr algn="ctr"/>
-          </a:p>
-        </p:txBody>
-      </p:sp>
-      <p:sp>
-        <p:nvSpPr>
-          <p:cNvPr id="3" name="Rectangle 2"/>
-          <p:cNvSpPr/>
-          <p:nvPr/>
-        </p:nvSpPr>
-        <p:spPr>
-          <a:xfrm>
-            <a:off x="0" y="1005840"/>
+            <a:off x="0" y="3200400"/>
             <a:ext cx="12191695" cy="64008"/>
           </a:xfrm>
           <a:prstGeom prst="rect">
@@ -9832,14 +11644,14 @@
       </p:sp>
       <p:sp>
         <p:nvSpPr>
-          <p:cNvPr id="4" name="TextBox 3"/>
+          <p:cNvPr id="3" name="TextBox 2"/>
           <p:cNvSpPr txBox="1"/>
           <p:nvPr/>
         </p:nvSpPr>
         <p:spPr>
           <a:xfrm>
-            <a:off x="548640" y="182880"/>
-            <a:ext cx="10058400" cy="502920"/>
+            <a:off x="548640" y="2148840"/>
+            <a:ext cx="10058400" cy="777240"/>
           </a:xfrm>
           <a:prstGeom prst="rect">
             <a:avLst/>
@@ -9853,7 +11665,7 @@
           <a:lstStyle/>
           <a:p>
             <a:pPr algn="l">
-              <a:defRPr sz="3000" b="1">
+              <a:defRPr sz="3800" b="1">
                 <a:solidFill>
                   <a:srgbClr val="FFFFFF"/>
                 </a:solidFill>
@@ -9861,21 +11673,21 @@
               </a:defRPr>
             </a:pPr>
             <a:r>
-              <a:t>Evidence Folder Structure</a:t>
-            </a:r>
-          </a:p>
-        </p:txBody>
-      </p:sp>
-      <p:sp>
-        <p:nvSpPr>
-          <p:cNvPr id="5" name="TextBox 4"/>
+              <a:t>Act on a Real Defect</a:t>
+            </a:r>
+          </a:p>
+        </p:txBody>
+      </p:sp>
+      <p:sp>
+        <p:nvSpPr>
+          <p:cNvPr id="4" name="TextBox 3"/>
           <p:cNvSpPr txBox="1"/>
           <p:nvPr/>
         </p:nvSpPr>
         <p:spPr>
           <a:xfrm>
-            <a:off x="548640" y="658368"/>
-            <a:ext cx="10058400" cy="320040"/>
+            <a:off x="548640" y="3401568"/>
+            <a:ext cx="9144000" cy="457200"/>
           </a:xfrm>
           <a:prstGeom prst="rect">
             <a:avLst/>
@@ -9889,7 +11701,7 @@
           <a:lstStyle/>
           <a:p>
             <a:pPr algn="l">
-              <a:defRPr sz="1300" b="0">
+              <a:defRPr sz="1800" b="0">
                 <a:solidFill>
                   <a:srgbClr val="05A2C6"/>
                 </a:solidFill>
@@ -9897,186 +11709,7 @@
               </a:defRPr>
             </a:pPr>
             <a:r>
-              <a:t>BUG_REPORTING_PROCESS.md</a:t>
-            </a:r>
-          </a:p>
-        </p:txBody>
-      </p:sp>
-      <p:sp>
-        <p:nvSpPr>
-          <p:cNvPr id="6" name="Rounded Rectangle 5"/>
-          <p:cNvSpPr/>
-          <p:nvPr/>
-        </p:nvSpPr>
-        <p:spPr>
-          <a:xfrm>
-            <a:off x="548640" y="1298448"/>
-            <a:ext cx="11313871" cy="4910328"/>
-          </a:xfrm>
-          <a:prstGeom prst="roundRect">
-            <a:avLst>
-              <a:gd name="adj" fmla="val 6000"/>
-            </a:avLst>
-          </a:prstGeom>
-          <a:solidFill>
-            <a:srgbClr val="FFFFFF"/>
-          </a:solidFill>
-          <a:ln w="15875">
-            <a:solidFill>
-              <a:srgbClr val="E2E8F0"/>
-            </a:solidFill>
-          </a:ln>
-        </p:spPr>
-        <p:style>
-          <a:lnRef idx="1">
-            <a:schemeClr val="accent1"/>
-          </a:lnRef>
-          <a:fillRef idx="3">
-            <a:schemeClr val="accent1"/>
-          </a:fillRef>
-          <a:effectRef idx="2">
-            <a:schemeClr val="accent1"/>
-          </a:effectRef>
-          <a:fontRef idx="minor">
-            <a:schemeClr val="lt1"/>
-          </a:fontRef>
-        </p:style>
-        <p:txBody>
-          <a:bodyPr rtlCol="0" anchor="ctr"/>
-          <a:lstStyle/>
-          <a:p>
-            <a:pPr algn="ctr"/>
-          </a:p>
-        </p:txBody>
-      </p:sp>
-      <p:pic>
-        <p:nvPicPr>
-          <p:cNvPr id="7" name="Picture 6" descr="chart_evidence_folder.png"/>
-          <p:cNvPicPr>
-            <a:picLocks noChangeAspect="1"/>
-          </p:cNvPicPr>
-          <p:nvPr/>
-        </p:nvPicPr>
-        <p:blipFill>
-          <a:blip r:embed="rId2"/>
-          <a:stretch>
-            <a:fillRect/>
-          </a:stretch>
-        </p:blipFill>
-        <p:spPr>
-          <a:xfrm>
-            <a:off x="658368" y="1408176"/>
-            <a:ext cx="8149975" cy="4343400"/>
-          </a:xfrm>
-          <a:prstGeom prst="rect">
-            <a:avLst/>
-          </a:prstGeom>
-        </p:spPr>
-      </p:pic>
-      <p:sp>
-        <p:nvSpPr>
-          <p:cNvPr id="8" name="TextBox 7"/>
-          <p:cNvSpPr txBox="1"/>
-          <p:nvPr/>
-        </p:nvSpPr>
-        <p:spPr>
-          <a:xfrm>
-            <a:off x="658368" y="5806440"/>
-            <a:ext cx="11094415" cy="347472"/>
-          </a:xfrm>
-          <a:prstGeom prst="rect">
-            <a:avLst/>
-          </a:prstGeom>
-          <a:noFill/>
-        </p:spPr>
-        <p:txBody>
-          <a:bodyPr wrap="square" anchor="t" lIns="50800" rIns="50800">
-            <a:spAutoFit/>
-          </a:bodyPr>
-          <a:lstStyle/>
-          <a:p>
-            <a:pPr algn="ctr">
-              <a:defRPr sz="1000" b="0">
-                <a:solidFill>
-                  <a:srgbClr val="94A3B8"/>
-                </a:solidFill>
-                <a:latin typeface="Segoe UI"/>
-              </a:defRPr>
-            </a:pPr>
-            <a:r>
-              <a:t>Naming: [MMDDYYYY]_[Feature]_[IssueType].md</a:t>
-            </a:r>
-          </a:p>
-        </p:txBody>
-      </p:sp>
-      <p:sp>
-        <p:nvSpPr>
-          <p:cNvPr id="9" name="TextBox 8"/>
-          <p:cNvSpPr txBox="1"/>
-          <p:nvPr/>
-        </p:nvSpPr>
-        <p:spPr>
-          <a:xfrm>
-            <a:off x="548640" y="6473952"/>
-            <a:ext cx="9144000" cy="256032"/>
-          </a:xfrm>
-          <a:prstGeom prst="rect">
-            <a:avLst/>
-          </a:prstGeom>
-          <a:noFill/>
-        </p:spPr>
-        <p:txBody>
-          <a:bodyPr wrap="square" anchor="t" lIns="50800" rIns="50800">
-            <a:spAutoFit/>
-          </a:bodyPr>
-          <a:lstStyle/>
-          <a:p>
-            <a:pPr algn="l">
-              <a:defRPr sz="900" b="0">
-                <a:solidFill>
-                  <a:srgbClr val="94A3B8"/>
-                </a:solidFill>
-                <a:latin typeface="Segoe UI"/>
-              </a:defRPr>
-            </a:pPr>
-            <a:r>
-              <a:t>QA Automation Standard  ·  Automation Bug Lifecycle  ·  Internal</a:t>
-            </a:r>
-          </a:p>
-        </p:txBody>
-      </p:sp>
-      <p:sp>
-        <p:nvSpPr>
-          <p:cNvPr id="10" name="TextBox 9"/>
-          <p:cNvSpPr txBox="1"/>
-          <p:nvPr/>
-        </p:nvSpPr>
-        <p:spPr>
-          <a:xfrm>
-            <a:off x="11109960" y="6473952"/>
-            <a:ext cx="640080" cy="256032"/>
-          </a:xfrm>
-          <a:prstGeom prst="rect">
-            <a:avLst/>
-          </a:prstGeom>
-          <a:noFill/>
-        </p:spPr>
-        <p:txBody>
-          <a:bodyPr wrap="square" anchor="t" lIns="50800" rIns="50800">
-            <a:spAutoFit/>
-          </a:bodyPr>
-          <a:lstStyle/>
-          <a:p>
-            <a:pPr algn="r">
-              <a:defRPr sz="900" b="0">
-                <a:solidFill>
-                  <a:srgbClr val="94A3B8"/>
-                </a:solidFill>
-                <a:latin typeface="Segoe UI"/>
-              </a:defRPr>
-            </a:pPr>
-            <a:r>
-              <a:t>7</a:t>
+              <a:t>Evidence · Prompt H · Change set · Notify</a:t>
             </a:r>
           </a:p>
         </p:txBody>
@@ -10226,7 +11859,7 @@
               </a:defRPr>
             </a:pPr>
             <a:r>
-              <a:t>Cursor Prompt H — One Prompt, All Deliverables</a:t>
+              <a:t>Four Pillars of the Standard</a:t>
             </a:r>
           </a:p>
         </p:txBody>
@@ -10262,234 +11895,21 @@
               </a:defRPr>
             </a:pPr>
             <a:r>
-              <a:t>05_ONBOARDING/HOW_TO_REPETITIVE_TASKS.md</a:t>
-            </a:r>
-          </a:p>
-        </p:txBody>
-      </p:sp>
-      <p:sp>
-        <p:nvSpPr>
-          <p:cNvPr id="6" name="TextBox 5"/>
-          <p:cNvSpPr txBox="1"/>
+              <a:t>What your team runs on every real defect</a:t>
+            </a:r>
+          </a:p>
+        </p:txBody>
+      </p:sp>
+      <p:sp>
+        <p:nvSpPr>
+          <p:cNvPr id="6" name="Rounded Rectangle 5"/>
+          <p:cNvSpPr/>
           <p:nvPr/>
         </p:nvSpPr>
         <p:spPr>
           <a:xfrm>
             <a:off x="548640" y="1298448"/>
-            <a:ext cx="4892040" cy="4754880"/>
-          </a:xfrm>
-          <a:prstGeom prst="rect">
-            <a:avLst/>
-          </a:prstGeom>
-          <a:noFill/>
-        </p:spPr>
-        <p:txBody>
-          <a:bodyPr wrap="square">
-            <a:spAutoFit/>
-          </a:bodyPr>
-          <a:lstStyle/>
-          <a:p>
-            <a:pPr>
-              <a:lnSpc>
-                <a:spcPct val="130000"/>
-              </a:lnSpc>
-              <a:spcAft>
-                <a:spcPts val="800"/>
-              </a:spcAft>
-              <a:defRPr sz="1400">
-                <a:solidFill>
-                  <a:srgbClr val="1E293B"/>
-                </a:solidFill>
-                <a:latin typeface="Segoe UI"/>
-              </a:defRPr>
-            </a:pPr>
-            <a:r>
-              <a:t>  Open qa-automation-kb in Cursor</a:t>
-            </a:r>
-          </a:p>
-          <a:p>
-            <a:pPr>
-              <a:lnSpc>
-                <a:spcPct val="130000"/>
-              </a:lnSpc>
-              <a:spcAft>
-                <a:spcPts val="800"/>
-              </a:spcAft>
-              <a:defRPr sz="1400">
-                <a:solidFill>
-                  <a:srgbClr val="1E293B"/>
-                </a:solidFill>
-                <a:latin typeface="Segoe UI"/>
-              </a:defRPr>
-            </a:pPr>
-            <a:r>
-              <a:t>  00_SYSTEM/PROMPTS.md → section H</a:t>
-            </a:r>
-          </a:p>
-          <a:p>
-            <a:pPr>
-              <a:lnSpc>
-                <a:spcPct val="130000"/>
-              </a:lnSpc>
-              <a:spcAft>
-                <a:spcPts val="800"/>
-              </a:spcAft>
-              <a:defRPr sz="1400">
-                <a:solidFill>
-                  <a:srgbClr val="1E293B"/>
-                </a:solidFill>
-                <a:latin typeface="Segoe UI"/>
-              </a:defRPr>
-            </a:pPr>
-            <a:r>
-              <a:t>  Provide: date, feature, error, report URL, folder path, file list</a:t>
-            </a:r>
-          </a:p>
-          <a:p>
-            <a:pPr>
-              <a:lnSpc>
-                <a:spcPct val="130000"/>
-              </a:lnSpc>
-              <a:spcAft>
-                <a:spcPts val="800"/>
-              </a:spcAft>
-              <a:defRPr sz="1400">
-                <a:solidFill>
-                  <a:srgbClr val="1E293B"/>
-                </a:solidFill>
-                <a:latin typeface="Segoe UI"/>
-              </a:defRPr>
-            </a:pPr>
-            <a:r>
-              <a:t>  Attach failure screenshots in chat for richer context</a:t>
-            </a:r>
-          </a:p>
-          <a:p>
-            <a:pPr>
-              <a:lnSpc>
-                <a:spcPct val="130000"/>
-              </a:lnSpc>
-              <a:spcAft>
-                <a:spcPts val="800"/>
-              </a:spcAft>
-              <a:defRPr sz="1400">
-                <a:solidFill>
-                  <a:srgbClr val="1E293B"/>
-                </a:solidFill>
-                <a:latin typeface="Segoe UI"/>
-              </a:defRPr>
-            </a:pPr>
-            <a:r>
-              <a:t>  </a:t>
-            </a:r>
-          </a:p>
-          <a:p>
-            <a:pPr>
-              <a:lnSpc>
-                <a:spcPct val="130000"/>
-              </a:lnSpc>
-              <a:spcAft>
-                <a:spcPts val="800"/>
-              </a:spcAft>
-              <a:defRPr sz="1400">
-                <a:solidFill>
-                  <a:srgbClr val="1E293B"/>
-                </a:solidFill>
-                <a:latin typeface="Segoe UI"/>
-              </a:defRPr>
-            </a:pPr>
-            <a:r>
-              <a:t>  Output sections:</a:t>
-            </a:r>
-          </a:p>
-          <a:p>
-            <a:pPr>
-              <a:lnSpc>
-                <a:spcPct val="130000"/>
-              </a:lnSpc>
-              <a:spcAft>
-                <a:spcPts val="800"/>
-              </a:spcAft>
-              <a:defRPr sz="1400">
-                <a:solidFill>
-                  <a:srgbClr val="1E293B"/>
-                </a:solidFill>
-                <a:latin typeface="Segoe UI"/>
-              </a:defRPr>
-            </a:pPr>
-            <a:r>
-              <a:t>  • JIRA copy-paste block (Summary, Steps, Env, Priority)</a:t>
-            </a:r>
-          </a:p>
-          <a:p>
-            <a:pPr>
-              <a:lnSpc>
-                <a:spcPct val="130000"/>
-              </a:lnSpc>
-              <a:spcAft>
-                <a:spcPts val="800"/>
-              </a:spcAft>
-              <a:defRPr sz="1400">
-                <a:solidFill>
-                  <a:srgbClr val="1E293B"/>
-                </a:solidFill>
-                <a:latin typeface="Segoe UI"/>
-              </a:defRPr>
-            </a:pPr>
-            <a:r>
-              <a:t>  • Failure email — leadership-approved To/Cc</a:t>
-            </a:r>
-          </a:p>
-          <a:p>
-            <a:pPr>
-              <a:lnSpc>
-                <a:spcPct val="130000"/>
-              </a:lnSpc>
-              <a:spcAft>
-                <a:spcPts val="800"/>
-              </a:spcAft>
-              <a:defRPr sz="1400">
-                <a:solidFill>
-                  <a:srgbClr val="1E293B"/>
-                </a:solidFill>
-                <a:latin typeface="Segoe UI"/>
-              </a:defRPr>
-            </a:pPr>
-            <a:r>
-              <a:t>  • Teams message with JIRA + report links</a:t>
-            </a:r>
-          </a:p>
-          <a:p>
-            <a:pPr>
-              <a:lnSpc>
-                <a:spcPct val="130000"/>
-              </a:lnSpc>
-              <a:spcAft>
-                <a:spcPts val="800"/>
-              </a:spcAft>
-              <a:defRPr sz="1400">
-                <a:solidFill>
-                  <a:srgbClr val="1E293B"/>
-                </a:solidFill>
-                <a:latin typeface="Segoe UI"/>
-              </a:defRPr>
-            </a:pPr>
-            <a:r>
-              <a:t>  • Resolution email placeholder (template 1b)</a:t>
-            </a:r>
-          </a:p>
-        </p:txBody>
-      </p:sp>
-      <p:sp>
-        <p:nvSpPr>
-          <p:cNvPr id="7" name="Rounded Rectangle 6"/>
-          <p:cNvSpPr/>
-          <p:nvPr/>
-        </p:nvSpPr>
-        <p:spPr>
-          <a:xfrm>
-            <a:off x="6263640" y="1298448"/>
-            <a:ext cx="5477256" cy="5001768"/>
+            <a:ext cx="5349240" cy="2148840"/>
           </a:xfrm>
           <a:prstGeom prst="roundRect">
             <a:avLst>
@@ -10527,40 +11947,59 @@
           </a:p>
         </p:txBody>
       </p:sp>
-      <p:pic>
-        <p:nvPicPr>
-          <p:cNvPr id="8" name="Picture 7" descr="chart_toolchain.png"/>
-          <p:cNvPicPr>
-            <a:picLocks noChangeAspect="1"/>
-          </p:cNvPicPr>
-          <p:nvPr/>
-        </p:nvPicPr>
-        <p:blipFill>
-          <a:blip r:embed="rId2"/>
-          <a:stretch>
-            <a:fillRect/>
-          </a:stretch>
-        </p:blipFill>
-        <p:spPr>
-          <a:xfrm>
-            <a:off x="6373368" y="1408176"/>
-            <a:ext cx="5257800" cy="2281478"/>
-          </a:xfrm>
-          <a:prstGeom prst="rect">
-            <a:avLst/>
-          </a:prstGeom>
-        </p:spPr>
-      </p:pic>
-      <p:sp>
-        <p:nvSpPr>
-          <p:cNvPr id="9" name="TextBox 8"/>
+      <p:sp>
+        <p:nvSpPr>
+          <p:cNvPr id="7" name="Rectangle 6"/>
+          <p:cNvSpPr/>
+          <p:nvPr/>
+        </p:nvSpPr>
+        <p:spPr>
+          <a:xfrm>
+            <a:off x="548640" y="1298448"/>
+            <a:ext cx="5349240" cy="73152"/>
+          </a:xfrm>
+          <a:prstGeom prst="rect">
+            <a:avLst/>
+          </a:prstGeom>
+          <a:solidFill>
+            <a:srgbClr val="C27800"/>
+          </a:solidFill>
+          <a:ln>
+            <a:noFill/>
+          </a:ln>
+        </p:spPr>
+        <p:style>
+          <a:lnRef idx="1">
+            <a:schemeClr val="accent1"/>
+          </a:lnRef>
+          <a:fillRef idx="3">
+            <a:schemeClr val="accent1"/>
+          </a:fillRef>
+          <a:effectRef idx="2">
+            <a:schemeClr val="accent1"/>
+          </a:effectRef>
+          <a:fontRef idx="minor">
+            <a:schemeClr val="lt1"/>
+          </a:fontRef>
+        </p:style>
+        <p:txBody>
+          <a:bodyPr rtlCol="0" anchor="ctr"/>
+          <a:lstStyle/>
+          <a:p>
+            <a:pPr algn="ctr"/>
+          </a:p>
+        </p:txBody>
+      </p:sp>
+      <p:sp>
+        <p:nvSpPr>
+          <p:cNvPr id="8" name="TextBox 7"/>
           <p:cNvSpPr txBox="1"/>
           <p:nvPr/>
         </p:nvSpPr>
         <p:spPr>
           <a:xfrm>
-            <a:off x="6373368" y="3744518"/>
-            <a:ext cx="5257800" cy="347472"/>
+            <a:off x="749808" y="1463040"/>
+            <a:ext cx="457200" cy="365760"/>
           </a:xfrm>
           <a:prstGeom prst="rect">
             <a:avLst/>
@@ -10573,30 +12012,30 @@
           </a:bodyPr>
           <a:lstStyle/>
           <a:p>
-            <a:pPr algn="ctr">
-              <a:defRPr sz="1000" b="0">
-                <a:solidFill>
-                  <a:srgbClr val="94A3B8"/>
-                </a:solidFill>
-                <a:latin typeface="Segoe UI"/>
-              </a:defRPr>
-            </a:pPr>
-            <a:r>
-              <a:t>Prompt H toolchain</a:t>
-            </a:r>
-          </a:p>
-        </p:txBody>
-      </p:sp>
-      <p:sp>
-        <p:nvSpPr>
-          <p:cNvPr id="10" name="TextBox 9"/>
+            <a:pPr algn="l">
+              <a:defRPr sz="2200" b="1">
+                <a:solidFill>
+                  <a:srgbClr val="C27800"/>
+                </a:solidFill>
+                <a:latin typeface="Segoe UI"/>
+              </a:defRPr>
+            </a:pPr>
+            <a:r>
+              <a:t>01</a:t>
+            </a:r>
+          </a:p>
+        </p:txBody>
+      </p:sp>
+      <p:sp>
+        <p:nvSpPr>
+          <p:cNvPr id="9" name="TextBox 8"/>
           <p:cNvSpPr txBox="1"/>
           <p:nvPr/>
         </p:nvSpPr>
         <p:spPr>
           <a:xfrm>
-            <a:off x="548640" y="6473952"/>
-            <a:ext cx="9144000" cy="256032"/>
+            <a:off x="749808" y="1801368"/>
+            <a:ext cx="4946904" cy="365760"/>
           </a:xfrm>
           <a:prstGeom prst="rect">
             <a:avLst/>
@@ -10610,6 +12049,672 @@
           <a:lstStyle/>
           <a:p>
             <a:pPr algn="l">
+              <a:defRPr sz="1600" b="1">
+                <a:solidFill>
+                  <a:srgbClr val="003241"/>
+                </a:solidFill>
+                <a:latin typeface="Segoe UI"/>
+              </a:defRPr>
+            </a:pPr>
+            <a:r>
+              <a:t>Triage &amp; classify</a:t>
+            </a:r>
+          </a:p>
+        </p:txBody>
+      </p:sp>
+      <p:sp>
+        <p:nvSpPr>
+          <p:cNvPr id="10" name="TextBox 9"/>
+          <p:cNvSpPr txBox="1"/>
+          <p:nvPr/>
+        </p:nvSpPr>
+        <p:spPr>
+          <a:xfrm>
+            <a:off x="749808" y="2167128"/>
+            <a:ext cx="4946904" cy="1188720"/>
+          </a:xfrm>
+          <a:prstGeom prst="rect">
+            <a:avLst/>
+          </a:prstGeom>
+          <a:noFill/>
+        </p:spPr>
+        <p:txBody>
+          <a:bodyPr wrap="square" anchor="t" lIns="50800" rIns="50800">
+            <a:spAutoFit/>
+          </a:bodyPr>
+          <a:lstStyle/>
+          <a:p>
+            <a:pPr algn="l">
+              <a:defRPr sz="1250" b="0">
+                <a:solidFill>
+                  <a:srgbClr val="64748B"/>
+                </a:solidFill>
+                <a:latin typeface="Segoe UI"/>
+              </a:defRPr>
+            </a:pPr>
+            <a:r>
+              <a:t>process/TRIAGE_RULES.md. Rerun locally. Env vs flaky vs defect. Do not log JIRA for noise.</a:t>
+            </a:r>
+          </a:p>
+        </p:txBody>
+      </p:sp>
+      <p:sp>
+        <p:nvSpPr>
+          <p:cNvPr id="11" name="Rounded Rectangle 10"/>
+          <p:cNvSpPr/>
+          <p:nvPr/>
+        </p:nvSpPr>
+        <p:spPr>
+          <a:xfrm>
+            <a:off x="6263640" y="1298448"/>
+            <a:ext cx="5349240" cy="2148840"/>
+          </a:xfrm>
+          <a:prstGeom prst="roundRect">
+            <a:avLst>
+              <a:gd name="adj" fmla="val 6000"/>
+            </a:avLst>
+          </a:prstGeom>
+          <a:solidFill>
+            <a:srgbClr val="FFFFFF"/>
+          </a:solidFill>
+          <a:ln w="15875">
+            <a:solidFill>
+              <a:srgbClr val="E2E8F0"/>
+            </a:solidFill>
+          </a:ln>
+        </p:spPr>
+        <p:style>
+          <a:lnRef idx="1">
+            <a:schemeClr val="accent1"/>
+          </a:lnRef>
+          <a:fillRef idx="3">
+            <a:schemeClr val="accent1"/>
+          </a:fillRef>
+          <a:effectRef idx="2">
+            <a:schemeClr val="accent1"/>
+          </a:effectRef>
+          <a:fontRef idx="minor">
+            <a:schemeClr val="lt1"/>
+          </a:fontRef>
+        </p:style>
+        <p:txBody>
+          <a:bodyPr rtlCol="0" anchor="ctr"/>
+          <a:lstStyle/>
+          <a:p>
+            <a:pPr algn="ctr"/>
+          </a:p>
+        </p:txBody>
+      </p:sp>
+      <p:sp>
+        <p:nvSpPr>
+          <p:cNvPr id="12" name="Rectangle 11"/>
+          <p:cNvSpPr/>
+          <p:nvPr/>
+        </p:nvSpPr>
+        <p:spPr>
+          <a:xfrm>
+            <a:off x="6263640" y="1298448"/>
+            <a:ext cx="5349240" cy="73152"/>
+          </a:xfrm>
+          <a:prstGeom prst="rect">
+            <a:avLst/>
+          </a:prstGeom>
+          <a:solidFill>
+            <a:srgbClr val="026B84"/>
+          </a:solidFill>
+          <a:ln>
+            <a:noFill/>
+          </a:ln>
+        </p:spPr>
+        <p:style>
+          <a:lnRef idx="1">
+            <a:schemeClr val="accent1"/>
+          </a:lnRef>
+          <a:fillRef idx="3">
+            <a:schemeClr val="accent1"/>
+          </a:fillRef>
+          <a:effectRef idx="2">
+            <a:schemeClr val="accent1"/>
+          </a:effectRef>
+          <a:fontRef idx="minor">
+            <a:schemeClr val="lt1"/>
+          </a:fontRef>
+        </p:style>
+        <p:txBody>
+          <a:bodyPr rtlCol="0" anchor="ctr"/>
+          <a:lstStyle/>
+          <a:p>
+            <a:pPr algn="ctr"/>
+          </a:p>
+        </p:txBody>
+      </p:sp>
+      <p:sp>
+        <p:nvSpPr>
+          <p:cNvPr id="13" name="TextBox 12"/>
+          <p:cNvSpPr txBox="1"/>
+          <p:nvPr/>
+        </p:nvSpPr>
+        <p:spPr>
+          <a:xfrm>
+            <a:off x="6464808" y="1463040"/>
+            <a:ext cx="457200" cy="365760"/>
+          </a:xfrm>
+          <a:prstGeom prst="rect">
+            <a:avLst/>
+          </a:prstGeom>
+          <a:noFill/>
+        </p:spPr>
+        <p:txBody>
+          <a:bodyPr wrap="square" anchor="t" lIns="50800" rIns="50800">
+            <a:spAutoFit/>
+          </a:bodyPr>
+          <a:lstStyle/>
+          <a:p>
+            <a:pPr algn="l">
+              <a:defRPr sz="2200" b="1">
+                <a:solidFill>
+                  <a:srgbClr val="026B84"/>
+                </a:solidFill>
+                <a:latin typeface="Segoe UI"/>
+              </a:defRPr>
+            </a:pPr>
+            <a:r>
+              <a:t>02</a:t>
+            </a:r>
+          </a:p>
+        </p:txBody>
+      </p:sp>
+      <p:sp>
+        <p:nvSpPr>
+          <p:cNvPr id="14" name="TextBox 13"/>
+          <p:cNvSpPr txBox="1"/>
+          <p:nvPr/>
+        </p:nvSpPr>
+        <p:spPr>
+          <a:xfrm>
+            <a:off x="6464808" y="1801368"/>
+            <a:ext cx="4946904" cy="365760"/>
+          </a:xfrm>
+          <a:prstGeom prst="rect">
+            <a:avLst/>
+          </a:prstGeom>
+          <a:noFill/>
+        </p:spPr>
+        <p:txBody>
+          <a:bodyPr wrap="square" anchor="t" lIns="50800" rIns="50800">
+            <a:spAutoFit/>
+          </a:bodyPr>
+          <a:lstStyle/>
+          <a:p>
+            <a:pPr algn="l">
+              <a:defRPr sz="1600" b="1">
+                <a:solidFill>
+                  <a:srgbClr val="003241"/>
+                </a:solidFill>
+                <a:latin typeface="Segoe UI"/>
+              </a:defRPr>
+            </a:pPr>
+            <a:r>
+              <a:t>Evidence folder</a:t>
+            </a:r>
+          </a:p>
+        </p:txBody>
+      </p:sp>
+      <p:sp>
+        <p:nvSpPr>
+          <p:cNvPr id="15" name="TextBox 14"/>
+          <p:cNvSpPr txBox="1"/>
+          <p:nvPr/>
+        </p:nvSpPr>
+        <p:spPr>
+          <a:xfrm>
+            <a:off x="6464808" y="2167128"/>
+            <a:ext cx="4946904" cy="1188720"/>
+          </a:xfrm>
+          <a:prstGeom prst="rect">
+            <a:avLst/>
+          </a:prstGeom>
+          <a:noFill/>
+        </p:spPr>
+        <p:txBody>
+          <a:bodyPr wrap="square" anchor="t" lIns="50800" rIns="50800">
+            <a:spAutoFit/>
+          </a:bodyPr>
+          <a:lstStyle/>
+          <a:p>
+            <a:pPr algn="l">
+              <a:defRPr sz="1250" b="0">
+                <a:solidFill>
+                  <a:srgbClr val="64748B"/>
+                </a:solidFill>
+                <a:latin typeface="Segoe UI"/>
+              </a:defRPr>
+            </a:pPr>
+            <a:r>
+              <a:t>evidence/regression-reports/[MMDDYYYY]/ — screenshots, logs, test data, one bug .md per issue. scripts/new-evidence-folder.ps1</a:t>
+            </a:r>
+          </a:p>
+        </p:txBody>
+      </p:sp>
+      <p:sp>
+        <p:nvSpPr>
+          <p:cNvPr id="16" name="Rounded Rectangle 15"/>
+          <p:cNvSpPr/>
+          <p:nvPr/>
+        </p:nvSpPr>
+        <p:spPr>
+          <a:xfrm>
+            <a:off x="548640" y="3813048"/>
+            <a:ext cx="5349240" cy="2148840"/>
+          </a:xfrm>
+          <a:prstGeom prst="roundRect">
+            <a:avLst>
+              <a:gd name="adj" fmla="val 6000"/>
+            </a:avLst>
+          </a:prstGeom>
+          <a:solidFill>
+            <a:srgbClr val="FFFFFF"/>
+          </a:solidFill>
+          <a:ln w="15875">
+            <a:solidFill>
+              <a:srgbClr val="E2E8F0"/>
+            </a:solidFill>
+          </a:ln>
+        </p:spPr>
+        <p:style>
+          <a:lnRef idx="1">
+            <a:schemeClr val="accent1"/>
+          </a:lnRef>
+          <a:fillRef idx="3">
+            <a:schemeClr val="accent1"/>
+          </a:fillRef>
+          <a:effectRef idx="2">
+            <a:schemeClr val="accent1"/>
+          </a:effectRef>
+          <a:fontRef idx="minor">
+            <a:schemeClr val="lt1"/>
+          </a:fontRef>
+        </p:style>
+        <p:txBody>
+          <a:bodyPr rtlCol="0" anchor="ctr"/>
+          <a:lstStyle/>
+          <a:p>
+            <a:pPr algn="ctr"/>
+          </a:p>
+        </p:txBody>
+      </p:sp>
+      <p:sp>
+        <p:nvSpPr>
+          <p:cNvPr id="17" name="Rectangle 16"/>
+          <p:cNvSpPr/>
+          <p:nvPr/>
+        </p:nvSpPr>
+        <p:spPr>
+          <a:xfrm>
+            <a:off x="548640" y="3813048"/>
+            <a:ext cx="5349240" cy="73152"/>
+          </a:xfrm>
+          <a:prstGeom prst="rect">
+            <a:avLst/>
+          </a:prstGeom>
+          <a:solidFill>
+            <a:srgbClr val="2D65B4"/>
+          </a:solidFill>
+          <a:ln>
+            <a:noFill/>
+          </a:ln>
+        </p:spPr>
+        <p:style>
+          <a:lnRef idx="1">
+            <a:schemeClr val="accent1"/>
+          </a:lnRef>
+          <a:fillRef idx="3">
+            <a:schemeClr val="accent1"/>
+          </a:fillRef>
+          <a:effectRef idx="2">
+            <a:schemeClr val="accent1"/>
+          </a:effectRef>
+          <a:fontRef idx="minor">
+            <a:schemeClr val="lt1"/>
+          </a:fontRef>
+        </p:style>
+        <p:txBody>
+          <a:bodyPr rtlCol="0" anchor="ctr"/>
+          <a:lstStyle/>
+          <a:p>
+            <a:pPr algn="ctr"/>
+          </a:p>
+        </p:txBody>
+      </p:sp>
+      <p:sp>
+        <p:nvSpPr>
+          <p:cNvPr id="18" name="TextBox 17"/>
+          <p:cNvSpPr txBox="1"/>
+          <p:nvPr/>
+        </p:nvSpPr>
+        <p:spPr>
+          <a:xfrm>
+            <a:off x="749808" y="3977640"/>
+            <a:ext cx="457200" cy="365760"/>
+          </a:xfrm>
+          <a:prstGeom prst="rect">
+            <a:avLst/>
+          </a:prstGeom>
+          <a:noFill/>
+        </p:spPr>
+        <p:txBody>
+          <a:bodyPr wrap="square" anchor="t" lIns="50800" rIns="50800">
+            <a:spAutoFit/>
+          </a:bodyPr>
+          <a:lstStyle/>
+          <a:p>
+            <a:pPr algn="l">
+              <a:defRPr sz="2200" b="1">
+                <a:solidFill>
+                  <a:srgbClr val="2D65B4"/>
+                </a:solidFill>
+                <a:latin typeface="Segoe UI"/>
+              </a:defRPr>
+            </a:pPr>
+            <a:r>
+              <a:t>03</a:t>
+            </a:r>
+          </a:p>
+        </p:txBody>
+      </p:sp>
+      <p:sp>
+        <p:nvSpPr>
+          <p:cNvPr id="19" name="TextBox 18"/>
+          <p:cNvSpPr txBox="1"/>
+          <p:nvPr/>
+        </p:nvSpPr>
+        <p:spPr>
+          <a:xfrm>
+            <a:off x="749808" y="4315968"/>
+            <a:ext cx="4946904" cy="365760"/>
+          </a:xfrm>
+          <a:prstGeom prst="rect">
+            <a:avLst/>
+          </a:prstGeom>
+          <a:noFill/>
+        </p:spPr>
+        <p:txBody>
+          <a:bodyPr wrap="square" anchor="t" lIns="50800" rIns="50800">
+            <a:spAutoFit/>
+          </a:bodyPr>
+          <a:lstStyle/>
+          <a:p>
+            <a:pPr algn="l">
+              <a:defRPr sz="1600" b="1">
+                <a:solidFill>
+                  <a:srgbClr val="003241"/>
+                </a:solidFill>
+                <a:latin typeface="Segoe UI"/>
+              </a:defRPr>
+            </a:pPr>
+            <a:r>
+              <a:t>Cursor Prompt H</a:t>
+            </a:r>
+          </a:p>
+        </p:txBody>
+      </p:sp>
+      <p:sp>
+        <p:nvSpPr>
+          <p:cNvPr id="20" name="TextBox 19"/>
+          <p:cNvSpPr txBox="1"/>
+          <p:nvPr/>
+        </p:nvSpPr>
+        <p:spPr>
+          <a:xfrm>
+            <a:off x="749808" y="4681728"/>
+            <a:ext cx="4946904" cy="1188720"/>
+          </a:xfrm>
+          <a:prstGeom prst="rect">
+            <a:avLst/>
+          </a:prstGeom>
+          <a:noFill/>
+        </p:spPr>
+        <p:txBody>
+          <a:bodyPr wrap="square" anchor="t" lIns="50800" rIns="50800">
+            <a:spAutoFit/>
+          </a:bodyPr>
+          <a:lstStyle/>
+          <a:p>
+            <a:pPr algn="l">
+              <a:defRPr sz="1250" b="0">
+                <a:solidFill>
+                  <a:srgbClr val="64748B"/>
+                </a:solidFill>
+                <a:latin typeface="Segoe UI"/>
+              </a:defRPr>
+            </a:pPr>
+            <a:r>
+              <a:t>prompts/02-bug-report-prompt-h.md — JIRA block, failure email, Teams message, resolution placeholder in one file.</a:t>
+            </a:r>
+          </a:p>
+        </p:txBody>
+      </p:sp>
+      <p:sp>
+        <p:nvSpPr>
+          <p:cNvPr id="21" name="Rounded Rectangle 20"/>
+          <p:cNvSpPr/>
+          <p:nvPr/>
+        </p:nvSpPr>
+        <p:spPr>
+          <a:xfrm>
+            <a:off x="6263640" y="3813048"/>
+            <a:ext cx="5349240" cy="2148840"/>
+          </a:xfrm>
+          <a:prstGeom prst="roundRect">
+            <a:avLst>
+              <a:gd name="adj" fmla="val 6000"/>
+            </a:avLst>
+          </a:prstGeom>
+          <a:solidFill>
+            <a:srgbClr val="FFFFFF"/>
+          </a:solidFill>
+          <a:ln w="15875">
+            <a:solidFill>
+              <a:srgbClr val="E2E8F0"/>
+            </a:solidFill>
+          </a:ln>
+        </p:spPr>
+        <p:style>
+          <a:lnRef idx="1">
+            <a:schemeClr val="accent1"/>
+          </a:lnRef>
+          <a:fillRef idx="3">
+            <a:schemeClr val="accent1"/>
+          </a:fillRef>
+          <a:effectRef idx="2">
+            <a:schemeClr val="accent1"/>
+          </a:effectRef>
+          <a:fontRef idx="minor">
+            <a:schemeClr val="lt1"/>
+          </a:fontRef>
+        </p:style>
+        <p:txBody>
+          <a:bodyPr rtlCol="0" anchor="ctr"/>
+          <a:lstStyle/>
+          <a:p>
+            <a:pPr algn="ctr"/>
+          </a:p>
+        </p:txBody>
+      </p:sp>
+      <p:sp>
+        <p:nvSpPr>
+          <p:cNvPr id="22" name="Rectangle 21"/>
+          <p:cNvSpPr/>
+          <p:nvPr/>
+        </p:nvSpPr>
+        <p:spPr>
+          <a:xfrm>
+            <a:off x="6263640" y="3813048"/>
+            <a:ext cx="5349240" cy="73152"/>
+          </a:xfrm>
+          <a:prstGeom prst="rect">
+            <a:avLst/>
+          </a:prstGeom>
+          <a:solidFill>
+            <a:srgbClr val="009E86"/>
+          </a:solidFill>
+          <a:ln>
+            <a:noFill/>
+          </a:ln>
+        </p:spPr>
+        <p:style>
+          <a:lnRef idx="1">
+            <a:schemeClr val="accent1"/>
+          </a:lnRef>
+          <a:fillRef idx="3">
+            <a:schemeClr val="accent1"/>
+          </a:fillRef>
+          <a:effectRef idx="2">
+            <a:schemeClr val="accent1"/>
+          </a:effectRef>
+          <a:fontRef idx="minor">
+            <a:schemeClr val="lt1"/>
+          </a:fontRef>
+        </p:style>
+        <p:txBody>
+          <a:bodyPr rtlCol="0" anchor="ctr"/>
+          <a:lstStyle/>
+          <a:p>
+            <a:pPr algn="ctr"/>
+          </a:p>
+        </p:txBody>
+      </p:sp>
+      <p:sp>
+        <p:nvSpPr>
+          <p:cNvPr id="23" name="TextBox 22"/>
+          <p:cNvSpPr txBox="1"/>
+          <p:nvPr/>
+        </p:nvSpPr>
+        <p:spPr>
+          <a:xfrm>
+            <a:off x="6464808" y="3977640"/>
+            <a:ext cx="457200" cy="365760"/>
+          </a:xfrm>
+          <a:prstGeom prst="rect">
+            <a:avLst/>
+          </a:prstGeom>
+          <a:noFill/>
+        </p:spPr>
+        <p:txBody>
+          <a:bodyPr wrap="square" anchor="t" lIns="50800" rIns="50800">
+            <a:spAutoFit/>
+          </a:bodyPr>
+          <a:lstStyle/>
+          <a:p>
+            <a:pPr algn="l">
+              <a:defRPr sz="2200" b="1">
+                <a:solidFill>
+                  <a:srgbClr val="009E86"/>
+                </a:solidFill>
+                <a:latin typeface="Segoe UI"/>
+              </a:defRPr>
+            </a:pPr>
+            <a:r>
+              <a:t>04</a:t>
+            </a:r>
+          </a:p>
+        </p:txBody>
+      </p:sp>
+      <p:sp>
+        <p:nvSpPr>
+          <p:cNvPr id="24" name="TextBox 23"/>
+          <p:cNvSpPr txBox="1"/>
+          <p:nvPr/>
+        </p:nvSpPr>
+        <p:spPr>
+          <a:xfrm>
+            <a:off x="6464808" y="4315968"/>
+            <a:ext cx="4946904" cy="365760"/>
+          </a:xfrm>
+          <a:prstGeom prst="rect">
+            <a:avLst/>
+          </a:prstGeom>
+          <a:noFill/>
+        </p:spPr>
+        <p:txBody>
+          <a:bodyPr wrap="square" anchor="t" lIns="50800" rIns="50800">
+            <a:spAutoFit/>
+          </a:bodyPr>
+          <a:lstStyle/>
+          <a:p>
+            <a:pPr algn="l">
+              <a:defRPr sz="1600" b="1">
+                <a:solidFill>
+                  <a:srgbClr val="003241"/>
+                </a:solidFill>
+                <a:latin typeface="Segoe UI"/>
+              </a:defRPr>
+            </a:pPr>
+            <a:r>
+              <a:t>GitLab change set</a:t>
+            </a:r>
+          </a:p>
+        </p:txBody>
+      </p:sp>
+      <p:sp>
+        <p:nvSpPr>
+          <p:cNvPr id="25" name="TextBox 24"/>
+          <p:cNvSpPr txBox="1"/>
+          <p:nvPr/>
+        </p:nvSpPr>
+        <p:spPr>
+          <a:xfrm>
+            <a:off x="6464808" y="4681728"/>
+            <a:ext cx="4946904" cy="1188720"/>
+          </a:xfrm>
+          <a:prstGeom prst="rect">
+            <a:avLst/>
+          </a:prstGeom>
+          <a:noFill/>
+        </p:spPr>
+        <p:txBody>
+          <a:bodyPr wrap="square" anchor="t" lIns="50800" rIns="50800">
+            <a:spAutoFit/>
+          </a:bodyPr>
+          <a:lstStyle/>
+          <a:p>
+            <a:pPr algn="l">
+              <a:defRPr sz="1250" b="0">
+                <a:solidFill>
+                  <a:srgbClr val="64748B"/>
+                </a:solidFill>
+                <a:latin typeface="Segoe UI"/>
+              </a:defRPr>
+            </a:pPr>
+            <a:r>
+              <a:t>GitLab Project Manager — who merged, who committed, which branches between last green run and failure.</a:t>
+            </a:r>
+          </a:p>
+        </p:txBody>
+      </p:sp>
+      <p:sp>
+        <p:nvSpPr>
+          <p:cNvPr id="26" name="TextBox 25"/>
+          <p:cNvSpPr txBox="1"/>
+          <p:nvPr/>
+        </p:nvSpPr>
+        <p:spPr>
+          <a:xfrm>
+            <a:off x="548640" y="6473952"/>
+            <a:ext cx="9144000" cy="256032"/>
+          </a:xfrm>
+          <a:prstGeom prst="rect">
+            <a:avLst/>
+          </a:prstGeom>
+          <a:noFill/>
+        </p:spPr>
+        <p:txBody>
+          <a:bodyPr wrap="square" anchor="t" lIns="50800" rIns="50800">
+            <a:spAutoFit/>
+          </a:bodyPr>
+          <a:lstStyle/>
+          <a:p>
+            <a:pPr algn="l">
               <a:defRPr sz="900" b="0">
                 <a:solidFill>
                   <a:srgbClr val="94A3B8"/>
@@ -10625,7 +12730,7 @@
       </p:sp>
       <p:sp>
         <p:nvSpPr>
-          <p:cNvPr id="11" name="TextBox 10"/>
+          <p:cNvPr id="27" name="TextBox 26"/>
           <p:cNvSpPr txBox="1"/>
           <p:nvPr/>
         </p:nvSpPr>
@@ -10804,7 +12909,7 @@
               </a:defRPr>
             </a:pPr>
             <a:r>
-              <a:t>Communication Standards</a:t>
+              <a:t>Evidence Folder — Copy Artifacts Here</a:t>
             </a:r>
           </a:p>
         </p:txBody>
@@ -10840,196 +12945,92 @@
               </a:defRPr>
             </a:pPr>
             <a:r>
-              <a:t>Leadership-approved templates</a:t>
-            </a:r>
-          </a:p>
-        </p:txBody>
-      </p:sp>
-      <p:sp>
-        <p:nvSpPr>
-          <p:cNvPr id="6" name="TextBox 5"/>
+              <a:t>BUG_REPORTING_PROCESS.md</a:t>
+            </a:r>
+          </a:p>
+        </p:txBody>
+      </p:sp>
+      <p:sp>
+        <p:nvSpPr>
+          <p:cNvPr id="6" name="Rounded Rectangle 5"/>
+          <p:cNvSpPr/>
+          <p:nvPr/>
+        </p:nvSpPr>
+        <p:spPr>
+          <a:xfrm>
+            <a:off x="548640" y="1298448"/>
+            <a:ext cx="11313871" cy="4910328"/>
+          </a:xfrm>
+          <a:prstGeom prst="roundRect">
+            <a:avLst>
+              <a:gd name="adj" fmla="val 6000"/>
+            </a:avLst>
+          </a:prstGeom>
+          <a:solidFill>
+            <a:srgbClr val="FFFFFF"/>
+          </a:solidFill>
+          <a:ln w="15875">
+            <a:solidFill>
+              <a:srgbClr val="E2E8F0"/>
+            </a:solidFill>
+          </a:ln>
+        </p:spPr>
+        <p:style>
+          <a:lnRef idx="1">
+            <a:schemeClr val="accent1"/>
+          </a:lnRef>
+          <a:fillRef idx="3">
+            <a:schemeClr val="accent1"/>
+          </a:fillRef>
+          <a:effectRef idx="2">
+            <a:schemeClr val="accent1"/>
+          </a:effectRef>
+          <a:fontRef idx="minor">
+            <a:schemeClr val="lt1"/>
+          </a:fontRef>
+        </p:style>
+        <p:txBody>
+          <a:bodyPr rtlCol="0" anchor="ctr"/>
+          <a:lstStyle/>
+          <a:p>
+            <a:pPr algn="ctr"/>
+          </a:p>
+        </p:txBody>
+      </p:sp>
+      <p:pic>
+        <p:nvPicPr>
+          <p:cNvPr id="7" name="Picture 6" descr="chart_evidence_folder.png"/>
+          <p:cNvPicPr>
+            <a:picLocks noChangeAspect="1"/>
+          </p:cNvPicPr>
+          <p:nvPr/>
+        </p:nvPicPr>
+        <p:blipFill>
+          <a:blip r:embed="rId2"/>
+          <a:stretch>
+            <a:fillRect/>
+          </a:stretch>
+        </p:blipFill>
+        <p:spPr>
+          <a:xfrm>
+            <a:off x="658368" y="1408176"/>
+            <a:ext cx="8149975" cy="4343400"/>
+          </a:xfrm>
+          <a:prstGeom prst="rect">
+            <a:avLst/>
+          </a:prstGeom>
+        </p:spPr>
+      </p:pic>
+      <p:sp>
+        <p:nvSpPr>
+          <p:cNvPr id="8" name="TextBox 7"/>
           <p:cNvSpPr txBox="1"/>
           <p:nvPr/>
         </p:nvSpPr>
         <p:spPr>
           <a:xfrm>
-            <a:off x="548640" y="1298448"/>
-            <a:ext cx="11094415" cy="4937760"/>
-          </a:xfrm>
-          <a:prstGeom prst="rect">
-            <a:avLst/>
-          </a:prstGeom>
-          <a:noFill/>
-        </p:spPr>
-        <p:txBody>
-          <a:bodyPr wrap="square">
-            <a:spAutoFit/>
-          </a:bodyPr>
-          <a:lstStyle/>
-          <a:p>
-            <a:pPr>
-              <a:lnSpc>
-                <a:spcPct val="130000"/>
-              </a:lnSpc>
-              <a:spcAft>
-                <a:spcPts val="800"/>
-              </a:spcAft>
-              <a:defRPr sz="1500">
-                <a:solidFill>
-                  <a:srgbClr val="1E293B"/>
-                </a:solidFill>
-                <a:latin typeface="Segoe UI"/>
-              </a:defRPr>
-            </a:pPr>
-            <a:r>
-              <a:t>  Teams and email templates are approved by leadership and senior QA resources</a:t>
-            </a:r>
-          </a:p>
-          <a:p>
-            <a:pPr>
-              <a:lnSpc>
-                <a:spcPct val="130000"/>
-              </a:lnSpc>
-              <a:spcAft>
-                <a:spcPts val="800"/>
-              </a:spcAft>
-              <a:defRPr sz="1500">
-                <a:solidFill>
-                  <a:srgbClr val="1E293B"/>
-                </a:solidFill>
-                <a:latin typeface="Segoe UI"/>
-              </a:defRPr>
-            </a:pPr>
-            <a:r>
-              <a:t>  Use Prompt H output — do not improvise distribution lists or email structure</a:t>
-            </a:r>
-          </a:p>
-          <a:p>
-            <a:pPr>
-              <a:lnSpc>
-                <a:spcPct val="130000"/>
-              </a:lnSpc>
-              <a:spcAft>
-                <a:spcPts val="800"/>
-              </a:spcAft>
-              <a:defRPr sz="1500">
-                <a:solidFill>
-                  <a:srgbClr val="1E293B"/>
-                </a:solidFill>
-                <a:latin typeface="Segoe UI"/>
-              </a:defRPr>
-            </a:pPr>
-            <a:r>
-              <a:t>  </a:t>
-            </a:r>
-          </a:p>
-          <a:p>
-            <a:pPr>
-              <a:lnSpc>
-                <a:spcPct val="130000"/>
-              </a:lnSpc>
-              <a:spcAft>
-                <a:spcPts val="800"/>
-              </a:spcAft>
-              <a:defRPr sz="1500">
-                <a:solidFill>
-                  <a:srgbClr val="1E293B"/>
-                </a:solidFill>
-                <a:latin typeface="Segoe UI"/>
-              </a:defRPr>
-            </a:pPr>
-            <a:r>
-              <a:t>  To: AGS Tech Leads, AGS Chapter Leads, AGS Development, Brian Danilczyk</a:t>
-            </a:r>
-          </a:p>
-          <a:p>
-            <a:pPr>
-              <a:lnSpc>
-                <a:spcPct val="130000"/>
-              </a:lnSpc>
-              <a:spcAft>
-                <a:spcPts val="800"/>
-              </a:spcAft>
-              <a:defRPr sz="1500">
-                <a:solidFill>
-                  <a:srgbClr val="1E293B"/>
-                </a:solidFill>
-                <a:latin typeface="Segoe UI"/>
-              </a:defRPr>
-            </a:pPr>
-            <a:r>
-              <a:t>  Cc: Rajib Akhter · Henry Dittmer · Phuong Huynh · Automation.Squad</a:t>
-            </a:r>
-          </a:p>
-          <a:p>
-            <a:pPr>
-              <a:lnSpc>
-                <a:spcPct val="130000"/>
-              </a:lnSpc>
-              <a:spcAft>
-                <a:spcPts val="800"/>
-              </a:spcAft>
-              <a:defRPr sz="1500">
-                <a:solidFill>
-                  <a:srgbClr val="1E293B"/>
-                </a:solidFill>
-                <a:latin typeface="Segoe UI"/>
-              </a:defRPr>
-            </a:pPr>
-            <a:r>
-              <a:t>  </a:t>
-            </a:r>
-          </a:p>
-          <a:p>
-            <a:pPr>
-              <a:lnSpc>
-                <a:spcPct val="130000"/>
-              </a:lnSpc>
-              <a:spcAft>
-                <a:spcPts val="800"/>
-              </a:spcAft>
-              <a:defRPr sz="1500">
-                <a:solidFill>
-                  <a:srgbClr val="1E293B"/>
-                </a:solidFill>
-                <a:latin typeface="Segoe UI"/>
-              </a:defRPr>
-            </a:pPr>
-            <a:r>
-              <a:t>  Subject: [Priority] [Feature] — [Issue Type]</a:t>
-            </a:r>
-          </a:p>
-          <a:p>
-            <a:pPr>
-              <a:lnSpc>
-                <a:spcPct val="130000"/>
-              </a:lnSpc>
-              <a:spcAft>
-                <a:spcPts val="800"/>
-              </a:spcAft>
-              <a:defRPr sz="1500">
-                <a:solidFill>
-                  <a:srgbClr val="1E293B"/>
-                </a:solidFill>
-                <a:latin typeface="Segoe UI"/>
-              </a:defRPr>
-            </a:pPr>
-            <a:r>
-              <a:t>  Sources: Confluence Bug Handling PDFs (1. Failure · 1b. Resolution)</a:t>
-            </a:r>
-          </a:p>
-        </p:txBody>
-      </p:sp>
-      <p:sp>
-        <p:nvSpPr>
-          <p:cNvPr id="7" name="TextBox 6"/>
-          <p:cNvSpPr txBox="1"/>
-          <p:nvPr/>
-        </p:nvSpPr>
-        <p:spPr>
-          <a:xfrm>
-            <a:off x="548640" y="6473952"/>
-            <a:ext cx="9144000" cy="256032"/>
+            <a:off x="658368" y="5806440"/>
+            <a:ext cx="11094415" cy="347472"/>
           </a:xfrm>
           <a:prstGeom prst="rect">
             <a:avLst/>
@@ -11042,6 +13043,42 @@
           </a:bodyPr>
           <a:lstStyle/>
           <a:p>
+            <a:pPr algn="ctr">
+              <a:defRPr sz="1000" b="0">
+                <a:solidFill>
+                  <a:srgbClr val="94A3B8"/>
+                </a:solidFill>
+                <a:latin typeface="Segoe UI"/>
+              </a:defRPr>
+            </a:pPr>
+            <a:r>
+              <a:t>Naming: [MMDDYYYY]_[Feature]_[IssueType].md</a:t>
+            </a:r>
+          </a:p>
+        </p:txBody>
+      </p:sp>
+      <p:sp>
+        <p:nvSpPr>
+          <p:cNvPr id="9" name="TextBox 8"/>
+          <p:cNvSpPr txBox="1"/>
+          <p:nvPr/>
+        </p:nvSpPr>
+        <p:spPr>
+          <a:xfrm>
+            <a:off x="548640" y="6473952"/>
+            <a:ext cx="9144000" cy="256032"/>
+          </a:xfrm>
+          <a:prstGeom prst="rect">
+            <a:avLst/>
+          </a:prstGeom>
+          <a:noFill/>
+        </p:spPr>
+        <p:txBody>
+          <a:bodyPr wrap="square" anchor="t" lIns="50800" rIns="50800">
+            <a:spAutoFit/>
+          </a:bodyPr>
+          <a:lstStyle/>
+          <a:p>
             <a:pPr algn="l">
               <a:defRPr sz="900" b="0">
                 <a:solidFill>
@@ -11058,7 +13095,7 @@
       </p:sp>
       <p:sp>
         <p:nvSpPr>
-          <p:cNvPr id="8" name="TextBox 7"/>
+          <p:cNvPr id="10" name="TextBox 9"/>
           <p:cNvSpPr txBox="1"/>
           <p:nvPr/>
         </p:nvSpPr>
